--- a/PMeX Stock Module — Mockup Presentation.pptx
+++ b/PMeX Stock Module — Mockup Presentation.pptx
@@ -26,9 +26,10 @@
     <p:sldId id="274" r:id="rId20"/>
     <p:sldId id="275" r:id="rId21"/>
     <p:sldId id="276" r:id="rId22"/>
+    <p:sldId id="277" r:id="rId23"/>
   </p:sldIdLst>
   <p:notesMasterIdLst>
-    <p:notesMasterId r:id="rId23"/>
+    <p:notesMasterId r:id="rId24"/>
   </p:notesMasterIdLst>
   <p:sldSz cx="12192000" cy="6858000"/>
   <p:notesSz cx="6858000" cy="12192000"/>
@@ -1690,6 +1691,94 @@
             <a:fld id="{F7021451-1387-4CA6-816F-3879F97B5CBC}" type="slidenum">
               <a:rPr lang="en-US"/>
               <a:t>21</a:t>
+            </a:fld>
+            <a:endParaRPr lang="en-US"/>
+          </a:p>
+        </p:txBody>
+      </p:sp>
+    </p:spTree>
+    <p:extLst>
+      <p:ext uri="{BB962C8B-B14F-4D97-AF65-F5344CB8AC3E}">
+        <p14:creationId xmlns:p14="http://schemas.microsoft.com/office/powerpoint/2010/main" val="1024086991"/>
+      </p:ext>
+    </p:extLst>
+  </p:cSld>
+  <p:clrMapOvr>
+    <a:masterClrMapping/>
+  </p:clrMapOvr>
+</p:notes>
+</file>
+
+<file path=ppt/notesSlides/notesSlide22.xml><?xml version="1.0" encoding="utf-8"?>
+<p:notes xmlns:a="http://schemas.openxmlformats.org/drawingml/2006/main" xmlns:r="http://schemas.openxmlformats.org/officeDocument/2006/relationships" xmlns:p="http://schemas.openxmlformats.org/presentationml/2006/main">
+  <p:cSld>
+    <p:spTree>
+      <p:nvGrpSpPr>
+        <p:cNvPr id="1" name=""/>
+        <p:cNvGrpSpPr/>
+        <p:nvPr/>
+      </p:nvGrpSpPr>
+      <p:grpSpPr>
+        <a:xfrm>
+          <a:off x="0" y="0"/>
+          <a:ext cx="0" cy="0"/>
+          <a:chOff x="0" y="0"/>
+          <a:chExt cx="0" cy="0"/>
+        </a:xfrm>
+      </p:grpSpPr>
+      <p:sp>
+        <p:nvSpPr>
+          <p:cNvPr id="2" name="Slide Image Placeholder 1"/>
+          <p:cNvSpPr>
+            <a:spLocks noGrp="1" noRot="1" noChangeAspect="1"/>
+          </p:cNvSpPr>
+          <p:nvPr>
+            <p:ph type="sldImg"/>
+          </p:nvPr>
+        </p:nvSpPr>
+        <p:spPr/>
+      </p:sp>
+      <p:sp>
+        <p:nvSpPr>
+          <p:cNvPr id="3" name="Notes Placeholder 2"/>
+          <p:cNvSpPr>
+            <a:spLocks noGrp="1"/>
+          </p:cNvSpPr>
+          <p:nvPr>
+            <p:ph type="body" idx="1"/>
+          </p:nvPr>
+        </p:nvSpPr>
+        <p:spPr/>
+        <p:txBody>
+          <a:bodyPr/>
+          <a:lstStyle/>
+          <a:p>
+            <a:r>
+              <a:rPr lang="en-US" dirty="0"/>
+              <a:t/>
+            </a:r>
+            <a:endParaRPr lang="en-US" dirty="0"/>
+          </a:p>
+        </p:txBody>
+      </p:sp>
+      <p:sp>
+        <p:nvSpPr>
+          <p:cNvPr id="4" name="Slide Number Placeholder 3"/>
+          <p:cNvSpPr>
+            <a:spLocks noGrp="1"/>
+          </p:cNvSpPr>
+          <p:nvPr>
+            <p:ph type="sldNum" sz="quarter" idx="10"/>
+          </p:nvPr>
+        </p:nvSpPr>
+        <p:spPr/>
+        <p:txBody>
+          <a:bodyPr/>
+          <a:lstStyle/>
+          <a:p>
+            <a:fld id="{F7021451-1387-4CA6-816F-3879F97B5CBC}" type="slidenum">
+              <a:rPr lang="en-US"/>
+              <a:t>22</a:t>
             </a:fld>
             <a:endParaRPr lang="en-US"/>
           </a:p>
@@ -3035,7 +3124,7 @@
                 <a:ea typeface="Sarabun" pitchFamily="34" charset="-122"/>
                 <a:cs typeface="Sarabun" pitchFamily="34" charset="-120"/>
               </a:rPr>
-              <a:t>นำเสนอ Mockup ครบทั้ง 11 หน้าจอ — ทบทวน Business Flow และ UX ร่วมกัน ก่อนเริ่มพัฒนาระบบจริง</a:t>
+              <a:t>นำเสนอ Mockup ครบทั้ง 11 หน้าจอ — ทบทวนขั้นตอนการทำงานและหน้าตาระบบร่วมกัน ก่อนเริ่มพัฒนาระบบจริง</a:t>
             </a:r>
             <a:endParaRPr lang="en-US" sz="1700" dirty="0"/>
           </a:p>
@@ -3070,7 +3159,7 @@
         <p:spPr>
           <a:xfrm>
             <a:off x="1320800" y="4721820"/>
-            <a:ext cx="3119318" cy="238720"/>
+            <a:ext cx="5274469" cy="238720"/>
           </a:xfrm>
           <a:prstGeom prst="rect">
             <a:avLst/>
@@ -3099,7 +3188,7 @@
                 <a:ea typeface="Sarabun" pitchFamily="34" charset="-122"/>
                 <a:cs typeface="Sarabun" pitchFamily="34" charset="-120"/>
               </a:rPr>
-              <a:t>2 ตุลาคม 2569 · สรุปผลหลัง Round 1–11</a:t>
+              <a:t>2 ตุลาคม 2569 · ปรับปรุงตามความคิดเห็นของผู้ใช้งานมาแล้วหลายรอบ</a:t>
             </a:r>
             <a:endParaRPr lang="en-US" sz="1200" dirty="0"/>
           </a:p>
@@ -3478,7 +3567,7 @@
         <p:spPr>
           <a:xfrm>
             <a:off x="7874000" y="1960761"/>
-            <a:ext cx="2414466" cy="231775"/>
+            <a:ext cx="2291832" cy="231775"/>
           </a:xfrm>
           <a:prstGeom prst="rect">
             <a:avLst/>
@@ -3522,7 +3611,7 @@
         <p:spPr>
           <a:xfrm>
             <a:off x="7874000" y="2192536"/>
-            <a:ext cx="2812971" cy="215205"/>
+            <a:ext cx="2670096" cy="215205"/>
           </a:xfrm>
           <a:prstGeom prst="rect">
             <a:avLst/>
@@ -3551,7 +3640,7 @@
                 <a:ea typeface="Sarabun" pitchFamily="34" charset="-122"/>
                 <a:cs typeface="Sarabun" pitchFamily="34" charset="-120"/>
               </a:rPr>
-              <a:t>ด้วย Asset Tag / ชื่อโครงการ (Round 5)</a:t>
+              <a:t>ค้นหาด้วยรหัสอุปกรณ์หรือชื่อโครงการ</a:t>
             </a:r>
             <a:endParaRPr lang="en-US" sz="1150" dirty="0"/>
           </a:p>
@@ -3823,7 +3912,7 @@
                 <a:ea typeface="Sarabun" pitchFamily="34" charset="-122"/>
                 <a:cs typeface="Sarabun" pitchFamily="34" charset="-120"/>
               </a:rPr>
-              <a:t>บันทึกประกอบการต่ออายุ</a:t>
+              <a:t>ระบุเหตุผลที่ขอต่ออายุ</a:t>
             </a:r>
             <a:endParaRPr lang="en-US" sz="1150" dirty="0"/>
           </a:p>
@@ -3886,7 +3975,7 @@
         <p:spPr>
           <a:xfrm>
             <a:off x="7874000" y="3568402"/>
-            <a:ext cx="2659224" cy="231775"/>
+            <a:ext cx="3234890" cy="231775"/>
           </a:xfrm>
           <a:prstGeom prst="rect">
             <a:avLst/>
@@ -3930,7 +4019,7 @@
         <p:spPr>
           <a:xfrm>
             <a:off x="7874000" y="3800177"/>
-            <a:ext cx="3098125" cy="215205"/>
+            <a:ext cx="3768804" cy="215205"/>
           </a:xfrm>
           <a:prstGeom prst="rect">
             <a:avLst/>
@@ -3959,7 +4048,7 @@
                 <a:ea typeface="Sarabun" pitchFamily="34" charset="-122"/>
                 <a:cs typeface="Sarabun" pitchFamily="34" charset="-120"/>
               </a:rPr>
-              <a:t>บันทึกเป็น chain แยกตาราง ไม่กระทบสต๊อก</a:t>
+              <a:t>เก็บไว้ดูย้อนหลังได้ทุกครั้ง ไม่กระทบจำนวนของในคลัง</a:t>
             </a:r>
             <a:endParaRPr lang="en-US" sz="1150" dirty="0"/>
           </a:p>
@@ -4022,7 +4111,7 @@
         <p:spPr>
           <a:xfrm>
             <a:off x="7874000" y="4104283"/>
-            <a:ext cx="2442161" cy="231775"/>
+            <a:ext cx="2414773" cy="231775"/>
           </a:xfrm>
           <a:prstGeom prst="rect">
             <a:avLst/>
@@ -4066,7 +4155,7 @@
         <p:spPr>
           <a:xfrm>
             <a:off x="7874000" y="4336058"/>
-            <a:ext cx="2845237" cy="215205"/>
+            <a:ext cx="2813328" cy="215205"/>
           </a:xfrm>
           <a:prstGeom prst="rect">
             <a:avLst/>
@@ -4095,7 +4184,7 @@
                 <a:ea typeface="Sarabun" pitchFamily="34" charset="-122"/>
                 <a:cs typeface="Sarabun" pitchFamily="34" charset="-120"/>
               </a:rPr>
-              <a:t>บันทึกทันทีโดยไม่เปลี่ยนสถานะทรัพย์สิน</a:t>
+              <a:t>บันทึกทันที ไม่เปลี่ยนสถานะของอุปกรณ์</a:t>
             </a:r>
             <a:endParaRPr lang="en-US" sz="1150" dirty="0"/>
           </a:p>
@@ -4303,7 +4392,7 @@
       </p:sp>
       <p:pic>
         <p:nvPicPr>
-          <p:cNvPr id="5" name="Image 0" descr="ภาพหน้าจอ รับคืนอุปกรณ์ (Return)">    </p:cNvPr>
+          <p:cNvPr id="5" name="Image 0" descr="ภาพหน้าจอ รับคืนอุปกรณ์ (Return) — เลือกผลการตรวจสภาพ 2 แบบ">    </p:cNvPr>
           <p:cNvPicPr>
             <a:picLocks noChangeAspect="1"/>
           </p:cNvPicPr>
@@ -4382,7 +4471,7 @@
         <p:spPr>
           <a:xfrm>
             <a:off x="7874000" y="1424880"/>
-            <a:ext cx="2615587" cy="231775"/>
+            <a:ext cx="3819652" cy="231775"/>
           </a:xfrm>
           <a:prstGeom prst="rect">
             <a:avLst/>
@@ -4411,7 +4500,7 @@
                 <a:ea typeface="Sarabun" pitchFamily="34" charset="-122"/>
                 <a:cs typeface="Sarabun" pitchFamily="34" charset="-120"/>
               </a:rPr>
-              <a:t>แท็บ “คำขอแจ้งคืนจากผู้ขอเบิก”</a:t>
+              <a:t>เลือกผลตรวจสภาพ 2 แบบ ชัดเจน</a:t>
             </a:r>
             <a:endParaRPr lang="en-US" sz="1300" dirty="0"/>
           </a:p>
@@ -4426,7 +4515,7 @@
         <p:spPr>
           <a:xfrm>
             <a:off x="7874000" y="1656655"/>
-            <a:ext cx="3047286" cy="215205"/>
+            <a:ext cx="3819652" cy="405011"/>
           </a:xfrm>
           <a:prstGeom prst="rect">
             <a:avLst/>
@@ -4455,7 +4544,7 @@
                 <a:ea typeface="Sarabun" pitchFamily="34" charset="-122"/>
                 <a:cs typeface="Sarabun" pitchFamily="34" charset="-120"/>
               </a:rPr>
-              <a:t>รอ OPERATION ยืนยันรับคืนจริง (Round 9)</a:t>
+              <a:t>“✅ คืนปกติ” หรือ “⚠️ ของเสีย/ชำรุด” — ไม่ปนกันเป็นช่องเดียวเหมือนเดิมแล้ว</a:t>
             </a:r>
             <a:endParaRPr lang="en-US" sz="1150" dirty="0"/>
           </a:p>
@@ -4469,7 +4558,7 @@
         </p:nvSpPr>
         <p:spPr>
           <a:xfrm>
-            <a:off x="7518400" y="1960761"/>
+            <a:off x="7518400" y="2137866"/>
             <a:ext cx="254000" cy="254000"/>
           </a:xfrm>
           <a:prstGeom prst="roundRect">
@@ -4517,8 +4606,8 @@
         </p:nvSpPr>
         <p:spPr>
           <a:xfrm>
-            <a:off x="7874000" y="1960761"/>
-            <a:ext cx="2446658" cy="231775"/>
+            <a:off x="7874000" y="2137866"/>
+            <a:ext cx="3819652" cy="231775"/>
           </a:xfrm>
           <a:prstGeom prst="rect">
             <a:avLst/>
@@ -4547,7 +4636,7 @@
                 <a:ea typeface="Sarabun" pitchFamily="34" charset="-122"/>
                 <a:cs typeface="Sarabun" pitchFamily="34" charset="-120"/>
               </a:rPr>
-              <a:t>แท็บ “คืนของเอง”</a:t>
+              <a:t>เลือก “คืนปกติ” → กลับเข้าสต๊อกทันที</a:t>
             </a:r>
             <a:endParaRPr lang="en-US" sz="1300" dirty="0"/>
           </a:p>
@@ -4561,8 +4650,8 @@
         </p:nvSpPr>
         <p:spPr>
           <a:xfrm>
-            <a:off x="7874000" y="2192536"/>
-            <a:ext cx="2850475" cy="215205"/>
+            <a:off x="7874000" y="2369641"/>
+            <a:ext cx="3819652" cy="405011"/>
           </a:xfrm>
           <a:prstGeom prst="rect">
             <a:avLst/>
@@ -4591,7 +4680,7 @@
                 <a:ea typeface="Sarabun" pitchFamily="34" charset="-122"/>
                 <a:cs typeface="Sarabun" pitchFamily="34" charset="-120"/>
               </a:rPr>
-              <a:t>กรณีมีคนหิ้วของมาคืนหน้างานก่อนใบคืน</a:t>
+              <a:t>สภาพดี พร้อมใช้งานต่อได้เลย — ระบุเหตุผลย่อยได้ (ครบกำหนดยืม / หมดสัญญาโครงการ / อื่นๆ)</a:t>
             </a:r>
             <a:endParaRPr lang="en-US" sz="1150" dirty="0"/>
           </a:p>
@@ -4605,7 +4694,7 @@
         </p:nvSpPr>
         <p:spPr>
           <a:xfrm>
-            <a:off x="7518400" y="2496641"/>
+            <a:off x="7518400" y="2850852"/>
             <a:ext cx="254000" cy="254000"/>
           </a:xfrm>
           <a:prstGeom prst="roundRect">
@@ -4653,8 +4742,8 @@
         </p:nvSpPr>
         <p:spPr>
           <a:xfrm>
-            <a:off x="7874000" y="2496641"/>
-            <a:ext cx="2694175" cy="231775"/>
+            <a:off x="7874000" y="2850852"/>
+            <a:ext cx="3819652" cy="231775"/>
           </a:xfrm>
           <a:prstGeom prst="rect">
             <a:avLst/>
@@ -4683,7 +4772,7 @@
                 <a:ea typeface="Sarabun" pitchFamily="34" charset="-122"/>
                 <a:cs typeface="Sarabun" pitchFamily="34" charset="-120"/>
               </a:rPr>
-              <a:t>ค้นหาได้</a:t>
+              <a:t>เลือก “ของเสีย/ชำรุด” → ส่งต่อให้ซ่อม</a:t>
             </a:r>
             <a:endParaRPr lang="en-US" sz="1300" dirty="0"/>
           </a:p>
@@ -4697,8 +4786,8 @@
         </p:nvSpPr>
         <p:spPr>
           <a:xfrm>
-            <a:off x="7874000" y="2728416"/>
-            <a:ext cx="3138845" cy="215205"/>
+            <a:off x="7874000" y="3082627"/>
+            <a:ext cx="3819652" cy="405011"/>
           </a:xfrm>
           <a:prstGeom prst="rect">
             <a:avLst/>
@@ -4727,7 +4816,7 @@
                 <a:ea typeface="Sarabun" pitchFamily="34" charset="-122"/>
                 <a:cs typeface="Sarabun" pitchFamily="34" charset="-120"/>
               </a:rPr>
-              <a:t>ด้วย Asset Tag / Serial / ประเภท / โครงการ</a:t>
+              <a:t>ไม่กลับเข้าสต๊อก — เข้าคิวให้ IT Support ตรวจและพิจารณาซ่อมต่อทันที</a:t>
             </a:r>
             <a:endParaRPr lang="en-US" sz="1150" dirty="0"/>
           </a:p>
@@ -4741,7 +4830,7 @@
         </p:nvSpPr>
         <p:spPr>
           <a:xfrm>
-            <a:off x="7518400" y="3032522"/>
+            <a:off x="7518400" y="3563838"/>
             <a:ext cx="254000" cy="254000"/>
           </a:xfrm>
           <a:prstGeom prst="roundRect">
@@ -4789,8 +4878,8 @@
         </p:nvSpPr>
         <p:spPr>
           <a:xfrm>
-            <a:off x="7874000" y="3032522"/>
-            <a:ext cx="2839906" cy="231775"/>
+            <a:off x="7874000" y="3563838"/>
+            <a:ext cx="3819652" cy="231775"/>
           </a:xfrm>
           <a:prstGeom prst="rect">
             <a:avLst/>
@@ -4819,7 +4908,7 @@
                 <a:ea typeface="Sarabun" pitchFamily="34" charset="-122"/>
                 <a:cs typeface="Sarabun" pitchFamily="34" charset="-120"/>
               </a:rPr>
-              <a:t>ถามขอเครื่องทดแทนทันที</a:t>
+              <a:t>ใช้ได้ทั้ง 2 สถานการณ์</a:t>
             </a:r>
             <a:endParaRPr lang="en-US" sz="1300" dirty="0"/>
           </a:p>
@@ -4833,8 +4922,8 @@
         </p:nvSpPr>
         <p:spPr>
           <a:xfrm>
-            <a:off x="7874000" y="3264297"/>
-            <a:ext cx="3308628" cy="215205"/>
+            <a:off x="7874000" y="3795613"/>
+            <a:ext cx="3819652" cy="405011"/>
           </a:xfrm>
           <a:prstGeom prst="rect">
             <a:avLst/>
@@ -4863,7 +4952,7 @@
                 <a:ea typeface="Sarabun" pitchFamily="34" charset="-122"/>
                 <a:cs typeface="Sarabun" pitchFamily="34" charset="-120"/>
               </a:rPr>
-              <a:t>ระบบสร้างคำขอร่างอัตโนมัติให้ (สถานะ “ร่าง”)</a:t>
+              <a:t>แท็บ “คำขอแจ้งคืนจากผู้ขอเบิก” (แจ้งในระบบมาก่อนแล้ว) และแท็บ “คืนของเอง” (มีคนหิ้วของมาคืนที่หน้างานเลย)</a:t>
             </a:r>
             <a:endParaRPr lang="en-US" sz="1150" dirty="0"/>
           </a:p>
@@ -4872,6 +4961,142 @@
       <p:sp>
         <p:nvSpPr>
           <p:cNvPr id="18" name="Text 15"/>
+          <p:cNvSpPr/>
+          <p:nvPr/>
+        </p:nvSpPr>
+        <p:spPr>
+          <a:xfrm>
+            <a:off x="7518400" y="4276824"/>
+            <a:ext cx="254000" cy="254000"/>
+          </a:xfrm>
+          <a:prstGeom prst="roundRect">
+            <a:avLst>
+              <a:gd name="adj" fmla="val 50000"/>
+            </a:avLst>
+          </a:prstGeom>
+          <a:solidFill>
+            <a:srgbClr val="0D9488"/>
+          </a:solidFill>
+          <a:ln/>
+        </p:spPr>
+        <p:txBody>
+          <a:bodyPr wrap="square" lIns="0" tIns="0" rIns="0" bIns="0" rtlCol="0" anchor="ctr">
+            <a:normAutofit/>
+          </a:bodyPr>
+          <a:lstStyle/>
+          <a:p>
+            <a:pPr algn="ctr" indent="0" marL="0">
+              <a:lnSpc>
+                <a:spcPts val="1000"/>
+              </a:lnSpc>
+              <a:buNone/>
+            </a:pPr>
+            <a:r>
+              <a:rPr lang="en-US" sz="1000" b="1" dirty="0">
+                <a:solidFill>
+                  <a:srgbClr val="FFFFFF"/>
+                </a:solidFill>
+                <a:latin typeface="Kanit" pitchFamily="34" charset="0"/>
+                <a:ea typeface="Kanit" pitchFamily="34" charset="-122"/>
+                <a:cs typeface="Kanit" pitchFamily="34" charset="-120"/>
+              </a:rPr>
+              <a:t>5</a:t>
+            </a:r>
+            <a:endParaRPr lang="en-US" sz="1000" dirty="0"/>
+          </a:p>
+        </p:txBody>
+      </p:sp>
+      <p:sp>
+        <p:nvSpPr>
+          <p:cNvPr id="19" name="Text 16"/>
+          <p:cNvSpPr/>
+          <p:nvPr/>
+        </p:nvSpPr>
+        <p:spPr>
+          <a:xfrm>
+            <a:off x="7874000" y="4276824"/>
+            <a:ext cx="3819652" cy="231775"/>
+          </a:xfrm>
+          <a:prstGeom prst="rect">
+            <a:avLst/>
+          </a:prstGeom>
+          <a:noFill/>
+          <a:ln/>
+        </p:spPr>
+        <p:txBody>
+          <a:bodyPr wrap="square" lIns="0" tIns="0" rIns="0" bIns="0" rtlCol="0" anchor="t">
+            <a:normAutofit/>
+          </a:bodyPr>
+          <a:lstStyle/>
+          <a:p>
+            <a:pPr algn="l" indent="0" marL="0">
+              <a:lnSpc>
+                <a:spcPts val="1625"/>
+              </a:lnSpc>
+              <a:buNone/>
+            </a:pPr>
+            <a:r>
+              <a:rPr lang="en-US" sz="1300" b="1" dirty="0">
+                <a:solidFill>
+                  <a:srgbClr val="0F2A29"/>
+                </a:solidFill>
+                <a:latin typeface="Sarabun" pitchFamily="34" charset="0"/>
+                <a:ea typeface="Sarabun" pitchFamily="34" charset="-122"/>
+                <a:cs typeface="Sarabun" pitchFamily="34" charset="-120"/>
+              </a:rPr>
+              <a:t>ระบบเตือนเองถ้ามีของทดแทนอยู่แล้ว</a:t>
+            </a:r>
+            <a:endParaRPr lang="en-US" sz="1300" dirty="0"/>
+          </a:p>
+        </p:txBody>
+      </p:sp>
+      <p:sp>
+        <p:nvSpPr>
+          <p:cNvPr id="20" name="Text 17"/>
+          <p:cNvSpPr/>
+          <p:nvPr/>
+        </p:nvSpPr>
+        <p:spPr>
+          <a:xfrm>
+            <a:off x="7874000" y="4508599"/>
+            <a:ext cx="3819652" cy="405011"/>
+          </a:xfrm>
+          <a:prstGeom prst="rect">
+            <a:avLst/>
+          </a:prstGeom>
+          <a:noFill/>
+          <a:ln/>
+        </p:spPr>
+        <p:txBody>
+          <a:bodyPr wrap="square" lIns="0" tIns="0" rIns="0" bIns="0" rtlCol="0" anchor="t">
+            <a:normAutofit/>
+          </a:bodyPr>
+          <a:lstStyle/>
+          <a:p>
+            <a:pPr algn="l" indent="0" marL="0">
+              <a:lnSpc>
+                <a:spcPts val="1495"/>
+              </a:lnSpc>
+              <a:buNone/>
+            </a:pPr>
+            <a:r>
+              <a:rPr lang="en-US" sz="1150" dirty="0">
+                <a:solidFill>
+                  <a:srgbClr val="46605D"/>
+                </a:solidFill>
+                <a:latin typeface="Sarabun" pitchFamily="34" charset="0"/>
+                <a:ea typeface="Sarabun" pitchFamily="34" charset="-122"/>
+                <a:cs typeface="Sarabun" pitchFamily="34" charset="-120"/>
+              </a:rPr>
+              <a:t>ถ้าเครื่องนี้เคยขอทดแทนล่วงหน้าไปแล้ว (ดูสไลด์ถัดไป) จะมีกล่องแจ้งให้เห็น ไม่ต้องขอซ้ำ</a:t>
+            </a:r>
+            <a:endParaRPr lang="en-US" sz="1150" dirty="0"/>
+          </a:p>
+        </p:txBody>
+      </p:sp>
+      <p:sp>
+        <p:nvSpPr>
+          <p:cNvPr id="21" name="Text 18"/>
           <p:cNvSpPr/>
           <p:nvPr/>
         </p:nvSpPr>
@@ -4977,13 +5202,13 @@
             <a:r>
               <a:rPr lang="en-US" sz="1300" b="1" spc="150" kern="0" dirty="0">
                 <a:solidFill>
-                  <a:srgbClr val="0C7D72"/>
+                  <a:srgbClr val="B45309"/>
                 </a:solidFill>
                 <a:latin typeface="Kanit" pitchFamily="34" charset="0"/>
                 <a:ea typeface="Kanit" pitchFamily="34" charset="-122"/>
                 <a:cs typeface="Kanit" pitchFamily="34" charset="-120"/>
               </a:rPr>
-              <a:t>ขั้นตอนที่ 5 จาก 11</a:t>
+              <a:t>ส่วนเสริม</a:t>
             </a:r>
             <a:endParaRPr lang="en-US" sz="1300" dirty="0"/>
           </a:p>
@@ -5029,7 +5254,7 @@
                 <a:ea typeface="Kanit" pitchFamily="34" charset="-122"/>
                 <a:cs typeface="Kanit" pitchFamily="34" charset="-120"/>
               </a:rPr>
-              <a:t>คิวพิจารณาซ่อม (Repair Queue)</a:t>
+              <a:t>ไปเปลี่ยนของชำรุดที่หน้างาน ในเที่ยวเดียว</a:t>
             </a:r>
             <a:endParaRPr lang="en-US" sz="2800" dirty="0"/>
           </a:p>
@@ -5071,7 +5296,7 @@
       </p:sp>
       <p:pic>
         <p:nvPicPr>
-          <p:cNvPr id="5" name="Image 0" descr="ภาพหน้าจอ คิวพิจารณาซ่อม (Repair Queue)">    </p:cNvPr>
+          <p:cNvPr id="5" name="Image 0" descr="ภาพหน้าจอ ขอเบิกอุปกรณ์ — ติ๊กเพื่อเปลี่ยนของชำรุด">    </p:cNvPr>
           <p:cNvPicPr>
             <a:picLocks noChangeAspect="1"/>
           </p:cNvPicPr>
@@ -5102,6 +5327,50 @@
         <p:spPr>
           <a:xfrm>
             <a:off x="7518400" y="1424880"/>
+            <a:ext cx="4185920" cy="665361"/>
+          </a:xfrm>
+          <a:prstGeom prst="rect">
+            <a:avLst/>
+          </a:prstGeom>
+          <a:noFill/>
+          <a:ln/>
+        </p:spPr>
+        <p:txBody>
+          <a:bodyPr wrap="square" lIns="0" tIns="0" rIns="0" bIns="0" rtlCol="0" anchor="t">
+            <a:normAutofit/>
+          </a:bodyPr>
+          <a:lstStyle/>
+          <a:p>
+            <a:pPr algn="l" indent="0" marL="0">
+              <a:lnSpc>
+                <a:spcPts val="1680"/>
+              </a:lnSpc>
+              <a:buNone/>
+            </a:pPr>
+            <a:r>
+              <a:rPr lang="en-US" sz="1200" dirty="0">
+                <a:solidFill>
+                  <a:srgbClr val="46605D"/>
+                </a:solidFill>
+                <a:latin typeface="Sarabun" pitchFamily="34" charset="0"/>
+                <a:ea typeface="Sarabun" pitchFamily="34" charset="-122"/>
+                <a:cs typeface="Sarabun" pitchFamily="34" charset="-120"/>
+              </a:rPr>
+              <a:t>สถานการณ์: ลูกค้าแจ้งว่าอุปกรณ์เสีย ผู้ยืมต้องไปตรวจและรับของเสียกลับเข้าคลัง พร้อมเอาเครื่องทดแทนไปให้ลูกค้าในเที่ยวเดียว เพื่อประหยัดค่าเดินทาง</a:t>
+            </a:r>
+            <a:endParaRPr lang="en-US" sz="1200" dirty="0"/>
+          </a:p>
+        </p:txBody>
+      </p:sp>
+      <p:sp>
+        <p:nvSpPr>
+          <p:cNvPr id="7" name="Text 4"/>
+          <p:cNvSpPr/>
+          <p:nvPr/>
+        </p:nvSpPr>
+        <p:spPr>
+          <a:xfrm>
+            <a:off x="7518400" y="2179141"/>
             <a:ext cx="254000" cy="254000"/>
           </a:xfrm>
           <a:prstGeom prst="roundRect">
@@ -5110,7 +5379,7 @@
             </a:avLst>
           </a:prstGeom>
           <a:solidFill>
-            <a:srgbClr val="0D9488"/>
+            <a:srgbClr val="B45309"/>
           </a:solidFill>
           <a:ln/>
         </p:spPr>
@@ -5143,14 +5412,14 @@
       </p:sp>
       <p:sp>
         <p:nvSpPr>
-          <p:cNvPr id="7" name="Text 4"/>
-          <p:cNvSpPr/>
-          <p:nvPr/>
-        </p:nvSpPr>
-        <p:spPr>
-          <a:xfrm>
-            <a:off x="7874000" y="1424880"/>
-            <a:ext cx="2111253" cy="231775"/>
+          <p:cNvPr id="8" name="Text 5"/>
+          <p:cNvSpPr/>
+          <p:nvPr/>
+        </p:nvSpPr>
+        <p:spPr>
+          <a:xfrm>
+            <a:off x="7874000" y="2179141"/>
+            <a:ext cx="3819652" cy="231775"/>
           </a:xfrm>
           <a:prstGeom prst="rect">
             <a:avLst/>
@@ -5179,7 +5448,7 @@
                 <a:ea typeface="Sarabun" pitchFamily="34" charset="-122"/>
                 <a:cs typeface="Sarabun" pitchFamily="34" charset="-120"/>
               </a:rPr>
-              <a:t>แท็บ “รอพิจารณา”</a:t>
+              <a:t>ติ๊กช่อง “เพื่อนำไปเปลี่ยนของชำรุด”</a:t>
             </a:r>
             <a:endParaRPr lang="en-US" sz="1300" dirty="0"/>
           </a:p>
@@ -5187,14 +5456,14 @@
       </p:sp>
       <p:sp>
         <p:nvSpPr>
-          <p:cNvPr id="8" name="Text 5"/>
-          <p:cNvSpPr/>
-          <p:nvPr/>
-        </p:nvSpPr>
-        <p:spPr>
-          <a:xfrm>
-            <a:off x="7874000" y="1656655"/>
-            <a:ext cx="2459712" cy="215205"/>
+          <p:cNvPr id="9" name="Text 6"/>
+          <p:cNvSpPr/>
+          <p:nvPr/>
+        </p:nvSpPr>
+        <p:spPr>
+          <a:xfrm>
+            <a:off x="7874000" y="2410916"/>
+            <a:ext cx="3819652" cy="405011"/>
           </a:xfrm>
           <a:prstGeom prst="rect">
             <a:avLst/>
@@ -5223,7 +5492,7 @@
                 <a:ea typeface="Sarabun" pitchFamily="34" charset="-122"/>
                 <a:cs typeface="Sarabun" pitchFamily="34" charset="-120"/>
               </a:rPr>
-              <a:t>ตัดสินใจส่งซ่อมหรือสร้าง Write-off</a:t>
+              <a:t>ตอนสร้างคำขอเบิกแบบ “ยืม” ตามปกติ แล้วเลือกเครื่องเดิมที่ชำรุดไว้เป็นข้อมูลอ้างอิง</a:t>
             </a:r>
             <a:endParaRPr lang="en-US" sz="1150" dirty="0"/>
           </a:p>
@@ -5231,13 +5500,13 @@
       </p:sp>
       <p:sp>
         <p:nvSpPr>
-          <p:cNvPr id="9" name="Text 6"/>
-          <p:cNvSpPr/>
-          <p:nvPr/>
-        </p:nvSpPr>
-        <p:spPr>
-          <a:xfrm>
-            <a:off x="7518400" y="1960761"/>
+          <p:cNvPr id="10" name="Text 7"/>
+          <p:cNvSpPr/>
+          <p:nvPr/>
+        </p:nvSpPr>
+        <p:spPr>
+          <a:xfrm>
+            <a:off x="7518400" y="2904827"/>
             <a:ext cx="254000" cy="254000"/>
           </a:xfrm>
           <a:prstGeom prst="roundRect">
@@ -5246,7 +5515,7 @@
             </a:avLst>
           </a:prstGeom>
           <a:solidFill>
-            <a:srgbClr val="0D9488"/>
+            <a:srgbClr val="B45309"/>
           </a:solidFill>
           <a:ln/>
         </p:spPr>
@@ -5279,14 +5548,14 @@
       </p:sp>
       <p:sp>
         <p:nvSpPr>
-          <p:cNvPr id="10" name="Text 7"/>
-          <p:cNvSpPr/>
-          <p:nvPr/>
-        </p:nvSpPr>
-        <p:spPr>
-          <a:xfrm>
-            <a:off x="7874000" y="1960761"/>
-            <a:ext cx="1951113" cy="231775"/>
+          <p:cNvPr id="11" name="Text 8"/>
+          <p:cNvSpPr/>
+          <p:nvPr/>
+        </p:nvSpPr>
+        <p:spPr>
+          <a:xfrm>
+            <a:off x="7874000" y="2904827"/>
+            <a:ext cx="3819652" cy="231775"/>
           </a:xfrm>
           <a:prstGeom prst="rect">
             <a:avLst/>
@@ -5315,7 +5584,7 @@
                 <a:ea typeface="Sarabun" pitchFamily="34" charset="-122"/>
                 <a:cs typeface="Sarabun" pitchFamily="34" charset="-120"/>
               </a:rPr>
-              <a:t>แท็บ “กำลังซ่อม”</a:t>
+              <a:t>รับเครื่องทดแทนได้ทันที</a:t>
             </a:r>
             <a:endParaRPr lang="en-US" sz="1300" dirty="0"/>
           </a:p>
@@ -5323,14 +5592,14 @@
       </p:sp>
       <p:sp>
         <p:nvSpPr>
-          <p:cNvPr id="11" name="Text 8"/>
-          <p:cNvSpPr/>
-          <p:nvPr/>
-        </p:nvSpPr>
-        <p:spPr>
-          <a:xfrm>
-            <a:off x="7874000" y="2192536"/>
-            <a:ext cx="2273141" cy="215205"/>
+          <p:cNvPr id="12" name="Text 9"/>
+          <p:cNvSpPr/>
+          <p:nvPr/>
+        </p:nvSpPr>
+        <p:spPr>
+          <a:xfrm>
+            <a:off x="7874000" y="3136602"/>
+            <a:ext cx="3819652" cy="405011"/>
           </a:xfrm>
           <a:prstGeom prst="rect">
             <a:avLst/>
@@ -5359,7 +5628,7 @@
                 <a:ea typeface="Sarabun" pitchFamily="34" charset="-122"/>
                 <a:cs typeface="Sarabun" pitchFamily="34" charset="-120"/>
               </a:rPr>
-              <a:t>ติดตามของที่ส่งออกไปแล้วรอผล</a:t>
+              <a:t>ไม่ต้องรอนำของเสียมาคืนก่อน — เจ้าหน้าที่คลังจ่ายเครื่องใหม่ได้เลยตามขั้นตอนปกติ</a:t>
             </a:r>
             <a:endParaRPr lang="en-US" sz="1150" dirty="0"/>
           </a:p>
@@ -5367,13 +5636,13 @@
       </p:sp>
       <p:sp>
         <p:nvSpPr>
-          <p:cNvPr id="12" name="Text 9"/>
-          <p:cNvSpPr/>
-          <p:nvPr/>
-        </p:nvSpPr>
-        <p:spPr>
-          <a:xfrm>
-            <a:off x="7518400" y="2496641"/>
+          <p:cNvPr id="13" name="Text 10"/>
+          <p:cNvSpPr/>
+          <p:nvPr/>
+        </p:nvSpPr>
+        <p:spPr>
+          <a:xfrm>
+            <a:off x="7518400" y="3630513"/>
             <a:ext cx="254000" cy="254000"/>
           </a:xfrm>
           <a:prstGeom prst="roundRect">
@@ -5382,7 +5651,7 @@
             </a:avLst>
           </a:prstGeom>
           <a:solidFill>
-            <a:srgbClr val="0D9488"/>
+            <a:srgbClr val="B45309"/>
           </a:solidFill>
           <a:ln/>
         </p:spPr>
@@ -5415,14 +5684,14 @@
       </p:sp>
       <p:sp>
         <p:nvSpPr>
-          <p:cNvPr id="13" name="Text 10"/>
-          <p:cNvSpPr/>
-          <p:nvPr/>
-        </p:nvSpPr>
-        <p:spPr>
-          <a:xfrm>
-            <a:off x="7874000" y="2496641"/>
-            <a:ext cx="2485906" cy="231775"/>
+          <p:cNvPr id="14" name="Text 11"/>
+          <p:cNvSpPr/>
+          <p:nvPr/>
+        </p:nvSpPr>
+        <p:spPr>
+          <a:xfrm>
+            <a:off x="7874000" y="3630513"/>
+            <a:ext cx="3819652" cy="231775"/>
           </a:xfrm>
           <a:prstGeom prst="rect">
             <a:avLst/>
@@ -5451,7 +5720,7 @@
                 <a:ea typeface="Sarabun" pitchFamily="34" charset="-122"/>
                 <a:cs typeface="Sarabun" pitchFamily="34" charset="-120"/>
               </a:rPr>
-              <a:t>ตัวกรอง “เฉพาะที่เกินกำหนด”</a:t>
+              <a:t>พกไปแลกกับลูกค้าได้เลยในเที่ยวเดียว</a:t>
             </a:r>
             <a:endParaRPr lang="en-US" sz="1300" dirty="0"/>
           </a:p>
@@ -5459,14 +5728,14 @@
       </p:sp>
       <p:sp>
         <p:nvSpPr>
-          <p:cNvPr id="14" name="Text 11"/>
-          <p:cNvSpPr/>
-          <p:nvPr/>
-        </p:nvSpPr>
-        <p:spPr>
-          <a:xfrm>
-            <a:off x="7874000" y="2728416"/>
-            <a:ext cx="2133736" cy="215205"/>
+          <p:cNvPr id="15" name="Text 12"/>
+          <p:cNvSpPr/>
+          <p:nvPr/>
+        </p:nvSpPr>
+        <p:spPr>
+          <a:xfrm>
+            <a:off x="7874000" y="3862288"/>
+            <a:ext cx="3819652" cy="405011"/>
           </a:xfrm>
           <a:prstGeom prst="rect">
             <a:avLst/>
@@ -5495,7 +5764,7 @@
                 <a:ea typeface="Sarabun" pitchFamily="34" charset="-122"/>
                 <a:cs typeface="Sarabun" pitchFamily="34" charset="-120"/>
               </a:rPr>
-              <a:t>เพิ่มใน Round 10</a:t>
+              <a:t>เอาเครื่องทดแทนไปส่ง พร้อมรับของเสียกลับมาที่คลังในการเดินทางครั้งเดียว</a:t>
             </a:r>
             <a:endParaRPr lang="en-US" sz="1150" dirty="0"/>
           </a:p>
@@ -5503,13 +5772,13 @@
       </p:sp>
       <p:sp>
         <p:nvSpPr>
-          <p:cNvPr id="15" name="Text 12"/>
-          <p:cNvSpPr/>
-          <p:nvPr/>
-        </p:nvSpPr>
-        <p:spPr>
-          <a:xfrm>
-            <a:off x="7518400" y="3032522"/>
+          <p:cNvPr id="16" name="Text 13"/>
+          <p:cNvSpPr/>
+          <p:nvPr/>
+        </p:nvSpPr>
+        <p:spPr>
+          <a:xfrm>
+            <a:off x="7518400" y="4356199"/>
             <a:ext cx="254000" cy="254000"/>
           </a:xfrm>
           <a:prstGeom prst="roundRect">
@@ -5518,7 +5787,7 @@
             </a:avLst>
           </a:prstGeom>
           <a:solidFill>
-            <a:srgbClr val="0D9488"/>
+            <a:srgbClr val="B45309"/>
           </a:solidFill>
           <a:ln/>
         </p:spPr>
@@ -5551,14 +5820,14 @@
       </p:sp>
       <p:sp>
         <p:nvSpPr>
-          <p:cNvPr id="16" name="Text 13"/>
-          <p:cNvSpPr/>
-          <p:nvPr/>
-        </p:nvSpPr>
-        <p:spPr>
-          <a:xfrm>
-            <a:off x="7874000" y="3032522"/>
-            <a:ext cx="2565511" cy="231775"/>
+          <p:cNvPr id="17" name="Text 14"/>
+          <p:cNvSpPr/>
+          <p:nvPr/>
+        </p:nvSpPr>
+        <p:spPr>
+          <a:xfrm>
+            <a:off x="7874000" y="4356199"/>
+            <a:ext cx="3819652" cy="231775"/>
           </a:xfrm>
           <a:prstGeom prst="rect">
             <a:avLst/>
@@ -5587,7 +5856,7 @@
                 <a:ea typeface="Sarabun" pitchFamily="34" charset="-122"/>
                 <a:cs typeface="Sarabun" pitchFamily="34" charset="-120"/>
               </a:rPr>
-              <a:t>Vendor ที่ส่งซ่อม</a:t>
+              <a:t>พอได้ของเสียกลับมา ค่อยทำ “รับคืนอุปกรณ์”</a:t>
             </a:r>
             <a:endParaRPr lang="en-US" sz="1300" dirty="0"/>
           </a:p>
@@ -5595,14 +5864,14 @@
       </p:sp>
       <p:sp>
         <p:nvSpPr>
-          <p:cNvPr id="17" name="Text 14"/>
-          <p:cNvSpPr/>
-          <p:nvPr/>
-        </p:nvSpPr>
-        <p:spPr>
-          <a:xfrm>
-            <a:off x="7874000" y="3264297"/>
-            <a:ext cx="2988945" cy="215205"/>
+          <p:cNvPr id="18" name="Text 15"/>
+          <p:cNvSpPr/>
+          <p:nvPr/>
+        </p:nvSpPr>
+        <p:spPr>
+          <a:xfrm>
+            <a:off x="7874000" y="4587974"/>
+            <a:ext cx="3819652" cy="405011"/>
           </a:xfrm>
           <a:prstGeom prst="rect">
             <a:avLst/>
@@ -5631,7 +5900,7 @@
                 <a:ea typeface="Sarabun" pitchFamily="34" charset="-122"/>
                 <a:cs typeface="Sarabun" pitchFamily="34" charset="-120"/>
               </a:rPr>
-              <a:t>เลือกจาก dropdown หรือ “อื่นๆ (ระบุชื่อ)”</a:t>
+              <a:t>เลือก “ของเสีย/ชำรุด” ตามปกติ — ระบบรู้เองว่ามีของทดแทนจ่ายไปแล้ว ไม่ต้องขอซ้ำ</a:t>
             </a:r>
             <a:endParaRPr lang="en-US" sz="1150" dirty="0"/>
           </a:p>
@@ -5639,143 +5908,7 @@
       </p:sp>
       <p:sp>
         <p:nvSpPr>
-          <p:cNvPr id="18" name="Text 15"/>
-          <p:cNvSpPr/>
-          <p:nvPr/>
-        </p:nvSpPr>
-        <p:spPr>
-          <a:xfrm>
-            <a:off x="7518400" y="3568402"/>
-            <a:ext cx="254000" cy="254000"/>
-          </a:xfrm>
-          <a:prstGeom prst="roundRect">
-            <a:avLst>
-              <a:gd name="adj" fmla="val 50000"/>
-            </a:avLst>
-          </a:prstGeom>
-          <a:solidFill>
-            <a:srgbClr val="0D9488"/>
-          </a:solidFill>
-          <a:ln/>
-        </p:spPr>
-        <p:txBody>
-          <a:bodyPr wrap="square" lIns="0" tIns="0" rIns="0" bIns="0" rtlCol="0" anchor="ctr">
-            <a:normAutofit/>
-          </a:bodyPr>
-          <a:lstStyle/>
-          <a:p>
-            <a:pPr algn="ctr" indent="0" marL="0">
-              <a:lnSpc>
-                <a:spcPts val="1000"/>
-              </a:lnSpc>
-              <a:buNone/>
-            </a:pPr>
-            <a:r>
-              <a:rPr lang="en-US" sz="1000" b="1" dirty="0">
-                <a:solidFill>
-                  <a:srgbClr val="FFFFFF"/>
-                </a:solidFill>
-                <a:latin typeface="Kanit" pitchFamily="34" charset="0"/>
-                <a:ea typeface="Kanit" pitchFamily="34" charset="-122"/>
-                <a:cs typeface="Kanit" pitchFamily="34" charset="-120"/>
-              </a:rPr>
-              <a:t>5</a:t>
-            </a:r>
-            <a:endParaRPr lang="en-US" sz="1000" dirty="0"/>
-          </a:p>
-        </p:txBody>
-      </p:sp>
-      <p:sp>
-        <p:nvSpPr>
           <p:cNvPr id="19" name="Text 16"/>
-          <p:cNvSpPr/>
-          <p:nvPr/>
-        </p:nvSpPr>
-        <p:spPr>
-          <a:xfrm>
-            <a:off x="7874000" y="3568402"/>
-            <a:ext cx="2382990" cy="231775"/>
-          </a:xfrm>
-          <a:prstGeom prst="rect">
-            <a:avLst/>
-          </a:prstGeom>
-          <a:noFill/>
-          <a:ln/>
-        </p:spPr>
-        <p:txBody>
-          <a:bodyPr wrap="square" lIns="0" tIns="0" rIns="0" bIns="0" rtlCol="0" anchor="t">
-            <a:normAutofit/>
-          </a:bodyPr>
-          <a:lstStyle/>
-          <a:p>
-            <a:pPr algn="l" indent="0" marL="0">
-              <a:lnSpc>
-                <a:spcPts val="1625"/>
-              </a:lnSpc>
-              <a:buNone/>
-            </a:pPr>
-            <a:r>
-              <a:rPr lang="en-US" sz="1300" b="1" dirty="0">
-                <a:solidFill>
-                  <a:srgbClr val="0F2A29"/>
-                </a:solidFill>
-                <a:latin typeface="Sarabun" pitchFamily="34" charset="0"/>
-                <a:ea typeface="Sarabun" pitchFamily="34" charset="-122"/>
-                <a:cs typeface="Sarabun" pitchFamily="34" charset="-120"/>
-              </a:rPr>
-              <a:t>ป้ายเกินกำหนดซ่อม</a:t>
-            </a:r>
-            <a:endParaRPr lang="en-US" sz="1300" dirty="0"/>
-          </a:p>
-        </p:txBody>
-      </p:sp>
-      <p:sp>
-        <p:nvSpPr>
-          <p:cNvPr id="20" name="Text 17"/>
-          <p:cNvSpPr/>
-          <p:nvPr/>
-        </p:nvSpPr>
-        <p:spPr>
-          <a:xfrm>
-            <a:off x="7874000" y="3800177"/>
-            <a:ext cx="2776299" cy="215205"/>
-          </a:xfrm>
-          <a:prstGeom prst="rect">
-            <a:avLst/>
-          </a:prstGeom>
-          <a:noFill/>
-          <a:ln/>
-        </p:spPr>
-        <p:txBody>
-          <a:bodyPr wrap="square" lIns="0" tIns="0" rIns="0" bIns="0" rtlCol="0" anchor="t">
-            <a:normAutofit/>
-          </a:bodyPr>
-          <a:lstStyle/>
-          <a:p>
-            <a:pPr algn="l" indent="0" marL="0">
-              <a:lnSpc>
-                <a:spcPts val="1495"/>
-              </a:lnSpc>
-              <a:buNone/>
-            </a:pPr>
-            <a:r>
-              <a:rPr lang="en-US" sz="1150" dirty="0">
-                <a:solidFill>
-                  <a:srgbClr val="46605D"/>
-                </a:solidFill>
-                <a:latin typeface="Sarabun" pitchFamily="34" charset="0"/>
-                <a:ea typeface="Sarabun" pitchFamily="34" charset="-122"/>
-                <a:cs typeface="Sarabun" pitchFamily="34" charset="-120"/>
-              </a:rPr>
-              <a:t>ค่าเริ่มต้น 30 วัน หากไม่ระบุวันคาดเสร็จ</a:t>
-            </a:r>
-            <a:endParaRPr lang="en-US" sz="1150" dirty="0"/>
-          </a:p>
-        </p:txBody>
-      </p:sp>
-      <p:sp>
-        <p:nvSpPr>
-          <p:cNvPr id="21" name="Text 18"/>
           <p:cNvSpPr/>
           <p:nvPr/>
         </p:nvSpPr>
@@ -5887,7 +6020,7 @@
                 <a:ea typeface="Kanit" pitchFamily="34" charset="-122"/>
                 <a:cs typeface="Kanit" pitchFamily="34" charset="-120"/>
               </a:rPr>
-              <a:t>ขั้นตอนที่ 6 จาก 11</a:t>
+              <a:t>ขั้นตอนที่ 5 จาก 11</a:t>
             </a:r>
             <a:endParaRPr lang="en-US" sz="1300" dirty="0"/>
           </a:p>
@@ -5933,7 +6066,7 @@
                 <a:ea typeface="Kanit" pitchFamily="34" charset="-122"/>
                 <a:cs typeface="Kanit" pitchFamily="34" charset="-120"/>
               </a:rPr>
-              <a:t>คำขอ/อนุมัติ Write-off</a:t>
+              <a:t>คิวพิจารณาซ่อม (Repair Queue)</a:t>
             </a:r>
             <a:endParaRPr lang="en-US" sz="2800" dirty="0"/>
           </a:p>
@@ -5975,7 +6108,7 @@
       </p:sp>
       <p:pic>
         <p:nvPicPr>
-          <p:cNvPr id="5" name="Image 0" descr="ภาพหน้าจอ คำขอ/อนุมัติ Write-off">    </p:cNvPr>
+          <p:cNvPr id="5" name="Image 0" descr="ภาพหน้าจอ คิวพิจารณาซ่อม (Repair Queue)">    </p:cNvPr>
           <p:cNvPicPr>
             <a:picLocks noChangeAspect="1"/>
           </p:cNvPicPr>
@@ -6054,7 +6187,7 @@
         <p:spPr>
           <a:xfrm>
             <a:off x="7874000" y="1424880"/>
-            <a:ext cx="2951083" cy="231775"/>
+            <a:ext cx="3447048" cy="231775"/>
           </a:xfrm>
           <a:prstGeom prst="rect">
             <a:avLst/>
@@ -6083,7 +6216,7 @@
                 <a:ea typeface="Sarabun" pitchFamily="34" charset="-122"/>
                 <a:cs typeface="Sarabun" pitchFamily="34" charset="-120"/>
               </a:rPr>
-              <a:t>ค้นหาทรัพย์สินที่ต้องการตัดจำหน่าย</a:t>
+              <a:t>แท็บ “รอพิจารณา”</a:t>
             </a:r>
             <a:endParaRPr lang="en-US" sz="1300" dirty="0"/>
           </a:p>
@@ -6098,7 +6231,7 @@
         <p:spPr>
           <a:xfrm>
             <a:off x="7874000" y="1656655"/>
-            <a:ext cx="2951083" cy="215205"/>
+            <a:ext cx="4015978" cy="215205"/>
           </a:xfrm>
           <a:prstGeom prst="rect">
             <a:avLst/>
@@ -6127,7 +6260,7 @@
                 <a:ea typeface="Sarabun" pitchFamily="34" charset="-122"/>
                 <a:cs typeface="Sarabun" pitchFamily="34" charset="-120"/>
               </a:rPr>
-              <a:t>ช่องค้นหาแบบ live filter เดียวกันทั้งระบบ</a:t>
+              <a:t>เครื่องที่คืนมาแล้วแจ้งเสีย รอตัดสินใจซ่อมหรือตัดจำหน่าย</a:t>
             </a:r>
             <a:endParaRPr lang="en-US" sz="1150" dirty="0"/>
           </a:p>
@@ -6190,7 +6323,7 @@
         <p:spPr>
           <a:xfrm>
             <a:off x="7874000" y="1960761"/>
-            <a:ext cx="2634595" cy="231775"/>
+            <a:ext cx="2224485" cy="231775"/>
           </a:xfrm>
           <a:prstGeom prst="rect">
             <a:avLst/>
@@ -6219,7 +6352,7 @@
                 <a:ea typeface="Sarabun" pitchFamily="34" charset="-122"/>
                 <a:cs typeface="Sarabun" pitchFamily="34" charset="-120"/>
               </a:rPr>
-              <a:t>ป้ายแนะนำ</a:t>
+              <a:t>แท็บ “กำลังซ่อม”</a:t>
             </a:r>
             <a:endParaRPr lang="en-US" sz="1300" dirty="0"/>
           </a:p>
@@ -6234,7 +6367,7 @@
         <p:spPr>
           <a:xfrm>
             <a:off x="7874000" y="2192536"/>
-            <a:ext cx="3069431" cy="215205"/>
+            <a:ext cx="2591633" cy="215205"/>
           </a:xfrm>
           <a:prstGeom prst="rect">
             <a:avLst/>
@@ -6263,7 +6396,7 @@
                 <a:ea typeface="Sarabun" pitchFamily="34" charset="-122"/>
                 <a:cs typeface="Sarabun" pitchFamily="34" charset="-120"/>
               </a:rPr>
-              <a:t>🔧 อยู่ระหว่างซ่อม / ⏰ เลยกำหนดคืนแล้ว</a:t>
+              <a:t>ติดตามของที่ส่งออกไปซ่อมแล้วรอผล</a:t>
             </a:r>
             <a:endParaRPr lang="en-US" sz="1150" dirty="0"/>
           </a:p>
@@ -6326,7 +6459,7 @@
         <p:spPr>
           <a:xfrm>
             <a:off x="7874000" y="2496641"/>
-            <a:ext cx="2761417" cy="231775"/>
+            <a:ext cx="2407517" cy="231775"/>
           </a:xfrm>
           <a:prstGeom prst="rect">
             <a:avLst/>
@@ -6355,7 +6488,7 @@
                 <a:ea typeface="Sarabun" pitchFamily="34" charset="-122"/>
                 <a:cs typeface="Sarabun" pitchFamily="34" charset="-120"/>
               </a:rPr>
-              <a:t>สถานะและที่ตั้ง/ผู้ถือครองปัจจุบัน</a:t>
+              <a:t>ตัวกรอง “เฉพาะที่เกินกำหนด”</a:t>
             </a:r>
             <a:endParaRPr lang="en-US" sz="1300" dirty="0"/>
           </a:p>
@@ -6370,7 +6503,7 @@
         <p:spPr>
           <a:xfrm>
             <a:off x="7874000" y="2728416"/>
-            <a:ext cx="2370216" cy="215205"/>
+            <a:ext cx="2804874" cy="215205"/>
           </a:xfrm>
           <a:prstGeom prst="rect">
             <a:avLst/>
@@ -6399,7 +6532,7 @@
                 <a:ea typeface="Sarabun" pitchFamily="34" charset="-122"/>
                 <a:cs typeface="Sarabun" pitchFamily="34" charset="-120"/>
               </a:rPr>
-              <a:t>ช่วยประกอบการตัดสินใจ</a:t>
+              <a:t>ติ๊กเพื่อดูเฉพาะเครื่องที่ซ่อมเกินเวลาแล้ว</a:t>
             </a:r>
             <a:endParaRPr lang="en-US" sz="1150" dirty="0"/>
           </a:p>
@@ -6462,7 +6595,7 @@
         <p:spPr>
           <a:xfrm>
             <a:off x="7874000" y="3032522"/>
-            <a:ext cx="3215759" cy="231775"/>
+            <a:ext cx="2713081" cy="231775"/>
           </a:xfrm>
           <a:prstGeom prst="rect">
             <a:avLst/>
@@ -6491,7 +6624,7 @@
                 <a:ea typeface="Sarabun" pitchFamily="34" charset="-122"/>
                 <a:cs typeface="Sarabun" pitchFamily="34" charset="-120"/>
               </a:rPr>
-              <a:t>UX เดียวกับตารางเลือกตอนจ่ายอุปกรณ์</a:t>
+              <a:t>ร้านที่ส่งซ่อม</a:t>
             </a:r>
             <a:endParaRPr lang="en-US" sz="1300" dirty="0"/>
           </a:p>
@@ -6506,7 +6639,7 @@
         <p:spPr>
           <a:xfrm>
             <a:off x="7874000" y="3264297"/>
-            <a:ext cx="2760193" cy="215205"/>
+            <a:ext cx="3160871" cy="215205"/>
           </a:xfrm>
           <a:prstGeom prst="rect">
             <a:avLst/>
@@ -6535,7 +6668,7 @@
                 <a:ea typeface="Sarabun" pitchFamily="34" charset="-122"/>
                 <a:cs typeface="Sarabun" pitchFamily="34" charset="-120"/>
               </a:rPr>
-              <a:t>ทั้งระบบใช้แนวทางเดียวกัน (Round 5)</a:t>
+              <a:t>เลือกจากรายชื่อที่มี หรือพิมพ์ชื่อร้านอื่นเองได้</a:t>
             </a:r>
             <a:endParaRPr lang="en-US" sz="1150" dirty="0"/>
           </a:p>
@@ -6544,6 +6677,142 @@
       <p:sp>
         <p:nvSpPr>
           <p:cNvPr id="18" name="Text 15"/>
+          <p:cNvSpPr/>
+          <p:nvPr/>
+        </p:nvSpPr>
+        <p:spPr>
+          <a:xfrm>
+            <a:off x="7518400" y="3568402"/>
+            <a:ext cx="254000" cy="254000"/>
+          </a:xfrm>
+          <a:prstGeom prst="roundRect">
+            <a:avLst>
+              <a:gd name="adj" fmla="val 50000"/>
+            </a:avLst>
+          </a:prstGeom>
+          <a:solidFill>
+            <a:srgbClr val="0D9488"/>
+          </a:solidFill>
+          <a:ln/>
+        </p:spPr>
+        <p:txBody>
+          <a:bodyPr wrap="square" lIns="0" tIns="0" rIns="0" bIns="0" rtlCol="0" anchor="ctr">
+            <a:normAutofit/>
+          </a:bodyPr>
+          <a:lstStyle/>
+          <a:p>
+            <a:pPr algn="ctr" indent="0" marL="0">
+              <a:lnSpc>
+                <a:spcPts val="1000"/>
+              </a:lnSpc>
+              <a:buNone/>
+            </a:pPr>
+            <a:r>
+              <a:rPr lang="en-US" sz="1000" b="1" dirty="0">
+                <a:solidFill>
+                  <a:srgbClr val="FFFFFF"/>
+                </a:solidFill>
+                <a:latin typeface="Kanit" pitchFamily="34" charset="0"/>
+                <a:ea typeface="Kanit" pitchFamily="34" charset="-122"/>
+                <a:cs typeface="Kanit" pitchFamily="34" charset="-120"/>
+              </a:rPr>
+              <a:t>5</a:t>
+            </a:r>
+            <a:endParaRPr lang="en-US" sz="1000" dirty="0"/>
+          </a:p>
+        </p:txBody>
+      </p:sp>
+      <p:sp>
+        <p:nvSpPr>
+          <p:cNvPr id="19" name="Text 16"/>
+          <p:cNvSpPr/>
+          <p:nvPr/>
+        </p:nvSpPr>
+        <p:spPr>
+          <a:xfrm>
+            <a:off x="7874000" y="3568402"/>
+            <a:ext cx="3043990" cy="231775"/>
+          </a:xfrm>
+          <a:prstGeom prst="rect">
+            <a:avLst/>
+          </a:prstGeom>
+          <a:noFill/>
+          <a:ln/>
+        </p:spPr>
+        <p:txBody>
+          <a:bodyPr wrap="square" lIns="0" tIns="0" rIns="0" bIns="0" rtlCol="0" anchor="t">
+            <a:normAutofit/>
+          </a:bodyPr>
+          <a:lstStyle/>
+          <a:p>
+            <a:pPr algn="l" indent="0" marL="0">
+              <a:lnSpc>
+                <a:spcPts val="1625"/>
+              </a:lnSpc>
+              <a:buNone/>
+            </a:pPr>
+            <a:r>
+              <a:rPr lang="en-US" sz="1300" b="1" dirty="0">
+                <a:solidFill>
+                  <a:srgbClr val="0F2A29"/>
+                </a:solidFill>
+                <a:latin typeface="Sarabun" pitchFamily="34" charset="0"/>
+                <a:ea typeface="Sarabun" pitchFamily="34" charset="-122"/>
+                <a:cs typeface="Sarabun" pitchFamily="34" charset="-120"/>
+              </a:rPr>
+              <a:t>ป้ายเกินกำหนดซ่อม</a:t>
+            </a:r>
+            <a:endParaRPr lang="en-US" sz="1300" dirty="0"/>
+          </a:p>
+        </p:txBody>
+      </p:sp>
+      <p:sp>
+        <p:nvSpPr>
+          <p:cNvPr id="20" name="Text 17"/>
+          <p:cNvSpPr/>
+          <p:nvPr/>
+        </p:nvSpPr>
+        <p:spPr>
+          <a:xfrm>
+            <a:off x="7874000" y="3800177"/>
+            <a:ext cx="3546396" cy="215205"/>
+          </a:xfrm>
+          <a:prstGeom prst="rect">
+            <a:avLst/>
+          </a:prstGeom>
+          <a:noFill/>
+          <a:ln/>
+        </p:spPr>
+        <p:txBody>
+          <a:bodyPr wrap="square" lIns="0" tIns="0" rIns="0" bIns="0" rtlCol="0" anchor="t">
+            <a:normAutofit/>
+          </a:bodyPr>
+          <a:lstStyle/>
+          <a:p>
+            <a:pPr algn="l" indent="0" marL="0">
+              <a:lnSpc>
+                <a:spcPts val="1495"/>
+              </a:lnSpc>
+              <a:buNone/>
+            </a:pPr>
+            <a:r>
+              <a:rPr lang="en-US" sz="1150" dirty="0">
+                <a:solidFill>
+                  <a:srgbClr val="46605D"/>
+                </a:solidFill>
+                <a:latin typeface="Sarabun" pitchFamily="34" charset="0"/>
+                <a:ea typeface="Sarabun" pitchFamily="34" charset="-122"/>
+                <a:cs typeface="Sarabun" pitchFamily="34" charset="-120"/>
+              </a:rPr>
+              <a:t>ถ้าไม่ระบุวันคาดเสร็จ นับเกินกำหนดเมื่อเกิน 30 วัน</a:t>
+            </a:r>
+            <a:endParaRPr lang="en-US" sz="1150" dirty="0"/>
+          </a:p>
+        </p:txBody>
+      </p:sp>
+      <p:sp>
+        <p:nvSpPr>
+          <p:cNvPr id="21" name="Text 18"/>
           <p:cNvSpPr/>
           <p:nvPr/>
         </p:nvSpPr>
@@ -6596,6 +6865,774 @@
 <file path=ppt/slides/slide14.xml><?xml version="1.0" encoding="utf-8"?>
 <p:sld xmlns:a="http://schemas.openxmlformats.org/drawingml/2006/main" xmlns:r="http://schemas.openxmlformats.org/officeDocument/2006/relationships" xmlns:p="http://schemas.openxmlformats.org/presentationml/2006/main">
   <p:cSld name="Slide 14">
+    <p:bg>
+      <p:bgPr>
+        <a:solidFill>
+          <a:srgbClr val="F6FAF9"/>
+        </a:solidFill>
+      </p:bgPr>
+    </p:bg>
+    <p:spTree>
+      <p:nvGrpSpPr>
+        <p:cNvPr id="1" name=""/>
+        <p:cNvGrpSpPr/>
+        <p:nvPr/>
+      </p:nvGrpSpPr>
+      <p:grpSpPr>
+        <a:xfrm>
+          <a:off x="0" y="0"/>
+          <a:ext cx="0" cy="0"/>
+          <a:chOff x="0" y="0"/>
+          <a:chExt cx="0" cy="0"/>
+        </a:xfrm>
+      </p:grpSpPr>
+      <p:sp>
+        <p:nvSpPr>
+          <p:cNvPr id="2" name="Text 0"/>
+          <p:cNvSpPr/>
+          <p:nvPr/>
+        </p:nvSpPr>
+        <p:spPr>
+          <a:xfrm>
+            <a:off x="609600" y="609600"/>
+            <a:ext cx="11301984" cy="190500"/>
+          </a:xfrm>
+          <a:prstGeom prst="rect">
+            <a:avLst/>
+          </a:prstGeom>
+          <a:noFill/>
+          <a:ln/>
+        </p:spPr>
+        <p:txBody>
+          <a:bodyPr wrap="square" lIns="0" tIns="0" rIns="0" bIns="0" rtlCol="0" anchor="t">
+            <a:normAutofit/>
+          </a:bodyPr>
+          <a:lstStyle/>
+          <a:p>
+            <a:pPr algn="l" indent="0" marL="0">
+              <a:lnSpc>
+                <a:spcPts val="1300"/>
+              </a:lnSpc>
+              <a:buNone/>
+            </a:pPr>
+            <a:r>
+              <a:rPr lang="en-US" sz="1300" b="1" spc="150" kern="0" dirty="0">
+                <a:solidFill>
+                  <a:srgbClr val="0C7D72"/>
+                </a:solidFill>
+                <a:latin typeface="Kanit" pitchFamily="34" charset="0"/>
+                <a:ea typeface="Kanit" pitchFamily="34" charset="-122"/>
+                <a:cs typeface="Kanit" pitchFamily="34" charset="-120"/>
+              </a:rPr>
+              <a:t>ขั้นตอนที่ 6 จาก 11</a:t>
+            </a:r>
+            <a:endParaRPr lang="en-US" sz="1300" dirty="0"/>
+          </a:p>
+        </p:txBody>
+      </p:sp>
+      <p:sp>
+        <p:nvSpPr>
+          <p:cNvPr id="3" name="Text 1"/>
+          <p:cNvSpPr/>
+          <p:nvPr>
+            <p:ph type="title"/>
+          </p:nvPr>
+        </p:nvSpPr>
+        <p:spPr>
+          <a:xfrm>
+            <a:off x="609600" y="838200"/>
+            <a:ext cx="11301984" cy="434280"/>
+          </a:xfrm>
+          <a:prstGeom prst="rect">
+            <a:avLst/>
+          </a:prstGeom>
+          <a:noFill/>
+          <a:ln/>
+        </p:spPr>
+        <p:txBody>
+          <a:bodyPr wrap="square" lIns="0" tIns="0" rIns="0" bIns="0" rtlCol="0" anchor="t">
+            <a:normAutofit/>
+          </a:bodyPr>
+          <a:lstStyle/>
+          <a:p>
+            <a:pPr algn="l" indent="0" marL="0">
+              <a:lnSpc>
+                <a:spcPts val="3220"/>
+              </a:lnSpc>
+              <a:buNone/>
+            </a:pPr>
+            <a:r>
+              <a:rPr lang="en-US" sz="2800" b="1" i="0" dirty="0">
+                <a:solidFill>
+                  <a:srgbClr val="0F2A29"/>
+                </a:solidFill>
+                <a:latin typeface="Kanit" pitchFamily="34" charset="0"/>
+                <a:ea typeface="Kanit" pitchFamily="34" charset="-122"/>
+                <a:cs typeface="Kanit" pitchFamily="34" charset="-120"/>
+              </a:rPr>
+              <a:t>คำขอ/อนุมัติ Write-off</a:t>
+            </a:r>
+            <a:endParaRPr lang="en-US" sz="2800" dirty="0"/>
+          </a:p>
+        </p:txBody>
+      </p:sp>
+      <p:sp>
+        <p:nvSpPr>
+          <p:cNvPr id="4" name="Shape 2"/>
+          <p:cNvSpPr/>
+          <p:nvPr/>
+        </p:nvSpPr>
+        <p:spPr>
+          <a:xfrm>
+            <a:off x="612775" y="1428055"/>
+            <a:ext cx="6597650" cy="4406900"/>
+          </a:xfrm>
+          <a:prstGeom prst="roundRect">
+            <a:avLst>
+              <a:gd name="adj" fmla="val 2810"/>
+            </a:avLst>
+          </a:prstGeom>
+          <a:solidFill>
+            <a:srgbClr val="FFFFFF"/>
+          </a:solidFill>
+          <a:ln w="6350">
+            <a:solidFill>
+              <a:srgbClr val="DCE7E5"/>
+            </a:solidFill>
+            <a:prstDash val="solid"/>
+          </a:ln>
+          <a:effectLst>
+            <a:outerShdw sx="100000" sy="100000" kx="0" ky="0" algn="bl" rotWithShape="0" blurRad="152400" dist="50800" dir="5400000">
+              <a:srgbClr val="114342">
+                <a:alpha val="10000"/>
+              </a:srgbClr>
+            </a:outerShdw>
+          </a:effectLst>
+        </p:spPr>
+      </p:sp>
+      <p:pic>
+        <p:nvPicPr>
+          <p:cNvPr id="5" name="Image 0" descr="ภาพหน้าจอ คำขอ/อนุมัติ Write-off">    </p:cNvPr>
+          <p:cNvPicPr>
+            <a:picLocks noChangeAspect="1"/>
+          </p:cNvPicPr>
+          <p:nvPr/>
+        </p:nvPicPr>
+        <p:blipFill>
+          <a:blip r:embed="rId1"/>
+          <a:stretch>
+            <a:fillRect/>
+          </a:stretch>
+        </p:blipFill>
+        <p:spPr>
+          <a:xfrm>
+            <a:off x="742950" y="1669960"/>
+            <a:ext cx="6337300" cy="3923090"/>
+          </a:xfrm>
+          <a:prstGeom prst="rect">
+            <a:avLst/>
+          </a:prstGeom>
+        </p:spPr>
+      </p:pic>
+      <p:sp>
+        <p:nvSpPr>
+          <p:cNvPr id="6" name="Text 3"/>
+          <p:cNvSpPr/>
+          <p:nvPr/>
+        </p:nvSpPr>
+        <p:spPr>
+          <a:xfrm>
+            <a:off x="7518400" y="1424880"/>
+            <a:ext cx="254000" cy="254000"/>
+          </a:xfrm>
+          <a:prstGeom prst="roundRect">
+            <a:avLst>
+              <a:gd name="adj" fmla="val 50000"/>
+            </a:avLst>
+          </a:prstGeom>
+          <a:solidFill>
+            <a:srgbClr val="0D9488"/>
+          </a:solidFill>
+          <a:ln/>
+        </p:spPr>
+        <p:txBody>
+          <a:bodyPr wrap="square" lIns="0" tIns="0" rIns="0" bIns="0" rtlCol="0" anchor="ctr">
+            <a:normAutofit/>
+          </a:bodyPr>
+          <a:lstStyle/>
+          <a:p>
+            <a:pPr algn="ctr" indent="0" marL="0">
+              <a:lnSpc>
+                <a:spcPts val="1000"/>
+              </a:lnSpc>
+              <a:buNone/>
+            </a:pPr>
+            <a:r>
+              <a:rPr lang="en-US" sz="1000" b="1" dirty="0">
+                <a:solidFill>
+                  <a:srgbClr val="FFFFFF"/>
+                </a:solidFill>
+                <a:latin typeface="Kanit" pitchFamily="34" charset="0"/>
+                <a:ea typeface="Kanit" pitchFamily="34" charset="-122"/>
+                <a:cs typeface="Kanit" pitchFamily="34" charset="-120"/>
+              </a:rPr>
+              <a:t>1</a:t>
+            </a:r>
+            <a:endParaRPr lang="en-US" sz="1000" dirty="0"/>
+          </a:p>
+        </p:txBody>
+      </p:sp>
+      <p:sp>
+        <p:nvSpPr>
+          <p:cNvPr id="7" name="Text 4"/>
+          <p:cNvSpPr/>
+          <p:nvPr/>
+        </p:nvSpPr>
+        <p:spPr>
+          <a:xfrm>
+            <a:off x="7874000" y="1424880"/>
+            <a:ext cx="2920603" cy="231775"/>
+          </a:xfrm>
+          <a:prstGeom prst="rect">
+            <a:avLst/>
+          </a:prstGeom>
+          <a:noFill/>
+          <a:ln/>
+        </p:spPr>
+        <p:txBody>
+          <a:bodyPr wrap="square" lIns="0" tIns="0" rIns="0" bIns="0" rtlCol="0" anchor="t">
+            <a:normAutofit/>
+          </a:bodyPr>
+          <a:lstStyle/>
+          <a:p>
+            <a:pPr algn="l" indent="0" marL="0">
+              <a:lnSpc>
+                <a:spcPts val="1625"/>
+              </a:lnSpc>
+              <a:buNone/>
+            </a:pPr>
+            <a:r>
+              <a:rPr lang="en-US" sz="1300" b="1" dirty="0">
+                <a:solidFill>
+                  <a:srgbClr val="0F2A29"/>
+                </a:solidFill>
+                <a:latin typeface="Sarabun" pitchFamily="34" charset="0"/>
+                <a:ea typeface="Sarabun" pitchFamily="34" charset="-122"/>
+                <a:cs typeface="Sarabun" pitchFamily="34" charset="-120"/>
+              </a:rPr>
+              <a:t>ค้นหาทรัพย์สินที่ต้องการตัดจำหน่าย</a:t>
+            </a:r>
+            <a:endParaRPr lang="en-US" sz="1300" dirty="0"/>
+          </a:p>
+        </p:txBody>
+      </p:sp>
+      <p:sp>
+        <p:nvSpPr>
+          <p:cNvPr id="8" name="Text 5"/>
+          <p:cNvSpPr/>
+          <p:nvPr/>
+        </p:nvSpPr>
+        <p:spPr>
+          <a:xfrm>
+            <a:off x="7874000" y="1656655"/>
+            <a:ext cx="2506851" cy="215205"/>
+          </a:xfrm>
+          <a:prstGeom prst="rect">
+            <a:avLst/>
+          </a:prstGeom>
+          <a:noFill/>
+          <a:ln/>
+        </p:spPr>
+        <p:txBody>
+          <a:bodyPr wrap="square" lIns="0" tIns="0" rIns="0" bIns="0" rtlCol="0" anchor="t">
+            <a:normAutofit/>
+          </a:bodyPr>
+          <a:lstStyle/>
+          <a:p>
+            <a:pPr algn="l" indent="0" marL="0">
+              <a:lnSpc>
+                <a:spcPts val="1495"/>
+              </a:lnSpc>
+              <a:buNone/>
+            </a:pPr>
+            <a:r>
+              <a:rPr lang="en-US" sz="1150" dirty="0">
+                <a:solidFill>
+                  <a:srgbClr val="46605D"/>
+                </a:solidFill>
+                <a:latin typeface="Sarabun" pitchFamily="34" charset="0"/>
+                <a:ea typeface="Sarabun" pitchFamily="34" charset="-122"/>
+                <a:cs typeface="Sarabun" pitchFamily="34" charset="-120"/>
+              </a:rPr>
+              <a:t>ค้นหาแล้วกรองให้ทันทีเหมือนหน้าอื่นๆ</a:t>
+            </a:r>
+            <a:endParaRPr lang="en-US" sz="1150" dirty="0"/>
+          </a:p>
+        </p:txBody>
+      </p:sp>
+      <p:sp>
+        <p:nvSpPr>
+          <p:cNvPr id="9" name="Text 6"/>
+          <p:cNvSpPr/>
+          <p:nvPr/>
+        </p:nvSpPr>
+        <p:spPr>
+          <a:xfrm>
+            <a:off x="7518400" y="1960761"/>
+            <a:ext cx="254000" cy="254000"/>
+          </a:xfrm>
+          <a:prstGeom prst="roundRect">
+            <a:avLst>
+              <a:gd name="adj" fmla="val 50000"/>
+            </a:avLst>
+          </a:prstGeom>
+          <a:solidFill>
+            <a:srgbClr val="0D9488"/>
+          </a:solidFill>
+          <a:ln/>
+        </p:spPr>
+        <p:txBody>
+          <a:bodyPr wrap="square" lIns="0" tIns="0" rIns="0" bIns="0" rtlCol="0" anchor="ctr">
+            <a:normAutofit/>
+          </a:bodyPr>
+          <a:lstStyle/>
+          <a:p>
+            <a:pPr algn="ctr" indent="0" marL="0">
+              <a:lnSpc>
+                <a:spcPts val="1000"/>
+              </a:lnSpc>
+              <a:buNone/>
+            </a:pPr>
+            <a:r>
+              <a:rPr lang="en-US" sz="1000" b="1" dirty="0">
+                <a:solidFill>
+                  <a:srgbClr val="FFFFFF"/>
+                </a:solidFill>
+                <a:latin typeface="Kanit" pitchFamily="34" charset="0"/>
+                <a:ea typeface="Kanit" pitchFamily="34" charset="-122"/>
+                <a:cs typeface="Kanit" pitchFamily="34" charset="-120"/>
+              </a:rPr>
+              <a:t>2</a:t>
+            </a:r>
+            <a:endParaRPr lang="en-US" sz="1000" dirty="0"/>
+          </a:p>
+        </p:txBody>
+      </p:sp>
+      <p:sp>
+        <p:nvSpPr>
+          <p:cNvPr id="10" name="Text 7"/>
+          <p:cNvSpPr/>
+          <p:nvPr/>
+        </p:nvSpPr>
+        <p:spPr>
+          <a:xfrm>
+            <a:off x="7874000" y="1960761"/>
+            <a:ext cx="2634595" cy="231775"/>
+          </a:xfrm>
+          <a:prstGeom prst="rect">
+            <a:avLst/>
+          </a:prstGeom>
+          <a:noFill/>
+          <a:ln/>
+        </p:spPr>
+        <p:txBody>
+          <a:bodyPr wrap="square" lIns="0" tIns="0" rIns="0" bIns="0" rtlCol="0" anchor="t">
+            <a:normAutofit/>
+          </a:bodyPr>
+          <a:lstStyle/>
+          <a:p>
+            <a:pPr algn="l" indent="0" marL="0">
+              <a:lnSpc>
+                <a:spcPts val="1625"/>
+              </a:lnSpc>
+              <a:buNone/>
+            </a:pPr>
+            <a:r>
+              <a:rPr lang="en-US" sz="1300" b="1" dirty="0">
+                <a:solidFill>
+                  <a:srgbClr val="0F2A29"/>
+                </a:solidFill>
+                <a:latin typeface="Sarabun" pitchFamily="34" charset="0"/>
+                <a:ea typeface="Sarabun" pitchFamily="34" charset="-122"/>
+                <a:cs typeface="Sarabun" pitchFamily="34" charset="-120"/>
+              </a:rPr>
+              <a:t>ป้ายแนะนำ</a:t>
+            </a:r>
+            <a:endParaRPr lang="en-US" sz="1300" dirty="0"/>
+          </a:p>
+        </p:txBody>
+      </p:sp>
+      <p:sp>
+        <p:nvSpPr>
+          <p:cNvPr id="11" name="Text 8"/>
+          <p:cNvSpPr/>
+          <p:nvPr/>
+        </p:nvSpPr>
+        <p:spPr>
+          <a:xfrm>
+            <a:off x="7874000" y="2192536"/>
+            <a:ext cx="3069431" cy="215205"/>
+          </a:xfrm>
+          <a:prstGeom prst="rect">
+            <a:avLst/>
+          </a:prstGeom>
+          <a:noFill/>
+          <a:ln/>
+        </p:spPr>
+        <p:txBody>
+          <a:bodyPr wrap="square" lIns="0" tIns="0" rIns="0" bIns="0" rtlCol="0" anchor="t">
+            <a:normAutofit/>
+          </a:bodyPr>
+          <a:lstStyle/>
+          <a:p>
+            <a:pPr algn="l" indent="0" marL="0">
+              <a:lnSpc>
+                <a:spcPts val="1495"/>
+              </a:lnSpc>
+              <a:buNone/>
+            </a:pPr>
+            <a:r>
+              <a:rPr lang="en-US" sz="1150" dirty="0">
+                <a:solidFill>
+                  <a:srgbClr val="46605D"/>
+                </a:solidFill>
+                <a:latin typeface="Sarabun" pitchFamily="34" charset="0"/>
+                <a:ea typeface="Sarabun" pitchFamily="34" charset="-122"/>
+                <a:cs typeface="Sarabun" pitchFamily="34" charset="-120"/>
+              </a:rPr>
+              <a:t>🔧 อยู่ระหว่างซ่อม / ⏰ เลยกำหนดคืนแล้ว</a:t>
+            </a:r>
+            <a:endParaRPr lang="en-US" sz="1150" dirty="0"/>
+          </a:p>
+        </p:txBody>
+      </p:sp>
+      <p:sp>
+        <p:nvSpPr>
+          <p:cNvPr id="12" name="Text 9"/>
+          <p:cNvSpPr/>
+          <p:nvPr/>
+        </p:nvSpPr>
+        <p:spPr>
+          <a:xfrm>
+            <a:off x="7518400" y="2496641"/>
+            <a:ext cx="254000" cy="254000"/>
+          </a:xfrm>
+          <a:prstGeom prst="roundRect">
+            <a:avLst>
+              <a:gd name="adj" fmla="val 50000"/>
+            </a:avLst>
+          </a:prstGeom>
+          <a:solidFill>
+            <a:srgbClr val="0D9488"/>
+          </a:solidFill>
+          <a:ln/>
+        </p:spPr>
+        <p:txBody>
+          <a:bodyPr wrap="square" lIns="0" tIns="0" rIns="0" bIns="0" rtlCol="0" anchor="ctr">
+            <a:normAutofit/>
+          </a:bodyPr>
+          <a:lstStyle/>
+          <a:p>
+            <a:pPr algn="ctr" indent="0" marL="0">
+              <a:lnSpc>
+                <a:spcPts val="1000"/>
+              </a:lnSpc>
+              <a:buNone/>
+            </a:pPr>
+            <a:r>
+              <a:rPr lang="en-US" sz="1000" b="1" dirty="0">
+                <a:solidFill>
+                  <a:srgbClr val="FFFFFF"/>
+                </a:solidFill>
+                <a:latin typeface="Kanit" pitchFamily="34" charset="0"/>
+                <a:ea typeface="Kanit" pitchFamily="34" charset="-122"/>
+                <a:cs typeface="Kanit" pitchFamily="34" charset="-120"/>
+              </a:rPr>
+              <a:t>3</a:t>
+            </a:r>
+            <a:endParaRPr lang="en-US" sz="1000" dirty="0"/>
+          </a:p>
+        </p:txBody>
+      </p:sp>
+      <p:sp>
+        <p:nvSpPr>
+          <p:cNvPr id="13" name="Text 10"/>
+          <p:cNvSpPr/>
+          <p:nvPr/>
+        </p:nvSpPr>
+        <p:spPr>
+          <a:xfrm>
+            <a:off x="7874000" y="2496641"/>
+            <a:ext cx="2761417" cy="231775"/>
+          </a:xfrm>
+          <a:prstGeom prst="rect">
+            <a:avLst/>
+          </a:prstGeom>
+          <a:noFill/>
+          <a:ln/>
+        </p:spPr>
+        <p:txBody>
+          <a:bodyPr wrap="square" lIns="0" tIns="0" rIns="0" bIns="0" rtlCol="0" anchor="t">
+            <a:normAutofit/>
+          </a:bodyPr>
+          <a:lstStyle/>
+          <a:p>
+            <a:pPr algn="l" indent="0" marL="0">
+              <a:lnSpc>
+                <a:spcPts val="1625"/>
+              </a:lnSpc>
+              <a:buNone/>
+            </a:pPr>
+            <a:r>
+              <a:rPr lang="en-US" sz="1300" b="1" dirty="0">
+                <a:solidFill>
+                  <a:srgbClr val="0F2A29"/>
+                </a:solidFill>
+                <a:latin typeface="Sarabun" pitchFamily="34" charset="0"/>
+                <a:ea typeface="Sarabun" pitchFamily="34" charset="-122"/>
+                <a:cs typeface="Sarabun" pitchFamily="34" charset="-120"/>
+              </a:rPr>
+              <a:t>สถานะและที่ตั้ง/ผู้ถือครองปัจจุบัน</a:t>
+            </a:r>
+            <a:endParaRPr lang="en-US" sz="1300" dirty="0"/>
+          </a:p>
+        </p:txBody>
+      </p:sp>
+      <p:sp>
+        <p:nvSpPr>
+          <p:cNvPr id="14" name="Text 11"/>
+          <p:cNvSpPr/>
+          <p:nvPr/>
+        </p:nvSpPr>
+        <p:spPr>
+          <a:xfrm>
+            <a:off x="7874000" y="2728416"/>
+            <a:ext cx="2370216" cy="215205"/>
+          </a:xfrm>
+          <a:prstGeom prst="rect">
+            <a:avLst/>
+          </a:prstGeom>
+          <a:noFill/>
+          <a:ln/>
+        </p:spPr>
+        <p:txBody>
+          <a:bodyPr wrap="square" lIns="0" tIns="0" rIns="0" bIns="0" rtlCol="0" anchor="t">
+            <a:normAutofit/>
+          </a:bodyPr>
+          <a:lstStyle/>
+          <a:p>
+            <a:pPr algn="l" indent="0" marL="0">
+              <a:lnSpc>
+                <a:spcPts val="1495"/>
+              </a:lnSpc>
+              <a:buNone/>
+            </a:pPr>
+            <a:r>
+              <a:rPr lang="en-US" sz="1150" dirty="0">
+                <a:solidFill>
+                  <a:srgbClr val="46605D"/>
+                </a:solidFill>
+                <a:latin typeface="Sarabun" pitchFamily="34" charset="0"/>
+                <a:ea typeface="Sarabun" pitchFamily="34" charset="-122"/>
+                <a:cs typeface="Sarabun" pitchFamily="34" charset="-120"/>
+              </a:rPr>
+              <a:t>ช่วยประกอบการตัดสินใจ</a:t>
+            </a:r>
+            <a:endParaRPr lang="en-US" sz="1150" dirty="0"/>
+          </a:p>
+        </p:txBody>
+      </p:sp>
+      <p:sp>
+        <p:nvSpPr>
+          <p:cNvPr id="15" name="Text 12"/>
+          <p:cNvSpPr/>
+          <p:nvPr/>
+        </p:nvSpPr>
+        <p:spPr>
+          <a:xfrm>
+            <a:off x="7518400" y="3032522"/>
+            <a:ext cx="254000" cy="254000"/>
+          </a:xfrm>
+          <a:prstGeom prst="roundRect">
+            <a:avLst>
+              <a:gd name="adj" fmla="val 50000"/>
+            </a:avLst>
+          </a:prstGeom>
+          <a:solidFill>
+            <a:srgbClr val="0D9488"/>
+          </a:solidFill>
+          <a:ln/>
+        </p:spPr>
+        <p:txBody>
+          <a:bodyPr wrap="square" lIns="0" tIns="0" rIns="0" bIns="0" rtlCol="0" anchor="ctr">
+            <a:normAutofit/>
+          </a:bodyPr>
+          <a:lstStyle/>
+          <a:p>
+            <a:pPr algn="ctr" indent="0" marL="0">
+              <a:lnSpc>
+                <a:spcPts val="1000"/>
+              </a:lnSpc>
+              <a:buNone/>
+            </a:pPr>
+            <a:r>
+              <a:rPr lang="en-US" sz="1000" b="1" dirty="0">
+                <a:solidFill>
+                  <a:srgbClr val="FFFFFF"/>
+                </a:solidFill>
+                <a:latin typeface="Kanit" pitchFamily="34" charset="0"/>
+                <a:ea typeface="Kanit" pitchFamily="34" charset="-122"/>
+                <a:cs typeface="Kanit" pitchFamily="34" charset="-120"/>
+              </a:rPr>
+              <a:t>4</a:t>
+            </a:r>
+            <a:endParaRPr lang="en-US" sz="1000" dirty="0"/>
+          </a:p>
+        </p:txBody>
+      </p:sp>
+      <p:sp>
+        <p:nvSpPr>
+          <p:cNvPr id="16" name="Text 13"/>
+          <p:cNvSpPr/>
+          <p:nvPr/>
+        </p:nvSpPr>
+        <p:spPr>
+          <a:xfrm>
+            <a:off x="7874000" y="3032522"/>
+            <a:ext cx="2570723" cy="231775"/>
+          </a:xfrm>
+          <a:prstGeom prst="rect">
+            <a:avLst/>
+          </a:prstGeom>
+          <a:noFill/>
+          <a:ln/>
+        </p:spPr>
+        <p:txBody>
+          <a:bodyPr wrap="square" lIns="0" tIns="0" rIns="0" bIns="0" rtlCol="0" anchor="t">
+            <a:normAutofit/>
+          </a:bodyPr>
+          <a:lstStyle/>
+          <a:p>
+            <a:pPr algn="l" indent="0" marL="0">
+              <a:lnSpc>
+                <a:spcPts val="1625"/>
+              </a:lnSpc>
+              <a:buNone/>
+            </a:pPr>
+            <a:r>
+              <a:rPr lang="en-US" sz="1300" b="1" dirty="0">
+                <a:solidFill>
+                  <a:srgbClr val="0F2A29"/>
+                </a:solidFill>
+                <a:latin typeface="Sarabun" pitchFamily="34" charset="0"/>
+                <a:ea typeface="Sarabun" pitchFamily="34" charset="-122"/>
+                <a:cs typeface="Sarabun" pitchFamily="34" charset="-120"/>
+              </a:rPr>
+              <a:t>เลือกจากตารางได้เลย</a:t>
+            </a:r>
+            <a:endParaRPr lang="en-US" sz="1300" dirty="0"/>
+          </a:p>
+        </p:txBody>
+      </p:sp>
+      <p:sp>
+        <p:nvSpPr>
+          <p:cNvPr id="17" name="Text 14"/>
+          <p:cNvSpPr/>
+          <p:nvPr/>
+        </p:nvSpPr>
+        <p:spPr>
+          <a:xfrm>
+            <a:off x="7874000" y="3264297"/>
+            <a:ext cx="2995017" cy="215205"/>
+          </a:xfrm>
+          <a:prstGeom prst="rect">
+            <a:avLst/>
+          </a:prstGeom>
+          <a:noFill/>
+          <a:ln/>
+        </p:spPr>
+        <p:txBody>
+          <a:bodyPr wrap="square" lIns="0" tIns="0" rIns="0" bIns="0" rtlCol="0" anchor="t">
+            <a:normAutofit/>
+          </a:bodyPr>
+          <a:lstStyle/>
+          <a:p>
+            <a:pPr algn="l" indent="0" marL="0">
+              <a:lnSpc>
+                <a:spcPts val="1495"/>
+              </a:lnSpc>
+              <a:buNone/>
+            </a:pPr>
+            <a:r>
+              <a:rPr lang="en-US" sz="1150" dirty="0">
+                <a:solidFill>
+                  <a:srgbClr val="46605D"/>
+                </a:solidFill>
+                <a:latin typeface="Sarabun" pitchFamily="34" charset="0"/>
+                <a:ea typeface="Sarabun" pitchFamily="34" charset="-122"/>
+                <a:cs typeface="Sarabun" pitchFamily="34" charset="-120"/>
+              </a:rPr>
+              <a:t>ใช้งานคล้ายกับตอนเลือกเครื่องจ่ายอุปกรณ์</a:t>
+            </a:r>
+            <a:endParaRPr lang="en-US" sz="1150" dirty="0"/>
+          </a:p>
+        </p:txBody>
+      </p:sp>
+      <p:sp>
+        <p:nvSpPr>
+          <p:cNvPr id="18" name="Text 15"/>
+          <p:cNvSpPr/>
+          <p:nvPr/>
+        </p:nvSpPr>
+        <p:spPr>
+          <a:xfrm>
+            <a:off x="654304" y="6256040"/>
+            <a:ext cx="10883392" cy="220960"/>
+          </a:xfrm>
+          <a:prstGeom prst="rect">
+            <a:avLst/>
+          </a:prstGeom>
+          <a:noFill/>
+          <a:ln/>
+        </p:spPr>
+        <p:txBody>
+          <a:bodyPr wrap="square" lIns="0" tIns="0" rIns="0" bIns="0" rtlCol="0" anchor="t">
+            <a:normAutofit/>
+          </a:bodyPr>
+          <a:lstStyle/>
+          <a:p>
+            <a:pPr algn="ctr" indent="0" marL="0">
+              <a:lnSpc>
+                <a:spcPts val="1540"/>
+              </a:lnSpc>
+              <a:buNone/>
+            </a:pPr>
+            <a:r>
+              <a:rPr lang="en-US" sz="1100" dirty="0">
+                <a:solidFill>
+                  <a:srgbClr val="7C938F"/>
+                </a:solidFill>
+                <a:latin typeface="Sarabun" pitchFamily="34" charset="0"/>
+                <a:ea typeface="Sarabun" pitchFamily="34" charset="-122"/>
+                <a:cs typeface="Sarabun" pitchFamily="34" charset="-120"/>
+              </a:rPr>
+              <a:t>Bedrock Analytics · PMeX Enterprise — Stock Module (Mockup)</a:t>
+            </a:r>
+            <a:endParaRPr lang="en-US" sz="1100" dirty="0"/>
+          </a:p>
+        </p:txBody>
+      </p:sp>
+    </p:spTree>
+  </p:cSld>
+  <p:clrMapOvr>
+    <a:masterClrMapping/>
+  </p:clrMapOvr>
+</p:sld>
+</file>
+
+<file path=ppt/slides/slide15.xml><?xml version="1.0" encoding="utf-8"?>
+<p:sld xmlns:a="http://schemas.openxmlformats.org/drawingml/2006/main" xmlns:r="http://schemas.openxmlformats.org/officeDocument/2006/relationships" xmlns:p="http://schemas.openxmlformats.org/presentationml/2006/main">
+  <p:cSld name="Slide 15">
     <p:bg>
       <p:bgPr>
         <a:solidFill>
@@ -6754,910 +7791,6 @@
       <p:sp>
         <p:nvSpPr>
           <p:cNvPr id="5" name="Text 3"/>
-          <p:cNvSpPr/>
-          <p:nvPr/>
-        </p:nvSpPr>
-        <p:spPr>
-          <a:xfrm>
-            <a:off x="654304" y="6256040"/>
-            <a:ext cx="10883392" cy="220960"/>
-          </a:xfrm>
-          <a:prstGeom prst="rect">
-            <a:avLst/>
-          </a:prstGeom>
-          <a:noFill/>
-          <a:ln/>
-        </p:spPr>
-        <p:txBody>
-          <a:bodyPr wrap="square" lIns="0" tIns="0" rIns="0" bIns="0" rtlCol="0" anchor="t">
-            <a:normAutofit/>
-          </a:bodyPr>
-          <a:lstStyle/>
-          <a:p>
-            <a:pPr algn="ctr" indent="0" marL="0">
-              <a:lnSpc>
-                <a:spcPts val="1540"/>
-              </a:lnSpc>
-              <a:buNone/>
-            </a:pPr>
-            <a:r>
-              <a:rPr lang="en-US" sz="1100" dirty="0">
-                <a:solidFill>
-                  <a:srgbClr val="7C938F"/>
-                </a:solidFill>
-                <a:latin typeface="Sarabun" pitchFamily="34" charset="0"/>
-                <a:ea typeface="Sarabun" pitchFamily="34" charset="-122"/>
-                <a:cs typeface="Sarabun" pitchFamily="34" charset="-120"/>
-              </a:rPr>
-              <a:t>Bedrock Analytics · PMeX Enterprise — Stock Module (Mockup)</a:t>
-            </a:r>
-            <a:endParaRPr lang="en-US" sz="1100" dirty="0"/>
-          </a:p>
-        </p:txBody>
-      </p:sp>
-    </p:spTree>
-  </p:cSld>
-  <p:clrMapOvr>
-    <a:masterClrMapping/>
-  </p:clrMapOvr>
-</p:sld>
-</file>
-
-<file path=ppt/slides/slide15.xml><?xml version="1.0" encoding="utf-8"?>
-<p:sld xmlns:a="http://schemas.openxmlformats.org/drawingml/2006/main" xmlns:r="http://schemas.openxmlformats.org/officeDocument/2006/relationships" xmlns:p="http://schemas.openxmlformats.org/presentationml/2006/main">
-  <p:cSld name="Slide 15">
-    <p:bg>
-      <p:bgPr>
-        <a:solidFill>
-          <a:srgbClr val="F6FAF9"/>
-        </a:solidFill>
-      </p:bgPr>
-    </p:bg>
-    <p:spTree>
-      <p:nvGrpSpPr>
-        <p:cNvPr id="1" name=""/>
-        <p:cNvGrpSpPr/>
-        <p:nvPr/>
-      </p:nvGrpSpPr>
-      <p:grpSpPr>
-        <a:xfrm>
-          <a:off x="0" y="0"/>
-          <a:ext cx="0" cy="0"/>
-          <a:chOff x="0" y="0"/>
-          <a:chExt cx="0" cy="0"/>
-        </a:xfrm>
-      </p:grpSpPr>
-      <p:sp>
-        <p:nvSpPr>
-          <p:cNvPr id="2" name="Text 0"/>
-          <p:cNvSpPr/>
-          <p:nvPr/>
-        </p:nvSpPr>
-        <p:spPr>
-          <a:xfrm>
-            <a:off x="609600" y="609600"/>
-            <a:ext cx="11301984" cy="190500"/>
-          </a:xfrm>
-          <a:prstGeom prst="rect">
-            <a:avLst/>
-          </a:prstGeom>
-          <a:noFill/>
-          <a:ln/>
-        </p:spPr>
-        <p:txBody>
-          <a:bodyPr wrap="square" lIns="0" tIns="0" rIns="0" bIns="0" rtlCol="0" anchor="t">
-            <a:normAutofit/>
-          </a:bodyPr>
-          <a:lstStyle/>
-          <a:p>
-            <a:pPr algn="l" indent="0" marL="0">
-              <a:lnSpc>
-                <a:spcPts val="1300"/>
-              </a:lnSpc>
-              <a:buNone/>
-            </a:pPr>
-            <a:r>
-              <a:rPr lang="en-US" sz="1300" b="1" spc="150" kern="0" dirty="0">
-                <a:solidFill>
-                  <a:srgbClr val="0C7D72"/>
-                </a:solidFill>
-                <a:latin typeface="Kanit" pitchFamily="34" charset="0"/>
-                <a:ea typeface="Kanit" pitchFamily="34" charset="-122"/>
-                <a:cs typeface="Kanit" pitchFamily="34" charset="-120"/>
-              </a:rPr>
-              <a:t>ขั้นตอนที่ 7 จาก 11</a:t>
-            </a:r>
-            <a:endParaRPr lang="en-US" sz="1300" dirty="0"/>
-          </a:p>
-        </p:txBody>
-      </p:sp>
-      <p:sp>
-        <p:nvSpPr>
-          <p:cNvPr id="3" name="Text 1"/>
-          <p:cNvSpPr/>
-          <p:nvPr>
-            <p:ph type="title"/>
-          </p:nvPr>
-        </p:nvSpPr>
-        <p:spPr>
-          <a:xfrm>
-            <a:off x="609600" y="838200"/>
-            <a:ext cx="11301984" cy="434280"/>
-          </a:xfrm>
-          <a:prstGeom prst="rect">
-            <a:avLst/>
-          </a:prstGeom>
-          <a:noFill/>
-          <a:ln/>
-        </p:spPr>
-        <p:txBody>
-          <a:bodyPr wrap="square" lIns="0" tIns="0" rIns="0" bIns="0" rtlCol="0" anchor="t">
-            <a:normAutofit/>
-          </a:bodyPr>
-          <a:lstStyle/>
-          <a:p>
-            <a:pPr algn="l" indent="0" marL="0">
-              <a:lnSpc>
-                <a:spcPts val="3220"/>
-              </a:lnSpc>
-              <a:buNone/>
-            </a:pPr>
-            <a:r>
-              <a:rPr lang="en-US" sz="2800" b="1" i="0" dirty="0">
-                <a:solidFill>
-                  <a:srgbClr val="0F2A29"/>
-                </a:solidFill>
-                <a:latin typeface="Kanit" pitchFamily="34" charset="0"/>
-                <a:ea typeface="Kanit" pitchFamily="34" charset="-122"/>
-                <a:cs typeface="Kanit" pitchFamily="34" charset="-120"/>
-              </a:rPr>
-              <a:t>รับของเข้าคลัง (Receive)</a:t>
-            </a:r>
-            <a:endParaRPr lang="en-US" sz="2800" dirty="0"/>
-          </a:p>
-        </p:txBody>
-      </p:sp>
-      <p:sp>
-        <p:nvSpPr>
-          <p:cNvPr id="4" name="Shape 2"/>
-          <p:cNvSpPr/>
-          <p:nvPr/>
-        </p:nvSpPr>
-        <p:spPr>
-          <a:xfrm>
-            <a:off x="612775" y="1428055"/>
-            <a:ext cx="6597650" cy="4406900"/>
-          </a:xfrm>
-          <a:prstGeom prst="roundRect">
-            <a:avLst>
-              <a:gd name="adj" fmla="val 2810"/>
-            </a:avLst>
-          </a:prstGeom>
-          <a:solidFill>
-            <a:srgbClr val="FFFFFF"/>
-          </a:solidFill>
-          <a:ln w="6350">
-            <a:solidFill>
-              <a:srgbClr val="DCE7E5"/>
-            </a:solidFill>
-            <a:prstDash val="solid"/>
-          </a:ln>
-          <a:effectLst>
-            <a:outerShdw sx="100000" sy="100000" kx="0" ky="0" algn="bl" rotWithShape="0" blurRad="152400" dist="50800" dir="5400000">
-              <a:srgbClr val="114342">
-                <a:alpha val="10000"/>
-              </a:srgbClr>
-            </a:outerShdw>
-          </a:effectLst>
-        </p:spPr>
-      </p:sp>
-      <p:pic>
-        <p:nvPicPr>
-          <p:cNvPr id="5" name="Image 0" descr="ภาพหน้าจอ รับของเข้าคลัง (Receive)">    </p:cNvPr>
-          <p:cNvPicPr>
-            <a:picLocks noChangeAspect="1"/>
-          </p:cNvPicPr>
-          <p:nvPr/>
-        </p:nvPicPr>
-        <p:blipFill>
-          <a:blip r:embed="rId1"/>
-          <a:stretch>
-            <a:fillRect/>
-          </a:stretch>
-        </p:blipFill>
-        <p:spPr>
-          <a:xfrm>
-            <a:off x="742950" y="1669960"/>
-            <a:ext cx="6337300" cy="3923090"/>
-          </a:xfrm>
-          <a:prstGeom prst="rect">
-            <a:avLst/>
-          </a:prstGeom>
-        </p:spPr>
-      </p:pic>
-      <p:sp>
-        <p:nvSpPr>
-          <p:cNvPr id="6" name="Text 3"/>
-          <p:cNvSpPr/>
-          <p:nvPr/>
-        </p:nvSpPr>
-        <p:spPr>
-          <a:xfrm>
-            <a:off x="7518400" y="1424880"/>
-            <a:ext cx="254000" cy="254000"/>
-          </a:xfrm>
-          <a:prstGeom prst="roundRect">
-            <a:avLst>
-              <a:gd name="adj" fmla="val 50000"/>
-            </a:avLst>
-          </a:prstGeom>
-          <a:solidFill>
-            <a:srgbClr val="0D9488"/>
-          </a:solidFill>
-          <a:ln/>
-        </p:spPr>
-        <p:txBody>
-          <a:bodyPr wrap="square" lIns="0" tIns="0" rIns="0" bIns="0" rtlCol="0" anchor="ctr">
-            <a:normAutofit/>
-          </a:bodyPr>
-          <a:lstStyle/>
-          <a:p>
-            <a:pPr algn="ctr" indent="0" marL="0">
-              <a:lnSpc>
-                <a:spcPts val="1000"/>
-              </a:lnSpc>
-              <a:buNone/>
-            </a:pPr>
-            <a:r>
-              <a:rPr lang="en-US" sz="1000" b="1" dirty="0">
-                <a:solidFill>
-                  <a:srgbClr val="FFFFFF"/>
-                </a:solidFill>
-                <a:latin typeface="Kanit" pitchFamily="34" charset="0"/>
-                <a:ea typeface="Kanit" pitchFamily="34" charset="-122"/>
-                <a:cs typeface="Kanit" pitchFamily="34" charset="-120"/>
-              </a:rPr>
-              <a:t>1</a:t>
-            </a:r>
-            <a:endParaRPr lang="en-US" sz="1000" dirty="0"/>
-          </a:p>
-        </p:txBody>
-      </p:sp>
-      <p:sp>
-        <p:nvSpPr>
-          <p:cNvPr id="7" name="Text 4"/>
-          <p:cNvSpPr/>
-          <p:nvPr/>
-        </p:nvSpPr>
-        <p:spPr>
-          <a:xfrm>
-            <a:off x="7874000" y="1424880"/>
-            <a:ext cx="2718600" cy="231775"/>
-          </a:xfrm>
-          <a:prstGeom prst="rect">
-            <a:avLst/>
-          </a:prstGeom>
-          <a:noFill/>
-          <a:ln/>
-        </p:spPr>
-        <p:txBody>
-          <a:bodyPr wrap="square" lIns="0" tIns="0" rIns="0" bIns="0" rtlCol="0" anchor="t">
-            <a:normAutofit/>
-          </a:bodyPr>
-          <a:lstStyle/>
-          <a:p>
-            <a:pPr algn="l" indent="0" marL="0">
-              <a:lnSpc>
-                <a:spcPts val="1625"/>
-              </a:lnSpc>
-              <a:buNone/>
-            </a:pPr>
-            <a:r>
-              <a:rPr lang="en-US" sz="1300" b="1" dirty="0">
-                <a:solidFill>
-                  <a:srgbClr val="0F2A29"/>
-                </a:solidFill>
-                <a:latin typeface="Sarabun" pitchFamily="34" charset="0"/>
-                <a:ea typeface="Sarabun" pitchFamily="34" charset="-122"/>
-                <a:cs typeface="Sarabun" pitchFamily="34" charset="-120"/>
-              </a:rPr>
-              <a:t>กรอกทีละชิ้น</a:t>
-            </a:r>
-            <a:endParaRPr lang="en-US" sz="1300" dirty="0"/>
-          </a:p>
-        </p:txBody>
-      </p:sp>
-      <p:sp>
-        <p:nvSpPr>
-          <p:cNvPr id="8" name="Text 5"/>
-          <p:cNvSpPr/>
-          <p:nvPr/>
-        </p:nvSpPr>
-        <p:spPr>
-          <a:xfrm>
-            <a:off x="7874000" y="1656655"/>
-            <a:ext cx="3167301" cy="215205"/>
-          </a:xfrm>
-          <a:prstGeom prst="rect">
-            <a:avLst/>
-          </a:prstGeom>
-          <a:noFill/>
-          <a:ln/>
-        </p:spPr>
-        <p:txBody>
-          <a:bodyPr wrap="square" lIns="0" tIns="0" rIns="0" bIns="0" rtlCol="0" anchor="t">
-            <a:normAutofit/>
-          </a:bodyPr>
-          <a:lstStyle/>
-          <a:p>
-            <a:pPr algn="l" indent="0" marL="0">
-              <a:lnSpc>
-                <a:spcPts val="1495"/>
-              </a:lnSpc>
-              <a:buNone/>
-            </a:pPr>
-            <a:r>
-              <a:rPr lang="en-US" sz="1150" dirty="0">
-                <a:solidFill>
-                  <a:srgbClr val="46605D"/>
-                </a:solidFill>
-                <a:latin typeface="Sarabun" pitchFamily="34" charset="0"/>
-                <a:ea typeface="Sarabun" pitchFamily="34" charset="-122"/>
-                <a:cs typeface="Sarabun" pitchFamily="34" charset="-120"/>
-              </a:rPr>
-              <a:t>ครบทุก field ตามไฟล์ “Upload Printer” จริง</a:t>
-            </a:r>
-            <a:endParaRPr lang="en-US" sz="1150" dirty="0"/>
-          </a:p>
-        </p:txBody>
-      </p:sp>
-      <p:sp>
-        <p:nvSpPr>
-          <p:cNvPr id="9" name="Text 6"/>
-          <p:cNvSpPr/>
-          <p:nvPr/>
-        </p:nvSpPr>
-        <p:spPr>
-          <a:xfrm>
-            <a:off x="7518400" y="1960761"/>
-            <a:ext cx="254000" cy="254000"/>
-          </a:xfrm>
-          <a:prstGeom prst="roundRect">
-            <a:avLst>
-              <a:gd name="adj" fmla="val 50000"/>
-            </a:avLst>
-          </a:prstGeom>
-          <a:solidFill>
-            <a:srgbClr val="0D9488"/>
-          </a:solidFill>
-          <a:ln/>
-        </p:spPr>
-        <p:txBody>
-          <a:bodyPr wrap="square" lIns="0" tIns="0" rIns="0" bIns="0" rtlCol="0" anchor="ctr">
-            <a:normAutofit/>
-          </a:bodyPr>
-          <a:lstStyle/>
-          <a:p>
-            <a:pPr algn="ctr" indent="0" marL="0">
-              <a:lnSpc>
-                <a:spcPts val="1000"/>
-              </a:lnSpc>
-              <a:buNone/>
-            </a:pPr>
-            <a:r>
-              <a:rPr lang="en-US" sz="1000" b="1" dirty="0">
-                <a:solidFill>
-                  <a:srgbClr val="FFFFFF"/>
-                </a:solidFill>
-                <a:latin typeface="Kanit" pitchFamily="34" charset="0"/>
-                <a:ea typeface="Kanit" pitchFamily="34" charset="-122"/>
-                <a:cs typeface="Kanit" pitchFamily="34" charset="-120"/>
-              </a:rPr>
-              <a:t>2</a:t>
-            </a:r>
-            <a:endParaRPr lang="en-US" sz="1000" dirty="0"/>
-          </a:p>
-        </p:txBody>
-      </p:sp>
-      <p:sp>
-        <p:nvSpPr>
-          <p:cNvPr id="10" name="Text 7"/>
-          <p:cNvSpPr/>
-          <p:nvPr/>
-        </p:nvSpPr>
-        <p:spPr>
-          <a:xfrm>
-            <a:off x="7874000" y="1960761"/>
-            <a:ext cx="3186827" cy="231775"/>
-          </a:xfrm>
-          <a:prstGeom prst="rect">
-            <a:avLst/>
-          </a:prstGeom>
-          <a:noFill/>
-          <a:ln/>
-        </p:spPr>
-        <p:txBody>
-          <a:bodyPr wrap="square" lIns="0" tIns="0" rIns="0" bIns="0" rtlCol="0" anchor="t">
-            <a:normAutofit/>
-          </a:bodyPr>
-          <a:lstStyle/>
-          <a:p>
-            <a:pPr algn="l" indent="0" marL="0">
-              <a:lnSpc>
-                <a:spcPts val="1625"/>
-              </a:lnSpc>
-              <a:buNone/>
-            </a:pPr>
-            <a:r>
-              <a:rPr lang="en-US" sz="1300" b="1" dirty="0">
-                <a:solidFill>
-                  <a:srgbClr val="0F2A29"/>
-                </a:solidFill>
-                <a:latin typeface="Sarabun" pitchFamily="34" charset="0"/>
-                <a:ea typeface="Sarabun" pitchFamily="34" charset="-122"/>
-                <a:cs typeface="Sarabun" pitchFamily="34" charset="-120"/>
-              </a:rPr>
-              <a:t>BEDROCK ID / ประเภท / Serial / Flag</a:t>
-            </a:r>
-            <a:endParaRPr lang="en-US" sz="1300" dirty="0"/>
-          </a:p>
-        </p:txBody>
-      </p:sp>
-      <p:sp>
-        <p:nvSpPr>
-          <p:cNvPr id="11" name="Text 8"/>
-          <p:cNvSpPr/>
-          <p:nvPr/>
-        </p:nvSpPr>
-        <p:spPr>
-          <a:xfrm>
-            <a:off x="7874000" y="2192536"/>
-            <a:ext cx="2735360" cy="215205"/>
-          </a:xfrm>
-          <a:prstGeom prst="rect">
-            <a:avLst/>
-          </a:prstGeom>
-          <a:noFill/>
-          <a:ln/>
-        </p:spPr>
-        <p:txBody>
-          <a:bodyPr wrap="square" lIns="0" tIns="0" rIns="0" bIns="0" rtlCol="0" anchor="t">
-            <a:normAutofit/>
-          </a:bodyPr>
-          <a:lstStyle/>
-          <a:p>
-            <a:pPr algn="l" indent="0" marL="0">
-              <a:lnSpc>
-                <a:spcPts val="1495"/>
-              </a:lnSpc>
-              <a:buNone/>
-            </a:pPr>
-            <a:r>
-              <a:rPr lang="en-US" sz="1150" dirty="0">
-                <a:solidFill>
-                  <a:srgbClr val="46605D"/>
-                </a:solidFill>
-                <a:latin typeface="Sarabun" pitchFamily="34" charset="0"/>
-                <a:ea typeface="Sarabun" pitchFamily="34" charset="-122"/>
-                <a:cs typeface="Sarabun" pitchFamily="34" charset="-120"/>
-              </a:rPr>
-              <a:t>ระบุรายละเอียดทรัพย์สินแต่ละชิ้น</a:t>
-            </a:r>
-            <a:endParaRPr lang="en-US" sz="1150" dirty="0"/>
-          </a:p>
-        </p:txBody>
-      </p:sp>
-      <p:sp>
-        <p:nvSpPr>
-          <p:cNvPr id="12" name="Text 9"/>
-          <p:cNvSpPr/>
-          <p:nvPr/>
-        </p:nvSpPr>
-        <p:spPr>
-          <a:xfrm>
-            <a:off x="7518400" y="2496641"/>
-            <a:ext cx="254000" cy="254000"/>
-          </a:xfrm>
-          <a:prstGeom prst="roundRect">
-            <a:avLst>
-              <a:gd name="adj" fmla="val 50000"/>
-            </a:avLst>
-          </a:prstGeom>
-          <a:solidFill>
-            <a:srgbClr val="0D9488"/>
-          </a:solidFill>
-          <a:ln/>
-        </p:spPr>
-        <p:txBody>
-          <a:bodyPr wrap="square" lIns="0" tIns="0" rIns="0" bIns="0" rtlCol="0" anchor="ctr">
-            <a:normAutofit/>
-          </a:bodyPr>
-          <a:lstStyle/>
-          <a:p>
-            <a:pPr algn="ctr" indent="0" marL="0">
-              <a:lnSpc>
-                <a:spcPts val="1000"/>
-              </a:lnSpc>
-              <a:buNone/>
-            </a:pPr>
-            <a:r>
-              <a:rPr lang="en-US" sz="1000" b="1" dirty="0">
-                <a:solidFill>
-                  <a:srgbClr val="FFFFFF"/>
-                </a:solidFill>
-                <a:latin typeface="Kanit" pitchFamily="34" charset="0"/>
-                <a:ea typeface="Kanit" pitchFamily="34" charset="-122"/>
-                <a:cs typeface="Kanit" pitchFamily="34" charset="-120"/>
-              </a:rPr>
-              <a:t>3</a:t>
-            </a:r>
-            <a:endParaRPr lang="en-US" sz="1000" dirty="0"/>
-          </a:p>
-        </p:txBody>
-      </p:sp>
-      <p:sp>
-        <p:nvSpPr>
-          <p:cNvPr id="13" name="Text 10"/>
-          <p:cNvSpPr/>
-          <p:nvPr/>
-        </p:nvSpPr>
-        <p:spPr>
-          <a:xfrm>
-            <a:off x="7874000" y="2496641"/>
-            <a:ext cx="2196790" cy="231775"/>
-          </a:xfrm>
-          <a:prstGeom prst="rect">
-            <a:avLst/>
-          </a:prstGeom>
-          <a:noFill/>
-          <a:ln/>
-        </p:spPr>
-        <p:txBody>
-          <a:bodyPr wrap="square" lIns="0" tIns="0" rIns="0" bIns="0" rtlCol="0" anchor="t">
-            <a:normAutofit/>
-          </a:bodyPr>
-          <a:lstStyle/>
-          <a:p>
-            <a:pPr algn="l" indent="0" marL="0">
-              <a:lnSpc>
-                <a:spcPts val="1625"/>
-              </a:lnSpc>
-              <a:buNone/>
-            </a:pPr>
-            <a:r>
-              <a:rPr lang="en-US" sz="1300" b="1" dirty="0">
-                <a:solidFill>
-                  <a:srgbClr val="0F2A29"/>
-                </a:solidFill>
-                <a:latin typeface="Sarabun" pitchFamily="34" charset="0"/>
-                <a:ea typeface="Sarabun" pitchFamily="34" charset="-122"/>
-                <a:cs typeface="Sarabun" pitchFamily="34" charset="-120"/>
-              </a:rPr>
-              <a:t>รูปถ่ายอุปกรณ์</a:t>
-            </a:r>
-            <a:endParaRPr lang="en-US" sz="1300" dirty="0"/>
-          </a:p>
-        </p:txBody>
-      </p:sp>
-      <p:sp>
-        <p:nvSpPr>
-          <p:cNvPr id="14" name="Text 11"/>
-          <p:cNvSpPr/>
-          <p:nvPr/>
-        </p:nvSpPr>
-        <p:spPr>
-          <a:xfrm>
-            <a:off x="7874000" y="2728416"/>
-            <a:ext cx="2559368" cy="215205"/>
-          </a:xfrm>
-          <a:prstGeom prst="rect">
-            <a:avLst/>
-          </a:prstGeom>
-          <a:noFill/>
-          <a:ln/>
-        </p:spPr>
-        <p:txBody>
-          <a:bodyPr wrap="square" lIns="0" tIns="0" rIns="0" bIns="0" rtlCol="0" anchor="t">
-            <a:normAutofit/>
-          </a:bodyPr>
-          <a:lstStyle/>
-          <a:p>
-            <a:pPr algn="l" indent="0" marL="0">
-              <a:lnSpc>
-                <a:spcPts val="1495"/>
-              </a:lnSpc>
-              <a:buNone/>
-            </a:pPr>
-            <a:r>
-              <a:rPr lang="en-US" sz="1150" dirty="0">
-                <a:solidFill>
-                  <a:srgbClr val="46605D"/>
-                </a:solidFill>
-                <a:latin typeface="Sarabun" pitchFamily="34" charset="0"/>
-                <a:ea typeface="Sarabun" pitchFamily="34" charset="-122"/>
-                <a:cs typeface="Sarabun" pitchFamily="34" charset="-120"/>
-              </a:rPr>
-              <a:t>เก็บเป็น path ไฟล์ใน Shared Folder</a:t>
-            </a:r>
-            <a:endParaRPr lang="en-US" sz="1150" dirty="0"/>
-          </a:p>
-        </p:txBody>
-      </p:sp>
-      <p:sp>
-        <p:nvSpPr>
-          <p:cNvPr id="15" name="Text 12"/>
-          <p:cNvSpPr/>
-          <p:nvPr/>
-        </p:nvSpPr>
-        <p:spPr>
-          <a:xfrm>
-            <a:off x="7518400" y="3032522"/>
-            <a:ext cx="254000" cy="254000"/>
-          </a:xfrm>
-          <a:prstGeom prst="roundRect">
-            <a:avLst>
-              <a:gd name="adj" fmla="val 50000"/>
-            </a:avLst>
-          </a:prstGeom>
-          <a:solidFill>
-            <a:srgbClr val="0D9488"/>
-          </a:solidFill>
-          <a:ln/>
-        </p:spPr>
-        <p:txBody>
-          <a:bodyPr wrap="square" lIns="0" tIns="0" rIns="0" bIns="0" rtlCol="0" anchor="ctr">
-            <a:normAutofit/>
-          </a:bodyPr>
-          <a:lstStyle/>
-          <a:p>
-            <a:pPr algn="ctr" indent="0" marL="0">
-              <a:lnSpc>
-                <a:spcPts val="1000"/>
-              </a:lnSpc>
-              <a:buNone/>
-            </a:pPr>
-            <a:r>
-              <a:rPr lang="en-US" sz="1000" b="1" dirty="0">
-                <a:solidFill>
-                  <a:srgbClr val="FFFFFF"/>
-                </a:solidFill>
-                <a:latin typeface="Kanit" pitchFamily="34" charset="0"/>
-                <a:ea typeface="Kanit" pitchFamily="34" charset="-122"/>
-                <a:cs typeface="Kanit" pitchFamily="34" charset="-120"/>
-              </a:rPr>
-              <a:t>4</a:t>
-            </a:r>
-            <a:endParaRPr lang="en-US" sz="1000" dirty="0"/>
-          </a:p>
-        </p:txBody>
-      </p:sp>
-      <p:sp>
-        <p:nvSpPr>
-          <p:cNvPr id="16" name="Text 13"/>
-          <p:cNvSpPr/>
-          <p:nvPr/>
-        </p:nvSpPr>
-        <p:spPr>
-          <a:xfrm>
-            <a:off x="7874000" y="3032522"/>
-            <a:ext cx="2874039" cy="231775"/>
-          </a:xfrm>
-          <a:prstGeom prst="rect">
-            <a:avLst/>
-          </a:prstGeom>
-          <a:noFill/>
-          <a:ln/>
-        </p:spPr>
-        <p:txBody>
-          <a:bodyPr wrap="square" lIns="0" tIns="0" rIns="0" bIns="0" rtlCol="0" anchor="t">
-            <a:normAutofit/>
-          </a:bodyPr>
-          <a:lstStyle/>
-          <a:p>
-            <a:pPr algn="l" indent="0" marL="0">
-              <a:lnSpc>
-                <a:spcPts val="1625"/>
-              </a:lnSpc>
-              <a:buNone/>
-            </a:pPr>
-            <a:r>
-              <a:rPr lang="en-US" sz="1300" b="1" dirty="0">
-                <a:solidFill>
-                  <a:srgbClr val="0F2A29"/>
-                </a:solidFill>
-                <a:latin typeface="Sarabun" pitchFamily="34" charset="0"/>
-                <a:ea typeface="Sarabun" pitchFamily="34" charset="-122"/>
-                <a:cs typeface="Sarabun" pitchFamily="34" charset="-120"/>
-              </a:rPr>
-              <a:t>วันสิ้นสุดรับประกัน</a:t>
-            </a:r>
-            <a:endParaRPr lang="en-US" sz="1300" dirty="0"/>
-          </a:p>
-        </p:txBody>
-      </p:sp>
-      <p:sp>
-        <p:nvSpPr>
-          <p:cNvPr id="17" name="Text 14"/>
-          <p:cNvSpPr/>
-          <p:nvPr/>
-        </p:nvSpPr>
-        <p:spPr>
-          <a:xfrm>
-            <a:off x="7874000" y="3264297"/>
-            <a:ext cx="3348395" cy="215205"/>
-          </a:xfrm>
-          <a:prstGeom prst="rect">
-            <a:avLst/>
-          </a:prstGeom>
-          <a:noFill/>
-          <a:ln/>
-        </p:spPr>
-        <p:txBody>
-          <a:bodyPr wrap="square" lIns="0" tIns="0" rIns="0" bIns="0" rtlCol="0" anchor="t">
-            <a:normAutofit/>
-          </a:bodyPr>
-          <a:lstStyle/>
-          <a:p>
-            <a:pPr algn="l" indent="0" marL="0">
-              <a:lnSpc>
-                <a:spcPts val="1495"/>
-              </a:lnSpc>
-              <a:buNone/>
-            </a:pPr>
-            <a:r>
-              <a:rPr lang="en-US" sz="1150" dirty="0">
-                <a:solidFill>
-                  <a:srgbClr val="46605D"/>
-                </a:solidFill>
-                <a:latin typeface="Sarabun" pitchFamily="34" charset="0"/>
-                <a:ea typeface="Sarabun" pitchFamily="34" charset="-122"/>
-                <a:cs typeface="Sarabun" pitchFamily="34" charset="-120"/>
-              </a:rPr>
-              <a:t>แสดงป้าย “อยู่ในประกัน/หมดประกัน” อัตโนมัติ</a:t>
-            </a:r>
-            <a:endParaRPr lang="en-US" sz="1150" dirty="0"/>
-          </a:p>
-        </p:txBody>
-      </p:sp>
-      <p:sp>
-        <p:nvSpPr>
-          <p:cNvPr id="18" name="Text 15"/>
-          <p:cNvSpPr/>
-          <p:nvPr/>
-        </p:nvSpPr>
-        <p:spPr>
-          <a:xfrm>
-            <a:off x="7518400" y="3568402"/>
-            <a:ext cx="254000" cy="254000"/>
-          </a:xfrm>
-          <a:prstGeom prst="roundRect">
-            <a:avLst>
-              <a:gd name="adj" fmla="val 50000"/>
-            </a:avLst>
-          </a:prstGeom>
-          <a:solidFill>
-            <a:srgbClr val="0D9488"/>
-          </a:solidFill>
-          <a:ln/>
-        </p:spPr>
-        <p:txBody>
-          <a:bodyPr wrap="square" lIns="0" tIns="0" rIns="0" bIns="0" rtlCol="0" anchor="ctr">
-            <a:normAutofit/>
-          </a:bodyPr>
-          <a:lstStyle/>
-          <a:p>
-            <a:pPr algn="ctr" indent="0" marL="0">
-              <a:lnSpc>
-                <a:spcPts val="1000"/>
-              </a:lnSpc>
-              <a:buNone/>
-            </a:pPr>
-            <a:r>
-              <a:rPr lang="en-US" sz="1000" b="1" dirty="0">
-                <a:solidFill>
-                  <a:srgbClr val="FFFFFF"/>
-                </a:solidFill>
-                <a:latin typeface="Kanit" pitchFamily="34" charset="0"/>
-                <a:ea typeface="Kanit" pitchFamily="34" charset="-122"/>
-                <a:cs typeface="Kanit" pitchFamily="34" charset="-120"/>
-              </a:rPr>
-              <a:t>5</a:t>
-            </a:r>
-            <a:endParaRPr lang="en-US" sz="1000" dirty="0"/>
-          </a:p>
-        </p:txBody>
-      </p:sp>
-      <p:sp>
-        <p:nvSpPr>
-          <p:cNvPr id="19" name="Text 16"/>
-          <p:cNvSpPr/>
-          <p:nvPr/>
-        </p:nvSpPr>
-        <p:spPr>
-          <a:xfrm>
-            <a:off x="7874000" y="3568402"/>
-            <a:ext cx="1904614" cy="231775"/>
-          </a:xfrm>
-          <a:prstGeom prst="rect">
-            <a:avLst/>
-          </a:prstGeom>
-          <a:noFill/>
-          <a:ln/>
-        </p:spPr>
-        <p:txBody>
-          <a:bodyPr wrap="square" lIns="0" tIns="0" rIns="0" bIns="0" rtlCol="0" anchor="t">
-            <a:normAutofit/>
-          </a:bodyPr>
-          <a:lstStyle/>
-          <a:p>
-            <a:pPr algn="l" indent="0" marL="0">
-              <a:lnSpc>
-                <a:spcPts val="1625"/>
-              </a:lnSpc>
-              <a:buNone/>
-            </a:pPr>
-            <a:r>
-              <a:rPr lang="en-US" sz="1300" b="1" dirty="0">
-                <a:solidFill>
-                  <a:srgbClr val="0F2A29"/>
-                </a:solidFill>
-                <a:latin typeface="Sarabun" pitchFamily="34" charset="0"/>
-                <a:ea typeface="Sarabun" pitchFamily="34" charset="-122"/>
-                <a:cs typeface="Sarabun" pitchFamily="34" charset="-120"/>
-              </a:rPr>
-              <a:t>ตารางรับเข้าล่าสุด</a:t>
-            </a:r>
-            <a:endParaRPr lang="en-US" sz="1300" dirty="0"/>
-          </a:p>
-        </p:txBody>
-      </p:sp>
-      <p:sp>
-        <p:nvSpPr>
-          <p:cNvPr id="20" name="Text 17"/>
-          <p:cNvSpPr/>
-          <p:nvPr/>
-        </p:nvSpPr>
-        <p:spPr>
-          <a:xfrm>
-            <a:off x="7874000" y="3800177"/>
-            <a:ext cx="2218968" cy="215205"/>
-          </a:xfrm>
-          <a:prstGeom prst="rect">
-            <a:avLst/>
-          </a:prstGeom>
-          <a:noFill/>
-          <a:ln/>
-        </p:spPr>
-        <p:txBody>
-          <a:bodyPr wrap="square" lIns="0" tIns="0" rIns="0" bIns="0" rtlCol="0" anchor="t">
-            <a:normAutofit/>
-          </a:bodyPr>
-          <a:lstStyle/>
-          <a:p>
-            <a:pPr algn="l" indent="0" marL="0">
-              <a:lnSpc>
-                <a:spcPts val="1495"/>
-              </a:lnSpc>
-              <a:buNone/>
-            </a:pPr>
-            <a:r>
-              <a:rPr lang="en-US" sz="1150" dirty="0">
-                <a:solidFill>
-                  <a:srgbClr val="46605D"/>
-                </a:solidFill>
-                <a:latin typeface="Sarabun" pitchFamily="34" charset="0"/>
-                <a:ea typeface="Sarabun" pitchFamily="34" charset="-122"/>
-                <a:cs typeface="Sarabun" pitchFamily="34" charset="-120"/>
-              </a:rPr>
-              <a:t>ขึ้นทะเบียนทรัพย์สิน (9.2) ทันที</a:t>
-            </a:r>
-            <a:endParaRPr lang="en-US" sz="1150" dirty="0"/>
-          </a:p>
-        </p:txBody>
-      </p:sp>
-      <p:sp>
-        <p:nvSpPr>
-          <p:cNvPr id="21" name="Text 18"/>
           <p:cNvSpPr/>
           <p:nvPr/>
         </p:nvSpPr>
@@ -7769,7 +7902,7 @@
                 <a:ea typeface="Kanit" pitchFamily="34" charset="-122"/>
                 <a:cs typeface="Kanit" pitchFamily="34" charset="-120"/>
               </a:rPr>
-              <a:t>ขั้นตอนที่ 8 จาก 11</a:t>
+              <a:t>ขั้นตอนที่ 7 จาก 11</a:t>
             </a:r>
             <a:endParaRPr lang="en-US" sz="1300" dirty="0"/>
           </a:p>
@@ -7815,7 +7948,7 @@
                 <a:ea typeface="Kanit" pitchFamily="34" charset="-122"/>
                 <a:cs typeface="Kanit" pitchFamily="34" charset="-120"/>
               </a:rPr>
-              <a:t>ทะเบียนทรัพย์สิน (Asset Register)</a:t>
+              <a:t>รับของเข้าคลัง (Receive)</a:t>
             </a:r>
             <a:endParaRPr lang="en-US" sz="2800" dirty="0"/>
           </a:p>
@@ -7857,7 +7990,7 @@
       </p:sp>
       <p:pic>
         <p:nvPicPr>
-          <p:cNvPr id="5" name="Image 0" descr="ภาพหน้าจอ ทะเบียนทรัพย์สิน (Asset Register)">    </p:cNvPr>
+          <p:cNvPr id="5" name="Image 0" descr="ภาพหน้าจอ รับของเข้าคลัง (Receive)">    </p:cNvPr>
           <p:cNvPicPr>
             <a:picLocks noChangeAspect="1"/>
           </p:cNvPicPr>
@@ -7936,7 +8069,7 @@
         <p:spPr>
           <a:xfrm>
             <a:off x="7874000" y="1424880"/>
-            <a:ext cx="2246866" cy="231775"/>
+            <a:ext cx="2982979" cy="231775"/>
           </a:xfrm>
           <a:prstGeom prst="rect">
             <a:avLst/>
@@ -7965,7 +8098,7 @@
                 <a:ea typeface="Sarabun" pitchFamily="34" charset="-122"/>
                 <a:cs typeface="Sarabun" pitchFamily="34" charset="-120"/>
               </a:rPr>
-              <a:t>ตาราง Master รวมทุกทรัพย์สิน</a:t>
+              <a:t>กรอกทีละชิ้น</a:t>
             </a:r>
             <a:endParaRPr lang="en-US" sz="1300" dirty="0"/>
           </a:p>
@@ -7980,7 +8113,7 @@
         <p:spPr>
           <a:xfrm>
             <a:off x="7874000" y="1656655"/>
-            <a:ext cx="2617708" cy="215205"/>
+            <a:ext cx="3475315" cy="215205"/>
           </a:xfrm>
           <a:prstGeom prst="rect">
             <a:avLst/>
@@ -8009,7 +8142,7 @@
                 <a:ea typeface="Sarabun" pitchFamily="34" charset="-122"/>
                 <a:cs typeface="Sarabun" pitchFamily="34" charset="-120"/>
               </a:rPr>
-              <a:t>filter ประเภท/หมวดหมู่/flag/สถานะ</a:t>
+              <a:t>กรอกข้อมูลครบถ้วนเหมือนแบบฟอร์มที่ใช้งานจริง</a:t>
             </a:r>
             <a:endParaRPr lang="en-US" sz="1150" dirty="0"/>
           </a:p>
@@ -8072,7 +8205,7 @@
         <p:spPr>
           <a:xfrm>
             <a:off x="7874000" y="1960761"/>
-            <a:ext cx="2101096" cy="231775"/>
+            <a:ext cx="3127415" cy="231775"/>
           </a:xfrm>
           <a:prstGeom prst="rect">
             <a:avLst/>
@@ -8101,7 +8234,7 @@
                 <a:ea typeface="Sarabun" pitchFamily="34" charset="-122"/>
                 <a:cs typeface="Sarabun" pitchFamily="34" charset="-120"/>
               </a:rPr>
-              <a:t>คลิกแถวเพื่อดูรายละเอียด</a:t>
+              <a:t>รหัสเครื่อง / ประเภท / หมายเลขเครื่อง</a:t>
             </a:r>
             <a:endParaRPr lang="en-US" sz="1300" dirty="0"/>
           </a:p>
@@ -8116,7 +8249,7 @@
         <p:spPr>
           <a:xfrm>
             <a:off x="7874000" y="2192536"/>
-            <a:ext cx="1803441" cy="215205"/>
+            <a:ext cx="2684364" cy="215205"/>
           </a:xfrm>
           <a:prstGeom prst="rect">
             <a:avLst/>
@@ -8145,7 +8278,7 @@
                 <a:ea typeface="Sarabun" pitchFamily="34" charset="-122"/>
                 <a:cs typeface="Sarabun" pitchFamily="34" charset="-120"/>
               </a:rPr>
-              <a:t>เปิด drawer พร้อมประวัติ</a:t>
+              <a:t>ระบุรายละเอียดของทรัพย์สินแต่ละชิ้น</a:t>
             </a:r>
             <a:endParaRPr lang="en-US" sz="1150" dirty="0"/>
           </a:p>
@@ -8208,7 +8341,7 @@
         <p:spPr>
           <a:xfrm>
             <a:off x="7874000" y="2496641"/>
-            <a:ext cx="1847487" cy="231775"/>
+            <a:ext cx="2929122" cy="231775"/>
           </a:xfrm>
           <a:prstGeom prst="rect">
             <a:avLst/>
@@ -8237,7 +8370,7 @@
                 <a:ea typeface="Sarabun" pitchFamily="34" charset="-122"/>
                 <a:cs typeface="Sarabun" pitchFamily="34" charset="-120"/>
               </a:rPr>
-              <a:t>ข้อมูลครบในมุมมองเดียว</a:t>
+              <a:t>รูปถ่ายอุปกรณ์</a:t>
             </a:r>
             <a:endParaRPr lang="en-US" sz="1300" dirty="0"/>
           </a:p>
@@ -8252,7 +8385,7 @@
         <p:spPr>
           <a:xfrm>
             <a:off x="7874000" y="2728416"/>
-            <a:ext cx="2152412" cy="215205"/>
+            <a:ext cx="3412569" cy="215205"/>
           </a:xfrm>
           <a:prstGeom prst="rect">
             <a:avLst/>
@@ -8281,7 +8414,7 @@
                 <a:ea typeface="Sarabun" pitchFamily="34" charset="-122"/>
                 <a:cs typeface="Sarabun" pitchFamily="34" charset="-120"/>
               </a:rPr>
-              <a:t>ต้นทุน / วันรับประกัน / รูปถ่าย</a:t>
+              <a:t>ระบุตำแหน่งไฟล์รูปที่เก็บไว้ในโฟลเดอร์ส่วนกลาง</a:t>
             </a:r>
             <a:endParaRPr lang="en-US" sz="1150" dirty="0"/>
           </a:p>
@@ -8344,7 +8477,7 @@
         <p:spPr>
           <a:xfrm>
             <a:off x="7874000" y="3032522"/>
-            <a:ext cx="2087850" cy="231775"/>
+            <a:ext cx="3026616" cy="231775"/>
           </a:xfrm>
           <a:prstGeom prst="rect">
             <a:avLst/>
@@ -8373,7 +8506,7 @@
                 <a:ea typeface="Sarabun" pitchFamily="34" charset="-122"/>
                 <a:cs typeface="Sarabun" pitchFamily="34" charset="-120"/>
               </a:rPr>
-              <a:t>สถานะและ Flag</a:t>
+              <a:t>วันสิ้นสุดรับประกัน</a:t>
             </a:r>
             <a:endParaRPr lang="en-US" sz="1300" dirty="0"/>
           </a:p>
@@ -8388,7 +8521,7 @@
         <p:spPr>
           <a:xfrm>
             <a:off x="7874000" y="3264297"/>
-            <a:ext cx="2432447" cy="215205"/>
+            <a:ext cx="3526155" cy="215205"/>
           </a:xfrm>
           <a:prstGeom prst="rect">
             <a:avLst/>
@@ -8417,7 +8550,7 @@
                 <a:ea typeface="Sarabun" pitchFamily="34" charset="-122"/>
                 <a:cs typeface="Sarabun" pitchFamily="34" charset="-120"/>
               </a:rPr>
-              <a:t>ให้ยืมได้ / ให้ขายได้ / ใช้งานภายใน</a:t>
+              <a:t>แสดงป้าย “อยู่ในประกัน/หมดประกัน” ให้อัตโนมัติ</a:t>
             </a:r>
             <a:endParaRPr lang="en-US" sz="1150" dirty="0"/>
           </a:p>
@@ -8480,7 +8613,7 @@
         <p:spPr>
           <a:xfrm>
             <a:off x="7874000" y="3568402"/>
-            <a:ext cx="3299478" cy="231775"/>
+            <a:ext cx="2790954" cy="231775"/>
           </a:xfrm>
           <a:prstGeom prst="rect">
             <a:avLst/>
@@ -8509,7 +8642,7 @@
                 <a:ea typeface="Sarabun" pitchFamily="34" charset="-122"/>
                 <a:cs typeface="Sarabun" pitchFamily="34" charset="-120"/>
               </a:rPr>
-              <a:t>ประวัติธุรกรรมจริง</a:t>
+              <a:t>ตารางรับเข้าล่าสุด</a:t>
             </a:r>
             <a:endParaRPr lang="en-US" sz="1300" dirty="0"/>
           </a:p>
@@ -8524,7 +8657,7 @@
         <p:spPr>
           <a:xfrm>
             <a:off x="7874000" y="3800177"/>
-            <a:ext cx="3844052" cy="215205"/>
+            <a:ext cx="3251597" cy="215205"/>
           </a:xfrm>
           <a:prstGeom prst="rect">
             <a:avLst/>
@@ -8553,7 +8686,7 @@
                 <a:ea typeface="Sarabun" pitchFamily="34" charset="-122"/>
                 <a:cs typeface="Sarabun" pitchFamily="34" charset="-120"/>
               </a:rPr>
-              <a:t>ASSET_HISTORY: รับเข้า→จ่าย→คืน→ซ่อม→Write-off</a:t>
+              <a:t>รายการที่รับเข้าจะขึ้นในทะเบียนทรัพย์สินทันที</a:t>
             </a:r>
             <a:endParaRPr lang="en-US" sz="1150" dirty="0"/>
           </a:p>
@@ -8673,7 +8806,7 @@
                 <a:ea typeface="Kanit" pitchFamily="34" charset="-122"/>
                 <a:cs typeface="Kanit" pitchFamily="34" charset="-120"/>
               </a:rPr>
-              <a:t>ขั้นตอนที่ 9 จาก 11</a:t>
+              <a:t>ขั้นตอนที่ 8 จาก 11</a:t>
             </a:r>
             <a:endParaRPr lang="en-US" sz="1300" dirty="0"/>
           </a:p>
@@ -8719,7 +8852,7 @@
                 <a:ea typeface="Kanit" pitchFamily="34" charset="-122"/>
                 <a:cs typeface="Kanit" pitchFamily="34" charset="-120"/>
               </a:rPr>
-              <a:t>ตั้งค่า Item Master</a:t>
+              <a:t>ทะเบียนทรัพย์สิน (Asset Register)</a:t>
             </a:r>
             <a:endParaRPr lang="en-US" sz="2800" dirty="0"/>
           </a:p>
@@ -8761,7 +8894,7 @@
       </p:sp>
       <p:pic>
         <p:nvPicPr>
-          <p:cNvPr id="5" name="Image 0" descr="ภาพหน้าจอ ตั้งค่า Item Master">    </p:cNvPr>
+          <p:cNvPr id="5" name="Image 0" descr="ภาพหน้าจอ ทะเบียนทรัพย์สิน (Asset Register)">    </p:cNvPr>
           <p:cNvPicPr>
             <a:picLocks noChangeAspect="1"/>
           </p:cNvPicPr>
@@ -8840,7 +8973,7 @@
         <p:spPr>
           <a:xfrm>
             <a:off x="7874000" y="1424880"/>
-            <a:ext cx="2494836" cy="231775"/>
+            <a:ext cx="2595148" cy="231775"/>
           </a:xfrm>
           <a:prstGeom prst="rect">
             <a:avLst/>
@@ -8869,7 +9002,7 @@
                 <a:ea typeface="Sarabun" pitchFamily="34" charset="-122"/>
                 <a:cs typeface="Sarabun" pitchFamily="34" charset="-120"/>
               </a:rPr>
-              <a:t>ตาราง “หมวดหมู่ (Category)”</a:t>
+              <a:t>ตารางรวมทรัพย์สินทั้งหมด</a:t>
             </a:r>
             <a:endParaRPr lang="en-US" sz="1300" dirty="0"/>
           </a:p>
@@ -8884,7 +9017,7 @@
         <p:spPr>
           <a:xfrm>
             <a:off x="7874000" y="1656655"/>
-            <a:ext cx="2141401" cy="215205"/>
+            <a:ext cx="3023473" cy="215205"/>
           </a:xfrm>
           <a:prstGeom prst="rect">
             <a:avLst/>
@@ -8913,7 +9046,7 @@
                 <a:ea typeface="Sarabun" pitchFamily="34" charset="-122"/>
                 <a:cs typeface="Sarabun" pitchFamily="34" charset="-120"/>
               </a:rPr>
-              <a:t>เพิ่ม/แก้ไข/ลบได้เอง (Round 3)</a:t>
+              <a:t>กรองดูตามประเภท หมวดหมู่ หรือสถานะได้</a:t>
             </a:r>
             <a:endParaRPr lang="en-US" sz="1150" dirty="0"/>
           </a:p>
@@ -8976,7 +9109,7 @@
         <p:spPr>
           <a:xfrm>
             <a:off x="7874000" y="1960761"/>
-            <a:ext cx="1870379" cy="231775"/>
+            <a:ext cx="2511756" cy="231775"/>
           </a:xfrm>
           <a:prstGeom prst="rect">
             <a:avLst/>
@@ -9005,7 +9138,7 @@
                 <a:ea typeface="Sarabun" pitchFamily="34" charset="-122"/>
                 <a:cs typeface="Sarabun" pitchFamily="34" charset="-120"/>
               </a:rPr>
-              <a:t>ตาราง “ประเภทอุปกรณ์”</a:t>
+              <a:t>คลิกแถวเพื่อดูรายละเอียด</a:t>
             </a:r>
             <a:endParaRPr lang="en-US" sz="1300" dirty="0"/>
           </a:p>
@@ -9020,7 +9153,7 @@
         <p:spPr>
           <a:xfrm>
             <a:off x="7874000" y="2192536"/>
-            <a:ext cx="2179082" cy="215205"/>
+            <a:ext cx="2926318" cy="215205"/>
           </a:xfrm>
           <a:prstGeom prst="rect">
             <a:avLst/>
@@ -9049,7 +9182,7 @@
                 <a:ea typeface="Sarabun" pitchFamily="34" charset="-122"/>
                 <a:cs typeface="Sarabun" pitchFamily="34" charset="-120"/>
               </a:rPr>
-              <a:t>ทุกรายการผูกกับหมวดหมู่เสมอ</a:t>
+              <a:t>เปิดดูรายละเอียดและประวัติของเครื่องนั้น</a:t>
             </a:r>
             <a:endParaRPr lang="en-US" sz="1150" dirty="0"/>
           </a:p>
@@ -9112,7 +9245,7 @@
         <p:spPr>
           <a:xfrm>
             <a:off x="7874000" y="2496641"/>
-            <a:ext cx="1729085" cy="231775"/>
+            <a:ext cx="1847487" cy="231775"/>
           </a:xfrm>
           <a:prstGeom prst="rect">
             <a:avLst/>
@@ -9141,7 +9274,7 @@
                 <a:ea typeface="Sarabun" pitchFamily="34" charset="-122"/>
                 <a:cs typeface="Sarabun" pitchFamily="34" charset="-120"/>
               </a:rPr>
-              <a:t>Track Serial Number</a:t>
+              <a:t>ข้อมูลครบในมุมมองเดียว</a:t>
             </a:r>
             <a:endParaRPr lang="en-US" sz="1300" dirty="0"/>
           </a:p>
@@ -9156,7 +9289,7 @@
         <p:spPr>
           <a:xfrm>
             <a:off x="7874000" y="2728416"/>
-            <a:ext cx="2013942" cy="215205"/>
+            <a:ext cx="2152412" cy="215205"/>
           </a:xfrm>
           <a:prstGeom prst="rect">
             <a:avLst/>
@@ -9185,7 +9318,7 @@
                 <a:ea typeface="Sarabun" pitchFamily="34" charset="-122"/>
                 <a:cs typeface="Sarabun" pitchFamily="34" charset="-120"/>
               </a:rPr>
-              <a:t>กำหนดได้ต่อประเภทอุปกรณ์</a:t>
+              <a:t>ต้นทุน / วันรับประกัน / รูปถ่าย</a:t>
             </a:r>
             <a:endParaRPr lang="en-US" sz="1150" dirty="0"/>
           </a:p>
@@ -9248,7 +9381,7 @@
         <p:spPr>
           <a:xfrm>
             <a:off x="7874000" y="3032522"/>
-            <a:ext cx="1743968" cy="231775"/>
+            <a:ext cx="2432447" cy="231775"/>
           </a:xfrm>
           <a:prstGeom prst="rect">
             <a:avLst/>
@@ -9277,7 +9410,7 @@
                 <a:ea typeface="Sarabun" pitchFamily="34" charset="-122"/>
                 <a:cs typeface="Sarabun" pitchFamily="34" charset="-120"/>
               </a:rPr>
-              <a:t>อุปกรณ์แบบชุด (Kit)</a:t>
+              <a:t>สถานะและประเภทการใช้งาน</a:t>
             </a:r>
             <a:endParaRPr lang="en-US" sz="1300" dirty="0"/>
           </a:p>
@@ -9292,7 +9425,7 @@
         <p:spPr>
           <a:xfrm>
             <a:off x="7874000" y="3264297"/>
-            <a:ext cx="2031802" cy="215205"/>
+            <a:ext cx="2432447" cy="215205"/>
           </a:xfrm>
           <a:prstGeom prst="rect">
             <a:avLst/>
@@ -9321,7 +9454,7 @@
                 <a:ea typeface="Sarabun" pitchFamily="34" charset="-122"/>
                 <a:cs typeface="Sarabun" pitchFamily="34" charset="-120"/>
               </a:rPr>
-              <a:t>พร้อม checklist อุปกรณ์ย่อย</a:t>
+              <a:t>ให้ยืมได้ / ให้ขายได้ / ใช้งานภายใน</a:t>
             </a:r>
             <a:endParaRPr lang="en-US" sz="1150" dirty="0"/>
           </a:p>
@@ -9384,7 +9517,7 @@
         <p:spPr>
           <a:xfrm>
             <a:off x="7874000" y="3568402"/>
-            <a:ext cx="2087850" cy="231775"/>
+            <a:ext cx="3343217" cy="231775"/>
           </a:xfrm>
           <a:prstGeom prst="rect">
             <a:avLst/>
@@ -9413,7 +9546,7 @@
                 <a:ea typeface="Sarabun" pitchFamily="34" charset="-122"/>
                 <a:cs typeface="Sarabun" pitchFamily="34" charset="-120"/>
               </a:rPr>
-              <a:t>Scope การใช้งาน</a:t>
+              <a:t>ประวัติการใช้งานจริง</a:t>
             </a:r>
             <a:endParaRPr lang="en-US" sz="1300" dirty="0"/>
           </a:p>
@@ -9428,7 +9561,7 @@
         <p:spPr>
           <a:xfrm>
             <a:off x="7874000" y="3800177"/>
-            <a:ext cx="2432447" cy="215205"/>
+            <a:ext cx="3895011" cy="215205"/>
           </a:xfrm>
           <a:prstGeom prst="rect">
             <a:avLst/>
@@ -9457,7 +9590,7 @@
                 <a:ea typeface="Sarabun" pitchFamily="34" charset="-122"/>
                 <a:cs typeface="Sarabun" pitchFamily="34" charset="-120"/>
               </a:rPr>
-              <a:t>ให้ยืมได้ / ให้ขายได้ / ใช้งานภายใน</a:t>
+              <a:t>รับเข้า→จ่าย→คืน→ซ่อม→ตัดจำหน่าย ดูย้อนหลังได้ครบ</a:t>
             </a:r>
             <a:endParaRPr lang="en-US" sz="1150" dirty="0"/>
           </a:p>
@@ -9577,7 +9710,7 @@
                 <a:ea typeface="Kanit" pitchFamily="34" charset="-122"/>
                 <a:cs typeface="Kanit" pitchFamily="34" charset="-120"/>
               </a:rPr>
-              <a:t>ขั้นตอนที่ 10 จาก 11</a:t>
+              <a:t>ขั้นตอนที่ 9 จาก 11</a:t>
             </a:r>
             <a:endParaRPr lang="en-US" sz="1300" dirty="0"/>
           </a:p>
@@ -9623,7 +9756,7 @@
                 <a:ea typeface="Kanit" pitchFamily="34" charset="-122"/>
                 <a:cs typeface="Kanit" pitchFamily="34" charset="-120"/>
               </a:rPr>
-              <a:t>ตรวจนับประจำปี (Annual Check)</a:t>
+              <a:t>ตั้งค่า Item Master</a:t>
             </a:r>
             <a:endParaRPr lang="en-US" sz="2800" dirty="0"/>
           </a:p>
@@ -9638,11 +9771,11 @@
         <p:spPr>
           <a:xfrm>
             <a:off x="612775" y="1428055"/>
-            <a:ext cx="6597650" cy="3295650"/>
+            <a:ext cx="6597650" cy="4406900"/>
           </a:xfrm>
           <a:prstGeom prst="roundRect">
             <a:avLst>
-              <a:gd name="adj" fmla="val 3757"/>
+              <a:gd name="adj" fmla="val 2810"/>
             </a:avLst>
           </a:prstGeom>
           <a:solidFill>
@@ -9665,7 +9798,7 @@
       </p:sp>
       <p:pic>
         <p:nvPicPr>
-          <p:cNvPr id="5" name="Image 0" descr="ภาพหน้าจอ ตรวจนับประจำปี (Annual Check)">    </p:cNvPr>
+          <p:cNvPr id="5" name="Image 0" descr="ภาพหน้าจอ ตั้งค่า Item Master">    </p:cNvPr>
           <p:cNvPicPr>
             <a:picLocks noChangeAspect="1"/>
           </p:cNvPicPr>
@@ -9679,8 +9812,8 @@
         </p:blipFill>
         <p:spPr>
           <a:xfrm>
-            <a:off x="742950" y="1717888"/>
-            <a:ext cx="6337300" cy="2715986"/>
+            <a:off x="742950" y="1669960"/>
+            <a:ext cx="6337300" cy="3923090"/>
           </a:xfrm>
           <a:prstGeom prst="rect">
             <a:avLst/>
@@ -9744,7 +9877,7 @@
         <p:spPr>
           <a:xfrm>
             <a:off x="7874000" y="1424880"/>
-            <a:ext cx="2497336" cy="231775"/>
+            <a:ext cx="2870871" cy="231775"/>
           </a:xfrm>
           <a:prstGeom prst="rect">
             <a:avLst/>
@@ -9773,7 +9906,7 @@
                 <a:ea typeface="Sarabun" pitchFamily="34" charset="-122"/>
                 <a:cs typeface="Sarabun" pitchFamily="34" charset="-120"/>
               </a:rPr>
-              <a:t>Stat การ์ดสรุปแบบ Real-time</a:t>
+              <a:t>ตาราง “หมวดหมู่ (Category)”</a:t>
             </a:r>
             <a:endParaRPr lang="en-US" sz="1300" dirty="0"/>
           </a:p>
@@ -9788,7 +9921,7 @@
         <p:spPr>
           <a:xfrm>
             <a:off x="7874000" y="1656655"/>
-            <a:ext cx="2497336" cy="215205"/>
+            <a:ext cx="3344704" cy="215205"/>
           </a:xfrm>
           <a:prstGeom prst="rect">
             <a:avLst/>
@@ -9817,7 +9950,7 @@
                 <a:ea typeface="Sarabun" pitchFamily="34" charset="-122"/>
                 <a:cs typeface="Sarabun" pitchFamily="34" charset="-120"/>
               </a:rPr>
-              <a:t>ต้องตรวจ / พบปกติ / ไม่พบ / ชำรุด</a:t>
+              <a:t>จัดกลุ่มประเภทอุปกรณ์ เพิ่ม แก้ไข หรือลบได้เอง</a:t>
             </a:r>
             <a:endParaRPr lang="en-US" sz="1150" dirty="0"/>
           </a:p>
@@ -9880,7 +10013,7 @@
         <p:spPr>
           <a:xfrm>
             <a:off x="7874000" y="1960761"/>
-            <a:ext cx="2342725" cy="231775"/>
+            <a:ext cx="1870379" cy="231775"/>
           </a:xfrm>
           <a:prstGeom prst="rect">
             <a:avLst/>
@@ -9909,7 +10042,7 @@
                 <a:ea typeface="Sarabun" pitchFamily="34" charset="-122"/>
                 <a:cs typeface="Sarabun" pitchFamily="34" charset="-120"/>
               </a:rPr>
-              <a:t>Export รายการเป็น CSV</a:t>
+              <a:t>ตาราง “ประเภทอุปกรณ์”</a:t>
             </a:r>
             <a:endParaRPr lang="en-US" sz="1300" dirty="0"/>
           </a:p>
@@ -9924,7 +10057,7 @@
         <p:spPr>
           <a:xfrm>
             <a:off x="7874000" y="2192536"/>
-            <a:ext cx="2729389" cy="215205"/>
+            <a:ext cx="2179082" cy="215205"/>
           </a:xfrm>
           <a:prstGeom prst="rect">
             <a:avLst/>
@@ -9953,7 +10086,7 @@
                 <a:ea typeface="Sarabun" pitchFamily="34" charset="-122"/>
                 <a:cs typeface="Sarabun" pitchFamily="34" charset="-120"/>
               </a:rPr>
-              <a:t>ทำงานจริงฝั่ง client ดาวน์โหลดได้ทันที</a:t>
+              <a:t>ทุกรายการผูกกับหมวดหมู่เสมอ</a:t>
             </a:r>
             <a:endParaRPr lang="en-US" sz="1150" dirty="0"/>
           </a:p>
@@ -10016,7 +10149,7 @@
         <p:spPr>
           <a:xfrm>
             <a:off x="7874000" y="2496641"/>
-            <a:ext cx="3131673" cy="231775"/>
+            <a:ext cx="3226306" cy="231775"/>
           </a:xfrm>
           <a:prstGeom prst="rect">
             <a:avLst/>
@@ -10045,7 +10178,7 @@
                 <a:ea typeface="Sarabun" pitchFamily="34" charset="-122"/>
                 <a:cs typeface="Sarabun" pitchFamily="34" charset="-120"/>
               </a:rPr>
-              <a:t>ระบุผลตรวจนับต่อรายการ</a:t>
+              <a:t>กำหนดหมายเลขเครื่อง</a:t>
             </a:r>
             <a:endParaRPr lang="en-US" sz="1300" dirty="0"/>
           </a:p>
@@ -10060,7 +10193,7 @@
         <p:spPr>
           <a:xfrm>
             <a:off x="7874000" y="2728416"/>
-            <a:ext cx="3648551" cy="215205"/>
+            <a:ext cx="3758803" cy="215205"/>
           </a:xfrm>
           <a:prstGeom prst="rect">
             <a:avLst/>
@@ -10089,7 +10222,7 @@
                 <a:ea typeface="Sarabun" pitchFamily="34" charset="-122"/>
                 <a:cs typeface="Sarabun" pitchFamily="34" charset="-120"/>
               </a:rPr>
-              <a:t>ไม่พบ→สร้าง Write-off, ชำรุด→เข้าคิวซ่อม อัตโนมัติ</a:t>
+              <a:t>เลือกได้ว่าประเภทนี้ต้องมีหมายเลขกำกับทุกชิ้นหรือไม่</a:t>
             </a:r>
             <a:endParaRPr lang="en-US" sz="1150" dirty="0"/>
           </a:p>
@@ -10098,6 +10231,278 @@
       <p:sp>
         <p:nvSpPr>
           <p:cNvPr id="15" name="Text 12"/>
+          <p:cNvSpPr/>
+          <p:nvPr/>
+        </p:nvSpPr>
+        <p:spPr>
+          <a:xfrm>
+            <a:off x="7518400" y="3032522"/>
+            <a:ext cx="254000" cy="254000"/>
+          </a:xfrm>
+          <a:prstGeom prst="roundRect">
+            <a:avLst>
+              <a:gd name="adj" fmla="val 50000"/>
+            </a:avLst>
+          </a:prstGeom>
+          <a:solidFill>
+            <a:srgbClr val="0D9488"/>
+          </a:solidFill>
+          <a:ln/>
+        </p:spPr>
+        <p:txBody>
+          <a:bodyPr wrap="square" lIns="0" tIns="0" rIns="0" bIns="0" rtlCol="0" anchor="ctr">
+            <a:normAutofit/>
+          </a:bodyPr>
+          <a:lstStyle/>
+          <a:p>
+            <a:pPr algn="ctr" indent="0" marL="0">
+              <a:lnSpc>
+                <a:spcPts val="1000"/>
+              </a:lnSpc>
+              <a:buNone/>
+            </a:pPr>
+            <a:r>
+              <a:rPr lang="en-US" sz="1000" b="1" dirty="0">
+                <a:solidFill>
+                  <a:srgbClr val="FFFFFF"/>
+                </a:solidFill>
+                <a:latin typeface="Kanit" pitchFamily="34" charset="0"/>
+                <a:ea typeface="Kanit" pitchFamily="34" charset="-122"/>
+                <a:cs typeface="Kanit" pitchFamily="34" charset="-120"/>
+              </a:rPr>
+              <a:t>4</a:t>
+            </a:r>
+            <a:endParaRPr lang="en-US" sz="1000" dirty="0"/>
+          </a:p>
+        </p:txBody>
+      </p:sp>
+      <p:sp>
+        <p:nvSpPr>
+          <p:cNvPr id="16" name="Text 13"/>
+          <p:cNvSpPr/>
+          <p:nvPr/>
+        </p:nvSpPr>
+        <p:spPr>
+          <a:xfrm>
+            <a:off x="7874000" y="3032522"/>
+            <a:ext cx="2668728" cy="231775"/>
+          </a:xfrm>
+          <a:prstGeom prst="rect">
+            <a:avLst/>
+          </a:prstGeom>
+          <a:noFill/>
+          <a:ln/>
+        </p:spPr>
+        <p:txBody>
+          <a:bodyPr wrap="square" lIns="0" tIns="0" rIns="0" bIns="0" rtlCol="0" anchor="t">
+            <a:normAutofit/>
+          </a:bodyPr>
+          <a:lstStyle/>
+          <a:p>
+            <a:pPr algn="l" indent="0" marL="0">
+              <a:lnSpc>
+                <a:spcPts val="1625"/>
+              </a:lnSpc>
+              <a:buNone/>
+            </a:pPr>
+            <a:r>
+              <a:rPr lang="en-US" sz="1300" b="1" dirty="0">
+                <a:solidFill>
+                  <a:srgbClr val="0F2A29"/>
+                </a:solidFill>
+                <a:latin typeface="Sarabun" pitchFamily="34" charset="0"/>
+                <a:ea typeface="Sarabun" pitchFamily="34" charset="-122"/>
+                <a:cs typeface="Sarabun" pitchFamily="34" charset="-120"/>
+              </a:rPr>
+              <a:t>อุปกรณ์แบบชุด (Kit)</a:t>
+            </a:r>
+            <a:endParaRPr lang="en-US" sz="1300" dirty="0"/>
+          </a:p>
+        </p:txBody>
+      </p:sp>
+      <p:sp>
+        <p:nvSpPr>
+          <p:cNvPr id="17" name="Text 14"/>
+          <p:cNvSpPr/>
+          <p:nvPr/>
+        </p:nvSpPr>
+        <p:spPr>
+          <a:xfrm>
+            <a:off x="7874000" y="3264297"/>
+            <a:ext cx="3109198" cy="215205"/>
+          </a:xfrm>
+          <a:prstGeom prst="rect">
+            <a:avLst/>
+          </a:prstGeom>
+          <a:noFill/>
+          <a:ln/>
+        </p:spPr>
+        <p:txBody>
+          <a:bodyPr wrap="square" lIns="0" tIns="0" rIns="0" bIns="0" rtlCol="0" anchor="t">
+            <a:normAutofit/>
+          </a:bodyPr>
+          <a:lstStyle/>
+          <a:p>
+            <a:pPr algn="l" indent="0" marL="0">
+              <a:lnSpc>
+                <a:spcPts val="1495"/>
+              </a:lnSpc>
+              <a:buNone/>
+            </a:pPr>
+            <a:r>
+              <a:rPr lang="en-US" sz="1150" dirty="0">
+                <a:solidFill>
+                  <a:srgbClr val="46605D"/>
+                </a:solidFill>
+                <a:latin typeface="Sarabun" pitchFamily="34" charset="0"/>
+                <a:ea typeface="Sarabun" pitchFamily="34" charset="-122"/>
+                <a:cs typeface="Sarabun" pitchFamily="34" charset="-120"/>
+              </a:rPr>
+              <a:t>กำหนดรายการอุปกรณ์ย่อยที่ต้องมีครบในชุด</a:t>
+            </a:r>
+            <a:endParaRPr lang="en-US" sz="1150" dirty="0"/>
+          </a:p>
+        </p:txBody>
+      </p:sp>
+      <p:sp>
+        <p:nvSpPr>
+          <p:cNvPr id="18" name="Text 15"/>
+          <p:cNvSpPr/>
+          <p:nvPr/>
+        </p:nvSpPr>
+        <p:spPr>
+          <a:xfrm>
+            <a:off x="7518400" y="3568402"/>
+            <a:ext cx="254000" cy="254000"/>
+          </a:xfrm>
+          <a:prstGeom prst="roundRect">
+            <a:avLst>
+              <a:gd name="adj" fmla="val 50000"/>
+            </a:avLst>
+          </a:prstGeom>
+          <a:solidFill>
+            <a:srgbClr val="0D9488"/>
+          </a:solidFill>
+          <a:ln/>
+        </p:spPr>
+        <p:txBody>
+          <a:bodyPr wrap="square" lIns="0" tIns="0" rIns="0" bIns="0" rtlCol="0" anchor="ctr">
+            <a:normAutofit/>
+          </a:bodyPr>
+          <a:lstStyle/>
+          <a:p>
+            <a:pPr algn="ctr" indent="0" marL="0">
+              <a:lnSpc>
+                <a:spcPts val="1000"/>
+              </a:lnSpc>
+              <a:buNone/>
+            </a:pPr>
+            <a:r>
+              <a:rPr lang="en-US" sz="1000" b="1" dirty="0">
+                <a:solidFill>
+                  <a:srgbClr val="FFFFFF"/>
+                </a:solidFill>
+                <a:latin typeface="Kanit" pitchFamily="34" charset="0"/>
+                <a:ea typeface="Kanit" pitchFamily="34" charset="-122"/>
+                <a:cs typeface="Kanit" pitchFamily="34" charset="-120"/>
+              </a:rPr>
+              <a:t>5</a:t>
+            </a:r>
+            <a:endParaRPr lang="en-US" sz="1000" dirty="0"/>
+          </a:p>
+        </p:txBody>
+      </p:sp>
+      <p:sp>
+        <p:nvSpPr>
+          <p:cNvPr id="19" name="Text 16"/>
+          <p:cNvSpPr/>
+          <p:nvPr/>
+        </p:nvSpPr>
+        <p:spPr>
+          <a:xfrm>
+            <a:off x="7874000" y="3568402"/>
+            <a:ext cx="2087850" cy="231775"/>
+          </a:xfrm>
+          <a:prstGeom prst="rect">
+            <a:avLst/>
+          </a:prstGeom>
+          <a:noFill/>
+          <a:ln/>
+        </p:spPr>
+        <p:txBody>
+          <a:bodyPr wrap="square" lIns="0" tIns="0" rIns="0" bIns="0" rtlCol="0" anchor="t">
+            <a:normAutofit/>
+          </a:bodyPr>
+          <a:lstStyle/>
+          <a:p>
+            <a:pPr algn="l" indent="0" marL="0">
+              <a:lnSpc>
+                <a:spcPts val="1625"/>
+              </a:lnSpc>
+              <a:buNone/>
+            </a:pPr>
+            <a:r>
+              <a:rPr lang="en-US" sz="1300" b="1" dirty="0">
+                <a:solidFill>
+                  <a:srgbClr val="0F2A29"/>
+                </a:solidFill>
+                <a:latin typeface="Sarabun" pitchFamily="34" charset="0"/>
+                <a:ea typeface="Sarabun" pitchFamily="34" charset="-122"/>
+                <a:cs typeface="Sarabun" pitchFamily="34" charset="-120"/>
+              </a:rPr>
+              <a:t>ขอบเขตการใช้งาน</a:t>
+            </a:r>
+            <a:endParaRPr lang="en-US" sz="1300" dirty="0"/>
+          </a:p>
+        </p:txBody>
+      </p:sp>
+      <p:sp>
+        <p:nvSpPr>
+          <p:cNvPr id="20" name="Text 17"/>
+          <p:cNvSpPr/>
+          <p:nvPr/>
+        </p:nvSpPr>
+        <p:spPr>
+          <a:xfrm>
+            <a:off x="7874000" y="3800177"/>
+            <a:ext cx="2432447" cy="215205"/>
+          </a:xfrm>
+          <a:prstGeom prst="rect">
+            <a:avLst/>
+          </a:prstGeom>
+          <a:noFill/>
+          <a:ln/>
+        </p:spPr>
+        <p:txBody>
+          <a:bodyPr wrap="square" lIns="0" tIns="0" rIns="0" bIns="0" rtlCol="0" anchor="t">
+            <a:normAutofit/>
+          </a:bodyPr>
+          <a:lstStyle/>
+          <a:p>
+            <a:pPr algn="l" indent="0" marL="0">
+              <a:lnSpc>
+                <a:spcPts val="1495"/>
+              </a:lnSpc>
+              <a:buNone/>
+            </a:pPr>
+            <a:r>
+              <a:rPr lang="en-US" sz="1150" dirty="0">
+                <a:solidFill>
+                  <a:srgbClr val="46605D"/>
+                </a:solidFill>
+                <a:latin typeface="Sarabun" pitchFamily="34" charset="0"/>
+                <a:ea typeface="Sarabun" pitchFamily="34" charset="-122"/>
+                <a:cs typeface="Sarabun" pitchFamily="34" charset="-120"/>
+              </a:rPr>
+              <a:t>ให้ยืมได้ / ให้ขายได้ / ใช้งานภายใน</a:t>
+            </a:r>
+            <a:endParaRPr lang="en-US" sz="1150" dirty="0"/>
+          </a:p>
+        </p:txBody>
+      </p:sp>
+      <p:sp>
+        <p:nvSpPr>
+          <p:cNvPr id="21" name="Text 18"/>
           <p:cNvSpPr/>
           <p:nvPr/>
         </p:nvSpPr>
@@ -10209,7 +10614,7 @@
                 <a:ea typeface="Kanit" pitchFamily="34" charset="-122"/>
                 <a:cs typeface="Kanit" pitchFamily="34" charset="-120"/>
               </a:rPr>
-              <a:t>ขั้นตอนที่ 11 จาก 11</a:t>
+              <a:t>ขั้นตอนที่ 10 จาก 11</a:t>
             </a:r>
             <a:endParaRPr lang="en-US" sz="1300" dirty="0"/>
           </a:p>
@@ -10255,7 +10660,7 @@
                 <a:ea typeface="Kanit" pitchFamily="34" charset="-122"/>
                 <a:cs typeface="Kanit" pitchFamily="34" charset="-120"/>
               </a:rPr>
-              <a:t>ภาพรวม Dashboard — ปิดวงจรการทำงาน</a:t>
+              <a:t>ตรวจนับประจำปี (Annual Check)</a:t>
             </a:r>
             <a:endParaRPr lang="en-US" sz="2800" dirty="0"/>
           </a:p>
@@ -10270,11 +10675,11 @@
         <p:spPr>
           <a:xfrm>
             <a:off x="612775" y="1428055"/>
-            <a:ext cx="6597650" cy="4406900"/>
+            <a:ext cx="6597650" cy="3295650"/>
           </a:xfrm>
           <a:prstGeom prst="roundRect">
             <a:avLst>
-              <a:gd name="adj" fmla="val 2810"/>
+              <a:gd name="adj" fmla="val 3757"/>
             </a:avLst>
           </a:prstGeom>
           <a:solidFill>
@@ -10297,7 +10702,7 @@
       </p:sp>
       <p:pic>
         <p:nvPicPr>
-          <p:cNvPr id="5" name="Image 0" descr="ภาพหน้าจอ ภาพรวม Dashboard — ปิดวงจรการทำงาน">    </p:cNvPr>
+          <p:cNvPr id="5" name="Image 0" descr="ภาพหน้าจอ ตรวจนับประจำปี (Annual Check)">    </p:cNvPr>
           <p:cNvPicPr>
             <a:picLocks noChangeAspect="1"/>
           </p:cNvPicPr>
@@ -10311,8 +10716,8 @@
         </p:blipFill>
         <p:spPr>
           <a:xfrm>
-            <a:off x="742950" y="1669960"/>
-            <a:ext cx="6337300" cy="3923090"/>
+            <a:off x="742950" y="1717888"/>
+            <a:ext cx="6337300" cy="2715986"/>
           </a:xfrm>
           <a:prstGeom prst="rect">
             <a:avLst/>
@@ -10376,7 +10781,7 @@
         <p:spPr>
           <a:xfrm>
             <a:off x="7874000" y="1424880"/>
-            <a:ext cx="1924849" cy="231775"/>
+            <a:ext cx="2939648" cy="231775"/>
           </a:xfrm>
           <a:prstGeom prst="rect">
             <a:avLst/>
@@ -10405,7 +10810,7 @@
                 <a:ea typeface="Sarabun" pitchFamily="34" charset="-122"/>
                 <a:cs typeface="Sarabun" pitchFamily="34" charset="-120"/>
               </a:rPr>
-              <a:t>Stat Cards ปรับตาม Role</a:t>
+              <a:t>การ์ดสรุปผลทันที</a:t>
             </a:r>
             <a:endParaRPr lang="en-US" sz="1300" dirty="0"/>
           </a:p>
@@ -10420,7 +10825,7 @@
         <p:spPr>
           <a:xfrm>
             <a:off x="7874000" y="1656655"/>
-            <a:ext cx="2242542" cy="215205"/>
+            <a:ext cx="3424833" cy="215205"/>
           </a:xfrm>
           <a:prstGeom prst="rect">
             <a:avLst/>
@@ -10449,7 +10854,7 @@
                 <a:ea typeface="Sarabun" pitchFamily="34" charset="-122"/>
                 <a:cs typeface="Sarabun" pitchFamily="34" charset="-120"/>
               </a:rPr>
-              <a:t>เปลี่ยนมุมมองตามบทบาทที่สวม</a:t>
+              <a:t>บอกจำนวนที่ต้องตรวจ / พบปกติ / ไม่พบ / ชำรุด</a:t>
             </a:r>
             <a:endParaRPr lang="en-US" sz="1150" dirty="0"/>
           </a:p>
@@ -10512,7 +10917,7 @@
         <p:spPr>
           <a:xfrm>
             <a:off x="7874000" y="1960761"/>
-            <a:ext cx="1800068" cy="231775"/>
+            <a:ext cx="2954875" cy="231775"/>
           </a:xfrm>
           <a:prstGeom prst="rect">
             <a:avLst/>
@@ -10541,7 +10946,7 @@
                 <a:ea typeface="Sarabun" pitchFamily="34" charset="-122"/>
                 <a:cs typeface="Sarabun" pitchFamily="34" charset="-120"/>
               </a:rPr>
-              <a:t>คำขอเบิกรอจ่ายของ</a:t>
+              <a:t>ส่งออกรายการเป็นไฟล์</a:t>
             </a:r>
             <a:endParaRPr lang="en-US" sz="1300" dirty="0"/>
           </a:p>
@@ -10556,7 +10961,7 @@
         <p:spPr>
           <a:xfrm>
             <a:off x="7874000" y="2192536"/>
-            <a:ext cx="2097167" cy="215205"/>
+            <a:ext cx="3442573" cy="215205"/>
           </a:xfrm>
           <a:prstGeom prst="rect">
             <a:avLst/>
@@ -10585,7 +10990,7 @@
                 <a:ea typeface="Sarabun" pitchFamily="34" charset="-122"/>
                 <a:cs typeface="Sarabun" pitchFamily="34" charset="-120"/>
               </a:rPr>
-              <a:t>และคำขอรอผู้รับยืนยันรับของ</a:t>
+              <a:t>ดาวน์โหลดได้ทันที เพื่อนำไปตรวจนับจริงหน้างาน</a:t>
             </a:r>
             <a:endParaRPr lang="en-US" sz="1150" dirty="0"/>
           </a:p>
@@ -10648,7 +11053,7 @@
         <p:spPr>
           <a:xfrm>
             <a:off x="7874000" y="2496641"/>
-            <a:ext cx="2823686" cy="231775"/>
+            <a:ext cx="3701821" cy="231775"/>
           </a:xfrm>
           <a:prstGeom prst="rect">
             <a:avLst/>
@@ -10677,7 +11082,7 @@
                 <a:ea typeface="Sarabun" pitchFamily="34" charset="-122"/>
                 <a:cs typeface="Sarabun" pitchFamily="34" charset="-120"/>
               </a:rPr>
-              <a:t>รอซ่อม / กำลังซ่อม / รอ Write-off</a:t>
+              <a:t>ระบุผลตรวจนับต่อรายการ</a:t>
             </a:r>
             <a:endParaRPr lang="en-US" sz="1300" dirty="0"/>
           </a:p>
@@ -10692,7 +11097,7 @@
         <p:spPr>
           <a:xfrm>
             <a:off x="7874000" y="2728416"/>
-            <a:ext cx="2423664" cy="215205"/>
+            <a:ext cx="4312801" cy="215205"/>
           </a:xfrm>
           <a:prstGeom prst="rect">
             <a:avLst/>
@@ -10721,7 +11126,7 @@
                 <a:ea typeface="Sarabun" pitchFamily="34" charset="-122"/>
                 <a:cs typeface="Sarabun" pitchFamily="34" charset="-120"/>
               </a:rPr>
-              <a:t>ภาพรวมของที่ไม่พร้อมใช้งาน</a:t>
+              <a:t>ไม่พบ→สร้างคำขอตัดจำหน่าย, ชำรุด→เข้าคิวซ่อม ให้อัตโนมัติ</a:t>
             </a:r>
             <a:endParaRPr lang="en-US" sz="1150" dirty="0"/>
           </a:p>
@@ -10730,278 +11135,6 @@
       <p:sp>
         <p:nvSpPr>
           <p:cNvPr id="15" name="Text 12"/>
-          <p:cNvSpPr/>
-          <p:nvPr/>
-        </p:nvSpPr>
-        <p:spPr>
-          <a:xfrm>
-            <a:off x="7518400" y="3032522"/>
-            <a:ext cx="254000" cy="254000"/>
-          </a:xfrm>
-          <a:prstGeom prst="roundRect">
-            <a:avLst>
-              <a:gd name="adj" fmla="val 50000"/>
-            </a:avLst>
-          </a:prstGeom>
-          <a:solidFill>
-            <a:srgbClr val="0D9488"/>
-          </a:solidFill>
-          <a:ln/>
-        </p:spPr>
-        <p:txBody>
-          <a:bodyPr wrap="square" lIns="0" tIns="0" rIns="0" bIns="0" rtlCol="0" anchor="ctr">
-            <a:normAutofit/>
-          </a:bodyPr>
-          <a:lstStyle/>
-          <a:p>
-            <a:pPr algn="ctr" indent="0" marL="0">
-              <a:lnSpc>
-                <a:spcPts val="1000"/>
-              </a:lnSpc>
-              <a:buNone/>
-            </a:pPr>
-            <a:r>
-              <a:rPr lang="en-US" sz="1000" b="1" dirty="0">
-                <a:solidFill>
-                  <a:srgbClr val="FFFFFF"/>
-                </a:solidFill>
-                <a:latin typeface="Kanit" pitchFamily="34" charset="0"/>
-                <a:ea typeface="Kanit" pitchFamily="34" charset="-122"/>
-                <a:cs typeface="Kanit" pitchFamily="34" charset="-120"/>
-              </a:rPr>
-              <a:t>4</a:t>
-            </a:r>
-            <a:endParaRPr lang="en-US" sz="1000" dirty="0"/>
-          </a:p>
-        </p:txBody>
-      </p:sp>
-      <p:sp>
-        <p:nvSpPr>
-          <p:cNvPr id="16" name="Text 13"/>
-          <p:cNvSpPr/>
-          <p:nvPr/>
-        </p:nvSpPr>
-        <p:spPr>
-          <a:xfrm>
-            <a:off x="7874000" y="3032522"/>
-            <a:ext cx="2778443" cy="231775"/>
-          </a:xfrm>
-          <a:prstGeom prst="rect">
-            <a:avLst/>
-          </a:prstGeom>
-          <a:noFill/>
-          <a:ln/>
-        </p:spPr>
-        <p:txBody>
-          <a:bodyPr wrap="square" lIns="0" tIns="0" rIns="0" bIns="0" rtlCol="0" anchor="t">
-            <a:normAutofit/>
-          </a:bodyPr>
-          <a:lstStyle/>
-          <a:p>
-            <a:pPr algn="l" indent="0" marL="0">
-              <a:lnSpc>
-                <a:spcPts val="1625"/>
-              </a:lnSpc>
-              <a:buNone/>
-            </a:pPr>
-            <a:r>
-              <a:rPr lang="en-US" sz="1300" b="1" dirty="0">
-                <a:solidFill>
-                  <a:srgbClr val="0F2A29"/>
-                </a:solidFill>
-                <a:latin typeface="Sarabun" pitchFamily="34" charset="0"/>
-                <a:ea typeface="Sarabun" pitchFamily="34" charset="-122"/>
-                <a:cs typeface="Sarabun" pitchFamily="34" charset="-120"/>
-              </a:rPr>
-              <a:t>ขายแล้ว / ตัดจำหน่ายแล้ว (สะสม)</a:t>
-            </a:r>
-            <a:endParaRPr lang="en-US" sz="1300" dirty="0"/>
-          </a:p>
-        </p:txBody>
-      </p:sp>
-      <p:sp>
-        <p:nvSpPr>
-          <p:cNvPr id="17" name="Text 14"/>
-          <p:cNvSpPr/>
-          <p:nvPr/>
-        </p:nvSpPr>
-        <p:spPr>
-          <a:xfrm>
-            <a:off x="7874000" y="3264297"/>
-            <a:ext cx="2384830" cy="215205"/>
-          </a:xfrm>
-          <a:prstGeom prst="rect">
-            <a:avLst/>
-          </a:prstGeom>
-          <a:noFill/>
-          <a:ln/>
-        </p:spPr>
-        <p:txBody>
-          <a:bodyPr wrap="square" lIns="0" tIns="0" rIns="0" bIns="0" rtlCol="0" anchor="t">
-            <a:normAutofit/>
-          </a:bodyPr>
-          <a:lstStyle/>
-          <a:p>
-            <a:pPr algn="l" indent="0" marL="0">
-              <a:lnSpc>
-                <a:spcPts val="1495"/>
-              </a:lnSpc>
-              <a:buNone/>
-            </a:pPr>
-            <a:r>
-              <a:rPr lang="en-US" sz="1150" dirty="0">
-                <a:solidFill>
-                  <a:srgbClr val="46605D"/>
-                </a:solidFill>
-                <a:latin typeface="Sarabun" pitchFamily="34" charset="0"/>
-                <a:ea typeface="Sarabun" pitchFamily="34" charset="-122"/>
-                <a:cs typeface="Sarabun" pitchFamily="34" charset="-120"/>
-              </a:rPr>
-              <a:t>ติดตามทรัพย์สินที่ออกจากคลังถาวร</a:t>
-            </a:r>
-            <a:endParaRPr lang="en-US" sz="1150" dirty="0"/>
-          </a:p>
-        </p:txBody>
-      </p:sp>
-      <p:sp>
-        <p:nvSpPr>
-          <p:cNvPr id="18" name="Text 15"/>
-          <p:cNvSpPr/>
-          <p:nvPr/>
-        </p:nvSpPr>
-        <p:spPr>
-          <a:xfrm>
-            <a:off x="7518400" y="3568402"/>
-            <a:ext cx="254000" cy="254000"/>
-          </a:xfrm>
-          <a:prstGeom prst="roundRect">
-            <a:avLst>
-              <a:gd name="adj" fmla="val 50000"/>
-            </a:avLst>
-          </a:prstGeom>
-          <a:solidFill>
-            <a:srgbClr val="0D9488"/>
-          </a:solidFill>
-          <a:ln/>
-        </p:spPr>
-        <p:txBody>
-          <a:bodyPr wrap="square" lIns="0" tIns="0" rIns="0" bIns="0" rtlCol="0" anchor="ctr">
-            <a:normAutofit/>
-          </a:bodyPr>
-          <a:lstStyle/>
-          <a:p>
-            <a:pPr algn="ctr" indent="0" marL="0">
-              <a:lnSpc>
-                <a:spcPts val="1000"/>
-              </a:lnSpc>
-              <a:buNone/>
-            </a:pPr>
-            <a:r>
-              <a:rPr lang="en-US" sz="1000" b="1" dirty="0">
-                <a:solidFill>
-                  <a:srgbClr val="FFFFFF"/>
-                </a:solidFill>
-                <a:latin typeface="Kanit" pitchFamily="34" charset="0"/>
-                <a:ea typeface="Kanit" pitchFamily="34" charset="-122"/>
-                <a:cs typeface="Kanit" pitchFamily="34" charset="-120"/>
-              </a:rPr>
-              <a:t>5</a:t>
-            </a:r>
-            <a:endParaRPr lang="en-US" sz="1000" dirty="0"/>
-          </a:p>
-        </p:txBody>
-      </p:sp>
-      <p:sp>
-        <p:nvSpPr>
-          <p:cNvPr id="19" name="Text 16"/>
-          <p:cNvSpPr/>
-          <p:nvPr/>
-        </p:nvSpPr>
-        <p:spPr>
-          <a:xfrm>
-            <a:off x="7874000" y="3568402"/>
-            <a:ext cx="2019657" cy="231775"/>
-          </a:xfrm>
-          <a:prstGeom prst="rect">
-            <a:avLst/>
-          </a:prstGeom>
-          <a:noFill/>
-          <a:ln/>
-        </p:spPr>
-        <p:txBody>
-          <a:bodyPr wrap="square" lIns="0" tIns="0" rIns="0" bIns="0" rtlCol="0" anchor="t">
-            <a:normAutofit/>
-          </a:bodyPr>
-          <a:lstStyle/>
-          <a:p>
-            <a:pPr algn="l" indent="0" marL="0">
-              <a:lnSpc>
-                <a:spcPts val="1625"/>
-              </a:lnSpc>
-              <a:buNone/>
-            </a:pPr>
-            <a:r>
-              <a:rPr lang="en-US" sz="1300" b="1" dirty="0">
-                <a:solidFill>
-                  <a:srgbClr val="0F2A29"/>
-                </a:solidFill>
-                <a:latin typeface="Sarabun" pitchFamily="34" charset="0"/>
-                <a:ea typeface="Sarabun" pitchFamily="34" charset="-122"/>
-                <a:cs typeface="Sarabun" pitchFamily="34" charset="-120"/>
-              </a:rPr>
-              <a:t>ตารางใกล้ครบกำหนดคืน</a:t>
-            </a:r>
-            <a:endParaRPr lang="en-US" sz="1300" dirty="0"/>
-          </a:p>
-        </p:txBody>
-      </p:sp>
-      <p:sp>
-        <p:nvSpPr>
-          <p:cNvPr id="20" name="Text 17"/>
-          <p:cNvSpPr/>
-          <p:nvPr/>
-        </p:nvSpPr>
-        <p:spPr>
-          <a:xfrm>
-            <a:off x="7874000" y="3800177"/>
-            <a:ext cx="1733848" cy="215205"/>
-          </a:xfrm>
-          <a:prstGeom prst="rect">
-            <a:avLst/>
-          </a:prstGeom>
-          <a:noFill/>
-          <a:ln/>
-        </p:spPr>
-        <p:txBody>
-          <a:bodyPr wrap="square" lIns="0" tIns="0" rIns="0" bIns="0" rtlCol="0" anchor="t">
-            <a:normAutofit/>
-          </a:bodyPr>
-          <a:lstStyle/>
-          <a:p>
-            <a:pPr algn="l" indent="0" marL="0">
-              <a:lnSpc>
-                <a:spcPts val="1495"/>
-              </a:lnSpc>
-              <a:buNone/>
-            </a:pPr>
-            <a:r>
-              <a:rPr lang="en-US" sz="1150" dirty="0">
-                <a:solidFill>
-                  <a:srgbClr val="46605D"/>
-                </a:solidFill>
-                <a:latin typeface="Sarabun" pitchFamily="34" charset="0"/>
-                <a:ea typeface="Sarabun" pitchFamily="34" charset="-122"/>
-                <a:cs typeface="Sarabun" pitchFamily="34" charset="-120"/>
-              </a:rPr>
-              <a:t>เตือนล่วงหน้าภายใน 30 วัน</a:t>
-            </a:r>
-            <a:endParaRPr lang="en-US" sz="1150" dirty="0"/>
-          </a:p>
-        </p:txBody>
-      </p:sp>
-      <p:sp>
-        <p:nvSpPr>
-          <p:cNvPr id="21" name="Text 18"/>
           <p:cNvSpPr/>
           <p:nvPr/>
         </p:nvSpPr>
@@ -11259,7 +11392,7 @@
                 <a:ea typeface="Kanit" pitchFamily="34" charset="-122"/>
                 <a:cs typeface="Kanit" pitchFamily="34" charset="-120"/>
               </a:rPr>
-              <a:t>ยืนยัน Business Flow</a:t>
+              <a:t>ยืนยันขั้นตอนการทำงาน</a:t>
             </a:r>
             <a:endParaRPr lang="en-US" sz="1600" dirty="0"/>
           </a:p>
@@ -11303,7 +11436,7 @@
                 <a:ea typeface="Sarabun" pitchFamily="34" charset="-122"/>
                 <a:cs typeface="Sarabun" pitchFamily="34" charset="-120"/>
               </a:rPr>
-              <a:t>ให้ user เห็นภาพขั้นตอนการทำงานจริงของแต่ละหน้าจอ ก่อนลงมือเขียนโค้ดจริง</a:t>
+              <a:t>ให้ผู้ใช้งานเห็นภาพขั้นตอนจริงของแต่ละหน้าจอ ก่อนลงมือเขียนโค้ดจริง</a:t>
             </a:r>
             <a:endParaRPr lang="en-US" sz="1250" dirty="0"/>
           </a:p>
@@ -11403,7 +11536,7 @@
                 <a:ea typeface="Kanit" pitchFamily="34" charset="-122"/>
                 <a:cs typeface="Kanit" pitchFamily="34" charset="-120"/>
               </a:rPr>
-              <a:t>ปรับจาก Feedback จริง 11 รอบ</a:t>
+              <a:t>ปรับปรุงตามความคิดเห็นจริง</a:t>
             </a:r>
             <a:endParaRPr lang="en-US" sz="1600" dirty="0"/>
           </a:p>
@@ -11447,7 +11580,7 @@
                 <a:ea typeface="Sarabun" pitchFamily="34" charset="-122"/>
                 <a:cs typeface="Sarabun" pitchFamily="34" charset="-120"/>
               </a:rPr>
-              <a:t>ทุกหน้าจอผ่านการตรวจสอบและปรับแก้ตาม feedback ของ user มาแล้ว Round 1–11</a:t>
+              <a:t>ทุกหน้าจอผ่านการตรวจสอบและปรับแก้ตามความคิดเห็นของผู้ใช้งานมาแล้วหลายรอบ</a:t>
             </a:r>
             <a:endParaRPr lang="en-US" sz="1250" dirty="0"/>
           </a:p>
@@ -11591,7 +11724,7 @@
                 <a:ea typeface="Sarabun" pitchFamily="34" charset="-122"/>
                 <a:cs typeface="Sarabun" pitchFamily="34" charset="-120"/>
               </a:rPr>
-              <a:t>HTML/CSS/Vanilla JS ล้วน ไม่มีฐานข้อมูล ไม่เชื่อมต่อ production — รันในเบราว์เซอร์ล้วนๆ</a:t>
+              <a:t>เป็นเพียงหน้าจอตัวอย่าง ยังไม่เชื่อมฐานข้อมูลหรือระบบจริง ใช้เพื่อทดสอบหน้าตาและขั้นตอนเท่านั้น</a:t>
             </a:r>
             <a:endParaRPr lang="en-US" sz="1250" dirty="0"/>
           </a:p>
@@ -11635,7 +11768,7 @@
                 <a:ea typeface="Sarabun" pitchFamily="34" charset="-122"/>
                 <a:cs typeface="Sarabun" pitchFamily="34" charset="-120"/>
               </a:rPr>
-              <a:t>ไฟล์ทดสอบ: index.html · app.js · data.js — เปิดได้ทันทีด้วยการดับเบิลคลิก ไม่ต้องต่ออินเทอร์เน็ต</a:t>
+              <a:t>เปิดดูได้ทันทีจากไฟล์ตัวอย่างในเครื่อง ไม่ต้องเชื่อมต่ออินเทอร์เน็ต</a:t>
             </a:r>
             <a:endParaRPr lang="en-US" sz="1200" dirty="0"/>
           </a:p>
@@ -11726,36 +11859,36 @@
         <p:spPr>
           <a:xfrm>
             <a:off x="609600" y="609600"/>
-            <a:ext cx="11301984" cy="256480"/>
-          </a:xfrm>
-          <a:prstGeom prst="rect">
-            <a:avLst/>
-          </a:prstGeom>
-          <a:noFill/>
-          <a:ln/>
-        </p:spPr>
-        <p:txBody>
-          <a:bodyPr wrap="square" lIns="0" tIns="0" rIns="0" bIns="0" rtlCol="0" anchor="t">
-            <a:normAutofit/>
-          </a:bodyPr>
-          <a:lstStyle/>
-          <a:p>
-            <a:pPr algn="l" indent="0" marL="0">
-              <a:lnSpc>
-                <a:spcPts val="1820"/>
+            <a:ext cx="11301984" cy="190500"/>
+          </a:xfrm>
+          <a:prstGeom prst="rect">
+            <a:avLst/>
+          </a:prstGeom>
+          <a:noFill/>
+          <a:ln/>
+        </p:spPr>
+        <p:txBody>
+          <a:bodyPr wrap="square" lIns="0" tIns="0" rIns="0" bIns="0" rtlCol="0" anchor="t">
+            <a:normAutofit/>
+          </a:bodyPr>
+          <a:lstStyle/>
+          <a:p>
+            <a:pPr algn="l" indent="0" marL="0">
+              <a:lnSpc>
+                <a:spcPts val="1300"/>
               </a:lnSpc>
               <a:buNone/>
             </a:pPr>
             <a:r>
               <a:rPr lang="en-US" sz="1300" b="1" spc="150" kern="0" dirty="0">
                 <a:solidFill>
-                  <a:srgbClr val="B45309"/>
+                  <a:srgbClr val="0C7D72"/>
                 </a:solidFill>
                 <a:latin typeface="Kanit" pitchFamily="34" charset="0"/>
                 <a:ea typeface="Kanit" pitchFamily="34" charset="-122"/>
                 <a:cs typeface="Kanit" pitchFamily="34" charset="-120"/>
               </a:rPr>
-              <a:t>สรุปสถานะหลัง ROUND 11</a:t>
+              <a:t>ขั้นตอนที่ 11 จาก 11</a:t>
             </a:r>
             <a:endParaRPr lang="en-US" sz="1300" dirty="0"/>
           </a:p>
@@ -11771,7 +11904,7 @@
         </p:nvSpPr>
         <p:spPr>
           <a:xfrm>
-            <a:off x="609600" y="904180"/>
+            <a:off x="609600" y="838200"/>
             <a:ext cx="11301984" cy="434280"/>
           </a:xfrm>
           <a:prstGeom prst="rect">
@@ -11801,7 +11934,7 @@
                 <a:ea typeface="Kanit" pitchFamily="34" charset="-122"/>
                 <a:cs typeface="Kanit" pitchFamily="34" charset="-120"/>
               </a:rPr>
-              <a:t>ข้อจำกัดที่ทราบแล้ว (คุยกับ user แล้ว)</a:t>
+              <a:t>ภาพรวม Dashboard — ปิดวงจรการทำงาน</a:t>
             </a:r>
             <a:endParaRPr lang="en-US" sz="2800" dirty="0"/>
           </a:p>
@@ -11815,8 +11948,912 @@
         </p:nvSpPr>
         <p:spPr>
           <a:xfrm>
+            <a:off x="612775" y="1428055"/>
+            <a:ext cx="6597650" cy="4406900"/>
+          </a:xfrm>
+          <a:prstGeom prst="roundRect">
+            <a:avLst>
+              <a:gd name="adj" fmla="val 2810"/>
+            </a:avLst>
+          </a:prstGeom>
+          <a:solidFill>
+            <a:srgbClr val="FFFFFF"/>
+          </a:solidFill>
+          <a:ln w="6350">
+            <a:solidFill>
+              <a:srgbClr val="DCE7E5"/>
+            </a:solidFill>
+            <a:prstDash val="solid"/>
+          </a:ln>
+          <a:effectLst>
+            <a:outerShdw sx="100000" sy="100000" kx="0" ky="0" algn="bl" rotWithShape="0" blurRad="152400" dist="50800" dir="5400000">
+              <a:srgbClr val="114342">
+                <a:alpha val="10000"/>
+              </a:srgbClr>
+            </a:outerShdw>
+          </a:effectLst>
+        </p:spPr>
+      </p:sp>
+      <p:pic>
+        <p:nvPicPr>
+          <p:cNvPr id="5" name="Image 0" descr="ภาพหน้าจอ ภาพรวม Dashboard — ปิดวงจรการทำงาน">    </p:cNvPr>
+          <p:cNvPicPr>
+            <a:picLocks noChangeAspect="1"/>
+          </p:cNvPicPr>
+          <p:nvPr/>
+        </p:nvPicPr>
+        <p:blipFill>
+          <a:blip r:embed="rId1"/>
+          <a:stretch>
+            <a:fillRect/>
+          </a:stretch>
+        </p:blipFill>
+        <p:spPr>
+          <a:xfrm>
+            <a:off x="742950" y="1669960"/>
+            <a:ext cx="6337300" cy="3923090"/>
+          </a:xfrm>
+          <a:prstGeom prst="rect">
+            <a:avLst/>
+          </a:prstGeom>
+        </p:spPr>
+      </p:pic>
+      <p:sp>
+        <p:nvSpPr>
+          <p:cNvPr id="6" name="Text 3"/>
+          <p:cNvSpPr/>
+          <p:nvPr/>
+        </p:nvSpPr>
+        <p:spPr>
+          <a:xfrm>
+            <a:off x="7518400" y="1424880"/>
+            <a:ext cx="254000" cy="254000"/>
+          </a:xfrm>
+          <a:prstGeom prst="roundRect">
+            <a:avLst>
+              <a:gd name="adj" fmla="val 50000"/>
+            </a:avLst>
+          </a:prstGeom>
+          <a:solidFill>
+            <a:srgbClr val="0D9488"/>
+          </a:solidFill>
+          <a:ln/>
+        </p:spPr>
+        <p:txBody>
+          <a:bodyPr wrap="square" lIns="0" tIns="0" rIns="0" bIns="0" rtlCol="0" anchor="ctr">
+            <a:normAutofit/>
+          </a:bodyPr>
+          <a:lstStyle/>
+          <a:p>
+            <a:pPr algn="ctr" indent="0" marL="0">
+              <a:lnSpc>
+                <a:spcPts val="1000"/>
+              </a:lnSpc>
+              <a:buNone/>
+            </a:pPr>
+            <a:r>
+              <a:rPr lang="en-US" sz="1000" b="1" dirty="0">
+                <a:solidFill>
+                  <a:srgbClr val="FFFFFF"/>
+                </a:solidFill>
+                <a:latin typeface="Kanit" pitchFamily="34" charset="0"/>
+                <a:ea typeface="Kanit" pitchFamily="34" charset="-122"/>
+                <a:cs typeface="Kanit" pitchFamily="34" charset="-120"/>
+              </a:rPr>
+              <a:t>1</a:t>
+            </a:r>
+            <a:endParaRPr lang="en-US" sz="1000" dirty="0"/>
+          </a:p>
+        </p:txBody>
+      </p:sp>
+      <p:sp>
+        <p:nvSpPr>
+          <p:cNvPr id="7" name="Text 4"/>
+          <p:cNvSpPr/>
+          <p:nvPr/>
+        </p:nvSpPr>
+        <p:spPr>
+          <a:xfrm>
+            <a:off x="7874000" y="1424880"/>
+            <a:ext cx="2456469" cy="231775"/>
+          </a:xfrm>
+          <a:prstGeom prst="rect">
+            <a:avLst/>
+          </a:prstGeom>
+          <a:noFill/>
+          <a:ln/>
+        </p:spPr>
+        <p:txBody>
+          <a:bodyPr wrap="square" lIns="0" tIns="0" rIns="0" bIns="0" rtlCol="0" anchor="t">
+            <a:normAutofit/>
+          </a:bodyPr>
+          <a:lstStyle/>
+          <a:p>
+            <a:pPr algn="l" indent="0" marL="0">
+              <a:lnSpc>
+                <a:spcPts val="1625"/>
+              </a:lnSpc>
+              <a:buNone/>
+            </a:pPr>
+            <a:r>
+              <a:rPr lang="en-US" sz="1300" b="1" dirty="0">
+                <a:solidFill>
+                  <a:srgbClr val="0F2A29"/>
+                </a:solidFill>
+                <a:latin typeface="Sarabun" pitchFamily="34" charset="0"/>
+                <a:ea typeface="Sarabun" pitchFamily="34" charset="-122"/>
+                <a:cs typeface="Sarabun" pitchFamily="34" charset="-120"/>
+              </a:rPr>
+              <a:t>การ์ดสรุปเปลี่ยนตามบทบาท</a:t>
+            </a:r>
+            <a:endParaRPr lang="en-US" sz="1300" dirty="0"/>
+          </a:p>
+        </p:txBody>
+      </p:sp>
+      <p:sp>
+        <p:nvSpPr>
+          <p:cNvPr id="8" name="Text 5"/>
+          <p:cNvSpPr/>
+          <p:nvPr/>
+        </p:nvSpPr>
+        <p:spPr>
+          <a:xfrm>
+            <a:off x="7874000" y="1656655"/>
+            <a:ext cx="2861905" cy="215205"/>
+          </a:xfrm>
+          <a:prstGeom prst="rect">
+            <a:avLst/>
+          </a:prstGeom>
+          <a:noFill/>
+          <a:ln/>
+        </p:spPr>
+        <p:txBody>
+          <a:bodyPr wrap="square" lIns="0" tIns="0" rIns="0" bIns="0" rtlCol="0" anchor="t">
+            <a:normAutofit/>
+          </a:bodyPr>
+          <a:lstStyle/>
+          <a:p>
+            <a:pPr algn="l" indent="0" marL="0">
+              <a:lnSpc>
+                <a:spcPts val="1495"/>
+              </a:lnSpc>
+              <a:buNone/>
+            </a:pPr>
+            <a:r>
+              <a:rPr lang="en-US" sz="1150" dirty="0">
+                <a:solidFill>
+                  <a:srgbClr val="46605D"/>
+                </a:solidFill>
+                <a:latin typeface="Sarabun" pitchFamily="34" charset="0"/>
+                <a:ea typeface="Sarabun" pitchFamily="34" charset="-122"/>
+                <a:cs typeface="Sarabun" pitchFamily="34" charset="-120"/>
+              </a:rPr>
+              <a:t>เห็นข้อมูลต่างกันตามบทบาทของผู้ใช้งาน</a:t>
+            </a:r>
+            <a:endParaRPr lang="en-US" sz="1150" dirty="0"/>
+          </a:p>
+        </p:txBody>
+      </p:sp>
+      <p:sp>
+        <p:nvSpPr>
+          <p:cNvPr id="9" name="Text 6"/>
+          <p:cNvSpPr/>
+          <p:nvPr/>
+        </p:nvSpPr>
+        <p:spPr>
+          <a:xfrm>
+            <a:off x="7518400" y="1960761"/>
+            <a:ext cx="254000" cy="254000"/>
+          </a:xfrm>
+          <a:prstGeom prst="roundRect">
+            <a:avLst>
+              <a:gd name="adj" fmla="val 50000"/>
+            </a:avLst>
+          </a:prstGeom>
+          <a:solidFill>
+            <a:srgbClr val="0D9488"/>
+          </a:solidFill>
+          <a:ln/>
+        </p:spPr>
+        <p:txBody>
+          <a:bodyPr wrap="square" lIns="0" tIns="0" rIns="0" bIns="0" rtlCol="0" anchor="ctr">
+            <a:normAutofit/>
+          </a:bodyPr>
+          <a:lstStyle/>
+          <a:p>
+            <a:pPr algn="ctr" indent="0" marL="0">
+              <a:lnSpc>
+                <a:spcPts val="1000"/>
+              </a:lnSpc>
+              <a:buNone/>
+            </a:pPr>
+            <a:r>
+              <a:rPr lang="en-US" sz="1000" b="1" dirty="0">
+                <a:solidFill>
+                  <a:srgbClr val="FFFFFF"/>
+                </a:solidFill>
+                <a:latin typeface="Kanit" pitchFamily="34" charset="0"/>
+                <a:ea typeface="Kanit" pitchFamily="34" charset="-122"/>
+                <a:cs typeface="Kanit" pitchFamily="34" charset="-120"/>
+              </a:rPr>
+              <a:t>2</a:t>
+            </a:r>
+            <a:endParaRPr lang="en-US" sz="1000" dirty="0"/>
+          </a:p>
+        </p:txBody>
+      </p:sp>
+      <p:sp>
+        <p:nvSpPr>
+          <p:cNvPr id="10" name="Text 7"/>
+          <p:cNvSpPr/>
+          <p:nvPr/>
+        </p:nvSpPr>
+        <p:spPr>
+          <a:xfrm>
+            <a:off x="7874000" y="1960761"/>
+            <a:ext cx="1898993" cy="231775"/>
+          </a:xfrm>
+          <a:prstGeom prst="rect">
+            <a:avLst/>
+          </a:prstGeom>
+          <a:noFill/>
+          <a:ln/>
+        </p:spPr>
+        <p:txBody>
+          <a:bodyPr wrap="square" lIns="0" tIns="0" rIns="0" bIns="0" rtlCol="0" anchor="t">
+            <a:normAutofit/>
+          </a:bodyPr>
+          <a:lstStyle/>
+          <a:p>
+            <a:pPr algn="l" indent="0" marL="0">
+              <a:lnSpc>
+                <a:spcPts val="1625"/>
+              </a:lnSpc>
+              <a:buNone/>
+            </a:pPr>
+            <a:r>
+              <a:rPr lang="en-US" sz="1300" b="1" dirty="0">
+                <a:solidFill>
+                  <a:srgbClr val="0F2A29"/>
+                </a:solidFill>
+                <a:latin typeface="Sarabun" pitchFamily="34" charset="0"/>
+                <a:ea typeface="Sarabun" pitchFamily="34" charset="-122"/>
+                <a:cs typeface="Sarabun" pitchFamily="34" charset="-120"/>
+              </a:rPr>
+              <a:t>คำขอเบิกรอจ่ายของ</a:t>
+            </a:r>
+            <a:endParaRPr lang="en-US" sz="1300" dirty="0"/>
+          </a:p>
+        </p:txBody>
+      </p:sp>
+      <p:sp>
+        <p:nvSpPr>
+          <p:cNvPr id="11" name="Text 8"/>
+          <p:cNvSpPr/>
+          <p:nvPr/>
+        </p:nvSpPr>
+        <p:spPr>
+          <a:xfrm>
+            <a:off x="7874000" y="2192536"/>
+            <a:ext cx="2212419" cy="215205"/>
+          </a:xfrm>
+          <a:prstGeom prst="rect">
+            <a:avLst/>
+          </a:prstGeom>
+          <a:noFill/>
+          <a:ln/>
+        </p:spPr>
+        <p:txBody>
+          <a:bodyPr wrap="square" lIns="0" tIns="0" rIns="0" bIns="0" rtlCol="0" anchor="t">
+            <a:normAutofit/>
+          </a:bodyPr>
+          <a:lstStyle/>
+          <a:p>
+            <a:pPr algn="l" indent="0" marL="0">
+              <a:lnSpc>
+                <a:spcPts val="1495"/>
+              </a:lnSpc>
+              <a:buNone/>
+            </a:pPr>
+            <a:r>
+              <a:rPr lang="en-US" sz="1150" dirty="0">
+                <a:solidFill>
+                  <a:srgbClr val="46605D"/>
+                </a:solidFill>
+                <a:latin typeface="Sarabun" pitchFamily="34" charset="0"/>
+                <a:ea typeface="Sarabun" pitchFamily="34" charset="-122"/>
+                <a:cs typeface="Sarabun" pitchFamily="34" charset="-120"/>
+              </a:rPr>
+              <a:t>และคำขอที่รอผู้รับยืนยันรับของ</a:t>
+            </a:r>
+            <a:endParaRPr lang="en-US" sz="1150" dirty="0"/>
+          </a:p>
+        </p:txBody>
+      </p:sp>
+      <p:sp>
+        <p:nvSpPr>
+          <p:cNvPr id="12" name="Text 9"/>
+          <p:cNvSpPr/>
+          <p:nvPr/>
+        </p:nvSpPr>
+        <p:spPr>
+          <a:xfrm>
+            <a:off x="7518400" y="2496641"/>
+            <a:ext cx="254000" cy="254000"/>
+          </a:xfrm>
+          <a:prstGeom prst="roundRect">
+            <a:avLst>
+              <a:gd name="adj" fmla="val 50000"/>
+            </a:avLst>
+          </a:prstGeom>
+          <a:solidFill>
+            <a:srgbClr val="0D9488"/>
+          </a:solidFill>
+          <a:ln/>
+        </p:spPr>
+        <p:txBody>
+          <a:bodyPr wrap="square" lIns="0" tIns="0" rIns="0" bIns="0" rtlCol="0" anchor="ctr">
+            <a:normAutofit/>
+          </a:bodyPr>
+          <a:lstStyle/>
+          <a:p>
+            <a:pPr algn="ctr" indent="0" marL="0">
+              <a:lnSpc>
+                <a:spcPts val="1000"/>
+              </a:lnSpc>
+              <a:buNone/>
+            </a:pPr>
+            <a:r>
+              <a:rPr lang="en-US" sz="1000" b="1" dirty="0">
+                <a:solidFill>
+                  <a:srgbClr val="FFFFFF"/>
+                </a:solidFill>
+                <a:latin typeface="Kanit" pitchFamily="34" charset="0"/>
+                <a:ea typeface="Kanit" pitchFamily="34" charset="-122"/>
+                <a:cs typeface="Kanit" pitchFamily="34" charset="-120"/>
+              </a:rPr>
+              <a:t>3</a:t>
+            </a:r>
+            <a:endParaRPr lang="en-US" sz="1000" dirty="0"/>
+          </a:p>
+        </p:txBody>
+      </p:sp>
+      <p:sp>
+        <p:nvSpPr>
+          <p:cNvPr id="13" name="Text 10"/>
+          <p:cNvSpPr/>
+          <p:nvPr/>
+        </p:nvSpPr>
+        <p:spPr>
+          <a:xfrm>
+            <a:off x="7874000" y="2496641"/>
+            <a:ext cx="2892862" cy="231775"/>
+          </a:xfrm>
+          <a:prstGeom prst="rect">
+            <a:avLst/>
+          </a:prstGeom>
+          <a:noFill/>
+          <a:ln/>
+        </p:spPr>
+        <p:txBody>
+          <a:bodyPr wrap="square" lIns="0" tIns="0" rIns="0" bIns="0" rtlCol="0" anchor="t">
+            <a:normAutofit/>
+          </a:bodyPr>
+          <a:lstStyle/>
+          <a:p>
+            <a:pPr algn="l" indent="0" marL="0">
+              <a:lnSpc>
+                <a:spcPts val="1625"/>
+              </a:lnSpc>
+              <a:buNone/>
+            </a:pPr>
+            <a:r>
+              <a:rPr lang="en-US" sz="1300" b="1" dirty="0">
+                <a:solidFill>
+                  <a:srgbClr val="0F2A29"/>
+                </a:solidFill>
+                <a:latin typeface="Sarabun" pitchFamily="34" charset="0"/>
+                <a:ea typeface="Sarabun" pitchFamily="34" charset="-122"/>
+                <a:cs typeface="Sarabun" pitchFamily="34" charset="-120"/>
+              </a:rPr>
+              <a:t>รอซ่อม / กำลังซ่อม / รอตัดจำหน่าย</a:t>
+            </a:r>
+            <a:endParaRPr lang="en-US" sz="1300" dirty="0"/>
+          </a:p>
+        </p:txBody>
+      </p:sp>
+      <p:sp>
+        <p:nvSpPr>
+          <p:cNvPr id="14" name="Text 11"/>
+          <p:cNvSpPr/>
+          <p:nvPr/>
+        </p:nvSpPr>
+        <p:spPr>
+          <a:xfrm>
+            <a:off x="7874000" y="2728416"/>
+            <a:ext cx="2483040" cy="215205"/>
+          </a:xfrm>
+          <a:prstGeom prst="rect">
+            <a:avLst/>
+          </a:prstGeom>
+          <a:noFill/>
+          <a:ln/>
+        </p:spPr>
+        <p:txBody>
+          <a:bodyPr wrap="square" lIns="0" tIns="0" rIns="0" bIns="0" rtlCol="0" anchor="t">
+            <a:normAutofit/>
+          </a:bodyPr>
+          <a:lstStyle/>
+          <a:p>
+            <a:pPr algn="l" indent="0" marL="0">
+              <a:lnSpc>
+                <a:spcPts val="1495"/>
+              </a:lnSpc>
+              <a:buNone/>
+            </a:pPr>
+            <a:r>
+              <a:rPr lang="en-US" sz="1150" dirty="0">
+                <a:solidFill>
+                  <a:srgbClr val="46605D"/>
+                </a:solidFill>
+                <a:latin typeface="Sarabun" pitchFamily="34" charset="0"/>
+                <a:ea typeface="Sarabun" pitchFamily="34" charset="-122"/>
+                <a:cs typeface="Sarabun" pitchFamily="34" charset="-120"/>
+              </a:rPr>
+              <a:t>ภาพรวมของที่ยังใช้งานไม่ได้</a:t>
+            </a:r>
+            <a:endParaRPr lang="en-US" sz="1150" dirty="0"/>
+          </a:p>
+        </p:txBody>
+      </p:sp>
+      <p:sp>
+        <p:nvSpPr>
+          <p:cNvPr id="15" name="Text 12"/>
+          <p:cNvSpPr/>
+          <p:nvPr/>
+        </p:nvSpPr>
+        <p:spPr>
+          <a:xfrm>
+            <a:off x="7518400" y="3032522"/>
+            <a:ext cx="254000" cy="254000"/>
+          </a:xfrm>
+          <a:prstGeom prst="roundRect">
+            <a:avLst>
+              <a:gd name="adj" fmla="val 50000"/>
+            </a:avLst>
+          </a:prstGeom>
+          <a:solidFill>
+            <a:srgbClr val="0D9488"/>
+          </a:solidFill>
+          <a:ln/>
+        </p:spPr>
+        <p:txBody>
+          <a:bodyPr wrap="square" lIns="0" tIns="0" rIns="0" bIns="0" rtlCol="0" anchor="ctr">
+            <a:normAutofit/>
+          </a:bodyPr>
+          <a:lstStyle/>
+          <a:p>
+            <a:pPr algn="ctr" indent="0" marL="0">
+              <a:lnSpc>
+                <a:spcPts val="1000"/>
+              </a:lnSpc>
+              <a:buNone/>
+            </a:pPr>
+            <a:r>
+              <a:rPr lang="en-US" sz="1000" b="1" dirty="0">
+                <a:solidFill>
+                  <a:srgbClr val="FFFFFF"/>
+                </a:solidFill>
+                <a:latin typeface="Kanit" pitchFamily="34" charset="0"/>
+                <a:ea typeface="Kanit" pitchFamily="34" charset="-122"/>
+                <a:cs typeface="Kanit" pitchFamily="34" charset="-120"/>
+              </a:rPr>
+              <a:t>4</a:t>
+            </a:r>
+            <a:endParaRPr lang="en-US" sz="1000" dirty="0"/>
+          </a:p>
+        </p:txBody>
+      </p:sp>
+      <p:sp>
+        <p:nvSpPr>
+          <p:cNvPr id="16" name="Text 13"/>
+          <p:cNvSpPr/>
+          <p:nvPr/>
+        </p:nvSpPr>
+        <p:spPr>
+          <a:xfrm>
+            <a:off x="7874000" y="3032522"/>
+            <a:ext cx="2778443" cy="231775"/>
+          </a:xfrm>
+          <a:prstGeom prst="rect">
+            <a:avLst/>
+          </a:prstGeom>
+          <a:noFill/>
+          <a:ln/>
+        </p:spPr>
+        <p:txBody>
+          <a:bodyPr wrap="square" lIns="0" tIns="0" rIns="0" bIns="0" rtlCol="0" anchor="t">
+            <a:normAutofit/>
+          </a:bodyPr>
+          <a:lstStyle/>
+          <a:p>
+            <a:pPr algn="l" indent="0" marL="0">
+              <a:lnSpc>
+                <a:spcPts val="1625"/>
+              </a:lnSpc>
+              <a:buNone/>
+            </a:pPr>
+            <a:r>
+              <a:rPr lang="en-US" sz="1300" b="1" dirty="0">
+                <a:solidFill>
+                  <a:srgbClr val="0F2A29"/>
+                </a:solidFill>
+                <a:latin typeface="Sarabun" pitchFamily="34" charset="0"/>
+                <a:ea typeface="Sarabun" pitchFamily="34" charset="-122"/>
+                <a:cs typeface="Sarabun" pitchFamily="34" charset="-120"/>
+              </a:rPr>
+              <a:t>ขายแล้ว / ตัดจำหน่ายแล้ว (สะสม)</a:t>
+            </a:r>
+            <a:endParaRPr lang="en-US" sz="1300" dirty="0"/>
+          </a:p>
+        </p:txBody>
+      </p:sp>
+      <p:sp>
+        <p:nvSpPr>
+          <p:cNvPr id="17" name="Text 14"/>
+          <p:cNvSpPr/>
+          <p:nvPr/>
+        </p:nvSpPr>
+        <p:spPr>
+          <a:xfrm>
+            <a:off x="7874000" y="3264297"/>
+            <a:ext cx="2384830" cy="215205"/>
+          </a:xfrm>
+          <a:prstGeom prst="rect">
+            <a:avLst/>
+          </a:prstGeom>
+          <a:noFill/>
+          <a:ln/>
+        </p:spPr>
+        <p:txBody>
+          <a:bodyPr wrap="square" lIns="0" tIns="0" rIns="0" bIns="0" rtlCol="0" anchor="t">
+            <a:normAutofit/>
+          </a:bodyPr>
+          <a:lstStyle/>
+          <a:p>
+            <a:pPr algn="l" indent="0" marL="0">
+              <a:lnSpc>
+                <a:spcPts val="1495"/>
+              </a:lnSpc>
+              <a:buNone/>
+            </a:pPr>
+            <a:r>
+              <a:rPr lang="en-US" sz="1150" dirty="0">
+                <a:solidFill>
+                  <a:srgbClr val="46605D"/>
+                </a:solidFill>
+                <a:latin typeface="Sarabun" pitchFamily="34" charset="0"/>
+                <a:ea typeface="Sarabun" pitchFamily="34" charset="-122"/>
+                <a:cs typeface="Sarabun" pitchFamily="34" charset="-120"/>
+              </a:rPr>
+              <a:t>ติดตามทรัพย์สินที่ออกจากคลังถาวร</a:t>
+            </a:r>
+            <a:endParaRPr lang="en-US" sz="1150" dirty="0"/>
+          </a:p>
+        </p:txBody>
+      </p:sp>
+      <p:sp>
+        <p:nvSpPr>
+          <p:cNvPr id="18" name="Text 15"/>
+          <p:cNvSpPr/>
+          <p:nvPr/>
+        </p:nvSpPr>
+        <p:spPr>
+          <a:xfrm>
+            <a:off x="7518400" y="3568402"/>
+            <a:ext cx="254000" cy="254000"/>
+          </a:xfrm>
+          <a:prstGeom prst="roundRect">
+            <a:avLst>
+              <a:gd name="adj" fmla="val 50000"/>
+            </a:avLst>
+          </a:prstGeom>
+          <a:solidFill>
+            <a:srgbClr val="0D9488"/>
+          </a:solidFill>
+          <a:ln/>
+        </p:spPr>
+        <p:txBody>
+          <a:bodyPr wrap="square" lIns="0" tIns="0" rIns="0" bIns="0" rtlCol="0" anchor="ctr">
+            <a:normAutofit/>
+          </a:bodyPr>
+          <a:lstStyle/>
+          <a:p>
+            <a:pPr algn="ctr" indent="0" marL="0">
+              <a:lnSpc>
+                <a:spcPts val="1000"/>
+              </a:lnSpc>
+              <a:buNone/>
+            </a:pPr>
+            <a:r>
+              <a:rPr lang="en-US" sz="1000" b="1" dirty="0">
+                <a:solidFill>
+                  <a:srgbClr val="FFFFFF"/>
+                </a:solidFill>
+                <a:latin typeface="Kanit" pitchFamily="34" charset="0"/>
+                <a:ea typeface="Kanit" pitchFamily="34" charset="-122"/>
+                <a:cs typeface="Kanit" pitchFamily="34" charset="-120"/>
+              </a:rPr>
+              <a:t>5</a:t>
+            </a:r>
+            <a:endParaRPr lang="en-US" sz="1000" dirty="0"/>
+          </a:p>
+        </p:txBody>
+      </p:sp>
+      <p:sp>
+        <p:nvSpPr>
+          <p:cNvPr id="19" name="Text 16"/>
+          <p:cNvSpPr/>
+          <p:nvPr/>
+        </p:nvSpPr>
+        <p:spPr>
+          <a:xfrm>
+            <a:off x="7874000" y="3568402"/>
+            <a:ext cx="2019657" cy="231775"/>
+          </a:xfrm>
+          <a:prstGeom prst="rect">
+            <a:avLst/>
+          </a:prstGeom>
+          <a:noFill/>
+          <a:ln/>
+        </p:spPr>
+        <p:txBody>
+          <a:bodyPr wrap="square" lIns="0" tIns="0" rIns="0" bIns="0" rtlCol="0" anchor="t">
+            <a:normAutofit/>
+          </a:bodyPr>
+          <a:lstStyle/>
+          <a:p>
+            <a:pPr algn="l" indent="0" marL="0">
+              <a:lnSpc>
+                <a:spcPts val="1625"/>
+              </a:lnSpc>
+              <a:buNone/>
+            </a:pPr>
+            <a:r>
+              <a:rPr lang="en-US" sz="1300" b="1" dirty="0">
+                <a:solidFill>
+                  <a:srgbClr val="0F2A29"/>
+                </a:solidFill>
+                <a:latin typeface="Sarabun" pitchFamily="34" charset="0"/>
+                <a:ea typeface="Sarabun" pitchFamily="34" charset="-122"/>
+                <a:cs typeface="Sarabun" pitchFamily="34" charset="-120"/>
+              </a:rPr>
+              <a:t>ตารางใกล้ครบกำหนดคืน</a:t>
+            </a:r>
+            <a:endParaRPr lang="en-US" sz="1300" dirty="0"/>
+          </a:p>
+        </p:txBody>
+      </p:sp>
+      <p:sp>
+        <p:nvSpPr>
+          <p:cNvPr id="20" name="Text 17"/>
+          <p:cNvSpPr/>
+          <p:nvPr/>
+        </p:nvSpPr>
+        <p:spPr>
+          <a:xfrm>
+            <a:off x="7874000" y="3800177"/>
+            <a:ext cx="1733848" cy="215205"/>
+          </a:xfrm>
+          <a:prstGeom prst="rect">
+            <a:avLst/>
+          </a:prstGeom>
+          <a:noFill/>
+          <a:ln/>
+        </p:spPr>
+        <p:txBody>
+          <a:bodyPr wrap="square" lIns="0" tIns="0" rIns="0" bIns="0" rtlCol="0" anchor="t">
+            <a:normAutofit/>
+          </a:bodyPr>
+          <a:lstStyle/>
+          <a:p>
+            <a:pPr algn="l" indent="0" marL="0">
+              <a:lnSpc>
+                <a:spcPts val="1495"/>
+              </a:lnSpc>
+              <a:buNone/>
+            </a:pPr>
+            <a:r>
+              <a:rPr lang="en-US" sz="1150" dirty="0">
+                <a:solidFill>
+                  <a:srgbClr val="46605D"/>
+                </a:solidFill>
+                <a:latin typeface="Sarabun" pitchFamily="34" charset="0"/>
+                <a:ea typeface="Sarabun" pitchFamily="34" charset="-122"/>
+                <a:cs typeface="Sarabun" pitchFamily="34" charset="-120"/>
+              </a:rPr>
+              <a:t>เตือนล่วงหน้าภายใน 30 วัน</a:t>
+            </a:r>
+            <a:endParaRPr lang="en-US" sz="1150" dirty="0"/>
+          </a:p>
+        </p:txBody>
+      </p:sp>
+      <p:sp>
+        <p:nvSpPr>
+          <p:cNvPr id="21" name="Text 18"/>
+          <p:cNvSpPr/>
+          <p:nvPr/>
+        </p:nvSpPr>
+        <p:spPr>
+          <a:xfrm>
+            <a:off x="654304" y="6256040"/>
+            <a:ext cx="10883392" cy="220960"/>
+          </a:xfrm>
+          <a:prstGeom prst="rect">
+            <a:avLst/>
+          </a:prstGeom>
+          <a:noFill/>
+          <a:ln/>
+        </p:spPr>
+        <p:txBody>
+          <a:bodyPr wrap="square" lIns="0" tIns="0" rIns="0" bIns="0" rtlCol="0" anchor="t">
+            <a:normAutofit/>
+          </a:bodyPr>
+          <a:lstStyle/>
+          <a:p>
+            <a:pPr algn="ctr" indent="0" marL="0">
+              <a:lnSpc>
+                <a:spcPts val="1540"/>
+              </a:lnSpc>
+              <a:buNone/>
+            </a:pPr>
+            <a:r>
+              <a:rPr lang="en-US" sz="1100" dirty="0">
+                <a:solidFill>
+                  <a:srgbClr val="7C938F"/>
+                </a:solidFill>
+                <a:latin typeface="Sarabun" pitchFamily="34" charset="0"/>
+                <a:ea typeface="Sarabun" pitchFamily="34" charset="-122"/>
+                <a:cs typeface="Sarabun" pitchFamily="34" charset="-120"/>
+              </a:rPr>
+              <a:t>Bedrock Analytics · PMeX Enterprise — Stock Module (Mockup)</a:t>
+            </a:r>
+            <a:endParaRPr lang="en-US" sz="1100" dirty="0"/>
+          </a:p>
+        </p:txBody>
+      </p:sp>
+    </p:spTree>
+  </p:cSld>
+  <p:clrMapOvr>
+    <a:masterClrMapping/>
+  </p:clrMapOvr>
+</p:sld>
+</file>
+
+<file path=ppt/slides/slide21.xml><?xml version="1.0" encoding="utf-8"?>
+<p:sld xmlns:a="http://schemas.openxmlformats.org/drawingml/2006/main" xmlns:r="http://schemas.openxmlformats.org/officeDocument/2006/relationships" xmlns:p="http://schemas.openxmlformats.org/presentationml/2006/main">
+  <p:cSld name="Slide 21">
+    <p:bg>
+      <p:bgPr>
+        <a:solidFill>
+          <a:srgbClr val="F6FAF9"/>
+        </a:solidFill>
+      </p:bgPr>
+    </p:bg>
+    <p:spTree>
+      <p:nvGrpSpPr>
+        <p:cNvPr id="1" name=""/>
+        <p:cNvGrpSpPr/>
+        <p:nvPr/>
+      </p:nvGrpSpPr>
+      <p:grpSpPr>
+        <a:xfrm>
+          <a:off x="0" y="0"/>
+          <a:ext cx="0" cy="0"/>
+          <a:chOff x="0" y="0"/>
+          <a:chExt cx="0" cy="0"/>
+        </a:xfrm>
+      </p:grpSpPr>
+      <p:sp>
+        <p:nvSpPr>
+          <p:cNvPr id="2" name="Text 0"/>
+          <p:cNvSpPr/>
+          <p:nvPr/>
+        </p:nvSpPr>
+        <p:spPr>
+          <a:xfrm>
+            <a:off x="609600" y="609600"/>
+            <a:ext cx="11301984" cy="256480"/>
+          </a:xfrm>
+          <a:prstGeom prst="rect">
+            <a:avLst/>
+          </a:prstGeom>
+          <a:noFill/>
+          <a:ln/>
+        </p:spPr>
+        <p:txBody>
+          <a:bodyPr wrap="square" lIns="0" tIns="0" rIns="0" bIns="0" rtlCol="0" anchor="t">
+            <a:normAutofit/>
+          </a:bodyPr>
+          <a:lstStyle/>
+          <a:p>
+            <a:pPr algn="l" indent="0" marL="0">
+              <a:lnSpc>
+                <a:spcPts val="1820"/>
+              </a:lnSpc>
+              <a:buNone/>
+            </a:pPr>
+            <a:r>
+              <a:rPr lang="en-US" sz="1300" b="1" spc="150" kern="0" dirty="0">
+                <a:solidFill>
+                  <a:srgbClr val="B45309"/>
+                </a:solidFill>
+                <a:latin typeface="Kanit" pitchFamily="34" charset="0"/>
+                <a:ea typeface="Kanit" pitchFamily="34" charset="-122"/>
+                <a:cs typeface="Kanit" pitchFamily="34" charset="-120"/>
+              </a:rPr>
+              <a:t>สรุปสถานะล่าสุด</a:t>
+            </a:r>
+            <a:endParaRPr lang="en-US" sz="1300" dirty="0"/>
+          </a:p>
+        </p:txBody>
+      </p:sp>
+      <p:sp>
+        <p:nvSpPr>
+          <p:cNvPr id="3" name="Text 1"/>
+          <p:cNvSpPr/>
+          <p:nvPr>
+            <p:ph type="title"/>
+          </p:nvPr>
+        </p:nvSpPr>
+        <p:spPr>
+          <a:xfrm>
+            <a:off x="609600" y="904180"/>
+            <a:ext cx="11301984" cy="434280"/>
+          </a:xfrm>
+          <a:prstGeom prst="rect">
+            <a:avLst/>
+          </a:prstGeom>
+          <a:noFill/>
+          <a:ln/>
+        </p:spPr>
+        <p:txBody>
+          <a:bodyPr wrap="square" lIns="0" tIns="0" rIns="0" bIns="0" rtlCol="0" anchor="t">
+            <a:normAutofit/>
+          </a:bodyPr>
+          <a:lstStyle/>
+          <a:p>
+            <a:pPr algn="l" indent="0" marL="0">
+              <a:lnSpc>
+                <a:spcPts val="3220"/>
+              </a:lnSpc>
+              <a:buNone/>
+            </a:pPr>
+            <a:r>
+              <a:rPr lang="en-US" sz="2800" b="1" i="0" dirty="0">
+                <a:solidFill>
+                  <a:srgbClr val="0F2A29"/>
+                </a:solidFill>
+                <a:latin typeface="Kanit" pitchFamily="34" charset="0"/>
+                <a:ea typeface="Kanit" pitchFamily="34" charset="-122"/>
+                <a:cs typeface="Kanit" pitchFamily="34" charset="-120"/>
+              </a:rPr>
+              <a:t>ข้อจำกัดที่ทราบแล้ว (ตกลงกับผู้ใช้งานไว้แล้ว)</a:t>
+            </a:r>
+            <a:endParaRPr lang="en-US" sz="2800" dirty="0"/>
+          </a:p>
+        </p:txBody>
+      </p:sp>
+      <p:sp>
+        <p:nvSpPr>
+          <p:cNvPr id="4" name="Shape 2"/>
+          <p:cNvSpPr/>
+          <p:nvPr/>
+        </p:nvSpPr>
+        <p:spPr>
+          <a:xfrm>
             <a:off x="609600" y="1516261"/>
-            <a:ext cx="10972800" cy="2772073"/>
+            <a:ext cx="10972800" cy="2967633"/>
           </a:xfrm>
           <a:custGeom>
             <a:avLst/>
@@ -11825,7 +12862,7 @@
             <a:cxnLst/>
             <a:rect l="l" t="t" r="r" b="b"/>
             <a:pathLst>
-              <a:path w="10972800" h="2772073">
+              <a:path w="10972800" h="2967633">
                 <a:moveTo>
                   <a:pt x="10896600" y="0"/>
                 </a:moveTo>
@@ -11834,19 +12871,19 @@
                 </a:lnTo>
                 <a:arcTo hR="76200" wR="76200" stAng="16200000" swAng="5400000"/>
                 <a:lnTo>
-                  <a:pt x="10972800" y="2695873"/>
+                  <a:pt x="10972800" y="2891433"/>
                 </a:lnTo>
                 <a:arcTo hR="76200" wR="76200" stAng="0" swAng="5400000"/>
                 <a:lnTo>
-                  <a:pt x="76200" y="2772073"/>
+                  <a:pt x="76200" y="2967633"/>
                 </a:lnTo>
                 <a:arcTo hR="76200" wR="76200" stAng="5400000" swAng="5400000"/>
                 <a:lnTo>
-                  <a:pt x="0" y="2695873"/>
+                  <a:pt x="0" y="2891433"/>
                 </a:lnTo>
                 <a:arcTo hR="69850" wR="76200" stAng="10800000" swAng="-5400000"/>
                 <a:lnTo>
-                  <a:pt x="10896600" y="2765723"/>
+                  <a:pt x="10896600" y="2961283"/>
                 </a:lnTo>
                 <a:arcTo hR="69850" wR="69850" stAng="5400000" swAng="-5400000"/>
                 <a:lnTo>
@@ -11872,7 +12909,7 @@
         <p:spPr>
           <a:xfrm>
             <a:off x="609600" y="1516261"/>
-            <a:ext cx="10972800" cy="2772073"/>
+            <a:ext cx="10972800" cy="2967633"/>
           </a:xfrm>
           <a:custGeom>
             <a:avLst/>
@@ -11881,12 +12918,12 @@
             <a:cxnLst/>
             <a:rect l="l" t="t" r="r" b="b"/>
             <a:pathLst>
-              <a:path w="10972800" h="2772073">
+              <a:path w="10972800" h="2967633">
                 <a:moveTo>
-                  <a:pt x="76200" y="2772073"/>
+                  <a:pt x="76200" y="2967633"/>
                 </a:moveTo>
                 <a:lnTo>
-                  <a:pt x="76200" y="2772073"/>
+                  <a:pt x="76200" y="2967633"/>
                 </a:lnTo>
                 <a:arcTo hR="76200" wR="76200" stAng="5400000" swAng="5400000"/>
                 <a:lnTo>
@@ -11906,7 +12943,7 @@
                 </a:lnTo>
                 <a:arcTo hR="63500" wR="63500" stAng="16200000" swAng="-5400000"/>
                 <a:lnTo>
-                  <a:pt x="12700" y="2695873"/>
+                  <a:pt x="12700" y="2891433"/>
                 </a:lnTo>
                 <a:arcTo hR="76200" wR="63500" stAng="10800000" swAng="-5400000"/>
                 <a:close/>
@@ -11980,16 +13017,15 @@
         </p:nvGraphicFramePr>
         <p:xfrm>
           <a:off x="622300" y="1528961"/>
-          <a:ext cx="10953750" cy="2753023"/>
+          <a:ext cx="10953750" cy="2948583"/>
         </p:xfrm>
         <a:graphic>
           <a:graphicData uri="http://schemas.openxmlformats.org/drawingml/2006/table">
             <a:tbl>
               <a:tblPr/>
               <a:tblGrid>
-                <a:gridCol w="2847975"/>
-                <a:gridCol w="6134100"/>
-                <a:gridCol w="1971675"/>
+                <a:gridCol w="3067050"/>
+                <a:gridCol w="7886700"/>
               </a:tblGrid>
               <a:tr h="305891">
                 <a:tc>
@@ -12069,68 +13105,6 @@
                           <a:cs typeface="Sarabun" pitchFamily="34" charset="-120"/>
                         </a:rPr>
                         <a:t>รายละเอียด</a:t>
-                      </a:r>
-                      <a:endParaRPr lang="en-US" sz="1100" dirty="0">
-                        <a:latin typeface="Sarabun" charset="0"/>
-                        <a:ea typeface="Sarabun" charset="0"/>
-                        <a:cs typeface="Sarabun" charset="0"/>
-                      </a:endParaRPr>
-                    </a:p>
-                  </a:txBody>
-                  <a:tcPr marL="48895" marR="48895" marT="48895" marB="48895" anchor="t">
-                    <a:lnL w="12700" cap="flat" cmpd="sng" algn="ctr">
-                      <a:solidFill>
-                        <a:srgbClr val="B6B9B8"/>
-                      </a:solidFill>
-                      <a:prstDash val="solid"/>
-                      <a:round/>
-                      <a:headEnd type="none" w="med" len="med"/>
-                      <a:tailEnd type="none" w="med" len="med"/>
-                    </a:lnL>
-                    <a:lnR w="12700" cap="flat" cmpd="sng" algn="ctr">
-                      <a:solidFill>
-                        <a:srgbClr val="B6B9B8"/>
-                      </a:solidFill>
-                      <a:prstDash val="solid"/>
-                      <a:round/>
-                      <a:headEnd type="none" w="med" len="med"/>
-                      <a:tailEnd type="none" w="med" len="med"/>
-                    </a:lnR>
-                    <a:lnT w="0" cap="flat" cmpd="sng" algn="ctr">
-                      <a:noFill/>
-                    </a:lnT>
-                    <a:lnB w="12700" cap="flat" cmpd="sng" algn="ctr">
-                      <a:solidFill>
-                        <a:srgbClr val="B6B9B8"/>
-                      </a:solidFill>
-                      <a:prstDash val="solid"/>
-                      <a:round/>
-                      <a:headEnd type="none" w="med" len="med"/>
-                      <a:tailEnd type="none" w="med" len="med"/>
-                    </a:lnB>
-                  </a:tcPr>
-                </a:tc>
-                <a:tc>
-                  <a:txBody>
-                    <a:bodyPr/>
-                    <a:lstStyle/>
-                    <a:p>
-                      <a:pPr indent="0" marL="0">
-                        <a:lnSpc>
-                          <a:spcPts val="1540"/>
-                        </a:lnSpc>
-                        <a:buNone/>
-                      </a:pPr>
-                      <a:r>
-                        <a:rPr lang="en-US" sz="1100" b="1" dirty="0">
-                          <a:solidFill>
-                            <a:srgbClr val="78350F"/>
-                          </a:solidFill>
-                          <a:latin typeface="Sarabun" pitchFamily="34" charset="0"/>
-                          <a:ea typeface="Sarabun" pitchFamily="34" charset="-122"/>
-                          <a:cs typeface="Sarabun" pitchFamily="34" charset="-120"/>
-                        </a:rPr>
-                        <a:t>Round</a:t>
                       </a:r>
                       <a:endParaRPr lang="en-US" sz="1100" dirty="0">
                         <a:latin typeface="Sarabun" charset="0"/>
@@ -12259,78 +13233,7 @@
                           <a:ea typeface="Sarabun" pitchFamily="34" charset="-122"/>
                           <a:cs typeface="Sarabun" pitchFamily="34" charset="-120"/>
                         </a:rPr>
-                        <a:t>ยังไม่ auto ส่งต่อเคสไปซ่อม/Write-off เป็นแค่ flag ให้ OPERATION ติดตามเอง</a:t>
-                      </a:r>
-                      <a:endParaRPr lang="en-US" sz="1100" dirty="0">
-                        <a:latin typeface="Sarabun" charset="0"/>
-                        <a:ea typeface="Sarabun" charset="0"/>
-                        <a:cs typeface="Sarabun" charset="0"/>
-                      </a:endParaRPr>
-                    </a:p>
-                  </a:txBody>
-                  <a:tcPr marL="48895" marR="48895" marT="48895" marB="48895" anchor="t">
-                    <a:lnL w="12700" cap="flat" cmpd="sng" algn="ctr">
-                      <a:solidFill>
-                        <a:srgbClr val="CBCBCB"/>
-                      </a:solidFill>
-                      <a:prstDash val="solid"/>
-                      <a:round/>
-                      <a:headEnd type="none" w="med" len="med"/>
-                      <a:tailEnd type="none" w="med" len="med"/>
-                    </a:lnL>
-                    <a:lnR w="12700" cap="flat" cmpd="sng" algn="ctr">
-                      <a:solidFill>
-                        <a:srgbClr val="CBCBCB"/>
-                      </a:solidFill>
-                      <a:prstDash val="solid"/>
-                      <a:round/>
-                      <a:headEnd type="none" w="med" len="med"/>
-                      <a:tailEnd type="none" w="med" len="med"/>
-                    </a:lnR>
-                    <a:lnT w="12700" cap="flat" cmpd="sng" algn="ctr">
-                      <a:solidFill>
-                        <a:srgbClr val="B6B9B8"/>
-                      </a:solidFill>
-                      <a:prstDash val="solid"/>
-                      <a:round/>
-                      <a:headEnd type="none" w="med" len="med"/>
-                      <a:tailEnd type="none" w="med" len="med"/>
-                    </a:lnT>
-                    <a:lnB w="12700" cap="flat" cmpd="sng" algn="ctr">
-                      <a:solidFill>
-                        <a:srgbClr val="CBCBCB"/>
-                      </a:solidFill>
-                      <a:prstDash val="solid"/>
-                      <a:round/>
-                      <a:headEnd type="none" w="med" len="med"/>
-                      <a:tailEnd type="none" w="med" len="med"/>
-                    </a:lnB>
-                    <a:solidFill>
-                      <a:srgbClr val="FFFFFF"/>
-                    </a:solidFill>
-                  </a:tcPr>
-                </a:tc>
-                <a:tc>
-                  <a:txBody>
-                    <a:bodyPr/>
-                    <a:lstStyle/>
-                    <a:p>
-                      <a:pPr indent="0" marL="0">
-                        <a:lnSpc>
-                          <a:spcPts val="1540"/>
-                        </a:lnSpc>
-                        <a:buNone/>
-                      </a:pPr>
-                      <a:r>
-                        <a:rPr lang="en-US" sz="1100" dirty="0">
-                          <a:solidFill>
-                            <a:srgbClr val="B45309"/>
-                          </a:solidFill>
-                          <a:latin typeface="Sarabun" pitchFamily="34" charset="0"/>
-                          <a:ea typeface="Sarabun" pitchFamily="34" charset="-122"/>
-                          <a:cs typeface="Sarabun" pitchFamily="34" charset="-120"/>
-                        </a:rPr>
-                        <a:t>Round 8</a:t>
+                        <a:t>แจ้งปัญหาตอนรับของแล้ว ระบบยังไม่ส่งเรื่องต่อไปซ่อมหรือตัดจำหน่ายให้อัตโนมัติ เป็นแค่การแจ้งเตือนให้เจ้าหน้าที่คลังติดตามเอง</a:t>
                       </a:r>
                       <a:endParaRPr lang="en-US" sz="1100" dirty="0">
                         <a:latin typeface="Sarabun" charset="0"/>
@@ -12468,7 +13371,7 @@
                           <a:ea typeface="Sarabun" pitchFamily="34" charset="-122"/>
                           <a:cs typeface="Sarabun" pitchFamily="34" charset="-120"/>
                         </a:rPr>
-                        <a:t>ยืนยัน/แจ้งปัญหาเป็นก้อนเดียวทั้งคำขอ ยังไม่แยกย่อยรายชิ้น</a:t>
+                        <a:t>ตอนนี้ต้องยืนยันหรือแจ้งปัญหาทีเดียวทั้งใบคำขอ ยังไม่รองรับกรณีได้รับของมาแค่บางส่วน</a:t>
                       </a:r>
                       <a:endParaRPr lang="en-US" sz="1100" dirty="0">
                         <a:latin typeface="Sarabun" charset="0"/>
@@ -12519,6 +13422,8 @@
                     </a:solidFill>
                   </a:tcPr>
                 </a:tc>
+              </a:tr>
+              <a:tr h="501452">
                 <a:tc>
                   <a:txBody>
                     <a:bodyPr/>
@@ -12533,13 +13438,216 @@
                       <a:r>
                         <a:rPr lang="en-US" sz="1100" dirty="0">
                           <a:solidFill>
-                            <a:srgbClr val="B45309"/>
+                            <a:srgbClr val="0F2A29"/>
                           </a:solidFill>
                           <a:latin typeface="Sarabun" pitchFamily="34" charset="0"/>
                           <a:ea typeface="Sarabun" pitchFamily="34" charset="-122"/>
                           <a:cs typeface="Sarabun" pitchFamily="34" charset="-120"/>
                         </a:rPr>
-                        <a:t>Round 8</a:t>
+                        <a:t>คำขอเบิกทดแทนอัตโนมัติ</a:t>
+                      </a:r>
+                      <a:endParaRPr lang="en-US" sz="1100" dirty="0">
+                        <a:latin typeface="Sarabun" charset="0"/>
+                        <a:ea typeface="Sarabun" charset="0"/>
+                        <a:cs typeface="Sarabun" charset="0"/>
+                      </a:endParaRPr>
+                    </a:p>
+                  </a:txBody>
+                  <a:tcPr marL="48895" marR="48895" marT="48895" marB="48895" anchor="t">
+                    <a:lnL w="0" cap="flat" cmpd="sng" algn="ctr">
+                      <a:noFill/>
+                    </a:lnL>
+                    <a:lnR w="12700" cap="flat" cmpd="sng" algn="ctr">
+                      <a:solidFill>
+                        <a:srgbClr val="CBCBCB"/>
+                      </a:solidFill>
+                      <a:prstDash val="solid"/>
+                      <a:round/>
+                      <a:headEnd type="none" w="med" len="med"/>
+                      <a:tailEnd type="none" w="med" len="med"/>
+                    </a:lnR>
+                    <a:lnT w="12700" cap="flat" cmpd="sng" algn="ctr">
+                      <a:solidFill>
+                        <a:srgbClr val="C4C7C6"/>
+                      </a:solidFill>
+                      <a:prstDash val="solid"/>
+                      <a:round/>
+                      <a:headEnd type="none" w="med" len="med"/>
+                      <a:tailEnd type="none" w="med" len="med"/>
+                    </a:lnT>
+                    <a:lnB w="12700" cap="flat" cmpd="sng" algn="ctr">
+                      <a:solidFill>
+                        <a:srgbClr val="CBCBCB"/>
+                      </a:solidFill>
+                      <a:prstDash val="solid"/>
+                      <a:round/>
+                      <a:headEnd type="none" w="med" len="med"/>
+                      <a:tailEnd type="none" w="med" len="med"/>
+                    </a:lnB>
+                    <a:solidFill>
+                      <a:srgbClr val="FFFFFF"/>
+                    </a:solidFill>
+                  </a:tcPr>
+                </a:tc>
+                <a:tc>
+                  <a:txBody>
+                    <a:bodyPr/>
+                    <a:lstStyle/>
+                    <a:p>
+                      <a:pPr indent="0" marL="0">
+                        <a:lnSpc>
+                          <a:spcPts val="1540"/>
+                        </a:lnSpc>
+                        <a:buNone/>
+                      </a:pPr>
+                      <a:r>
+                        <a:rPr lang="en-US" sz="1100" dirty="0">
+                          <a:solidFill>
+                            <a:srgbClr val="46605D"/>
+                          </a:solidFill>
+                          <a:latin typeface="Sarabun" pitchFamily="34" charset="0"/>
+                          <a:ea typeface="Sarabun" pitchFamily="34" charset="-122"/>
+                          <a:cs typeface="Sarabun" pitchFamily="34" charset="-120"/>
+                        </a:rPr>
+                        <a:t>คำขอรออุปกรณ์ใหม่จะหมดอายุเองถ้าไม่ดำเนินการใน 14 วัน หรือยกเลิกเองได้ตลอด (ตัวเลข 14 วันเป็นค่าตัวอย่าง รอยืนยันจำนวนที่เหมาะสม)</a:t>
+                      </a:r>
+                      <a:endParaRPr lang="en-US" sz="1100" dirty="0">
+                        <a:latin typeface="Sarabun" charset="0"/>
+                        <a:ea typeface="Sarabun" charset="0"/>
+                        <a:cs typeface="Sarabun" charset="0"/>
+                      </a:endParaRPr>
+                    </a:p>
+                  </a:txBody>
+                  <a:tcPr marL="48895" marR="48895" marT="48895" marB="48895" anchor="t">
+                    <a:lnL w="12700" cap="flat" cmpd="sng" algn="ctr">
+                      <a:solidFill>
+                        <a:srgbClr val="CBCBCB"/>
+                      </a:solidFill>
+                      <a:prstDash val="solid"/>
+                      <a:round/>
+                      <a:headEnd type="none" w="med" len="med"/>
+                      <a:tailEnd type="none" w="med" len="med"/>
+                    </a:lnL>
+                    <a:lnR w="12700" cap="flat" cmpd="sng" algn="ctr">
+                      <a:solidFill>
+                        <a:srgbClr val="CBCBCB"/>
+                      </a:solidFill>
+                      <a:prstDash val="solid"/>
+                      <a:round/>
+                      <a:headEnd type="none" w="med" len="med"/>
+                      <a:tailEnd type="none" w="med" len="med"/>
+                    </a:lnR>
+                    <a:lnT w="12700" cap="flat" cmpd="sng" algn="ctr">
+                      <a:solidFill>
+                        <a:srgbClr val="C4C7C6"/>
+                      </a:solidFill>
+                      <a:prstDash val="solid"/>
+                      <a:round/>
+                      <a:headEnd type="none" w="med" len="med"/>
+                      <a:tailEnd type="none" w="med" len="med"/>
+                    </a:lnT>
+                    <a:lnB w="12700" cap="flat" cmpd="sng" algn="ctr">
+                      <a:solidFill>
+                        <a:srgbClr val="CBCBCB"/>
+                      </a:solidFill>
+                      <a:prstDash val="solid"/>
+                      <a:round/>
+                      <a:headEnd type="none" w="med" len="med"/>
+                      <a:tailEnd type="none" w="med" len="med"/>
+                    </a:lnB>
+                    <a:solidFill>
+                      <a:srgbClr val="FFFFFF"/>
+                    </a:solidFill>
+                  </a:tcPr>
+                </a:tc>
+              </a:tr>
+              <a:tr h="305891">
+                <a:tc>
+                  <a:txBody>
+                    <a:bodyPr/>
+                    <a:lstStyle/>
+                    <a:p>
+                      <a:pPr indent="0" marL="0">
+                        <a:lnSpc>
+                          <a:spcPts val="1540"/>
+                        </a:lnSpc>
+                        <a:buNone/>
+                      </a:pPr>
+                      <a:r>
+                        <a:rPr lang="en-US" sz="1100" dirty="0">
+                          <a:solidFill>
+                            <a:srgbClr val="0F2A29"/>
+                          </a:solidFill>
+                          <a:latin typeface="Sarabun" pitchFamily="34" charset="0"/>
+                          <a:ea typeface="Sarabun" pitchFamily="34" charset="-122"/>
+                          <a:cs typeface="Sarabun" pitchFamily="34" charset="-120"/>
+                        </a:rPr>
+                        <a:t>รายชื่อร้านซ่อม</a:t>
+                      </a:r>
+                      <a:endParaRPr lang="en-US" sz="1100" dirty="0">
+                        <a:latin typeface="Sarabun" charset="0"/>
+                        <a:ea typeface="Sarabun" charset="0"/>
+                        <a:cs typeface="Sarabun" charset="0"/>
+                      </a:endParaRPr>
+                    </a:p>
+                  </a:txBody>
+                  <a:tcPr marL="48895" marR="48895" marT="48895" marB="48895" anchor="t">
+                    <a:lnL w="0" cap="flat" cmpd="sng" algn="ctr">
+                      <a:noFill/>
+                    </a:lnL>
+                    <a:lnR w="12700" cap="flat" cmpd="sng" algn="ctr">
+                      <a:solidFill>
+                        <a:srgbClr val="C4C7C6"/>
+                      </a:solidFill>
+                      <a:prstDash val="solid"/>
+                      <a:round/>
+                      <a:headEnd type="none" w="med" len="med"/>
+                      <a:tailEnd type="none" w="med" len="med"/>
+                    </a:lnR>
+                    <a:lnT w="12700" cap="flat" cmpd="sng" algn="ctr">
+                      <a:solidFill>
+                        <a:srgbClr val="CBCBCB"/>
+                      </a:solidFill>
+                      <a:prstDash val="solid"/>
+                      <a:round/>
+                      <a:headEnd type="none" w="med" len="med"/>
+                      <a:tailEnd type="none" w="med" len="med"/>
+                    </a:lnT>
+                    <a:lnB w="12700" cap="flat" cmpd="sng" algn="ctr">
+                      <a:solidFill>
+                        <a:srgbClr val="C4C7C6"/>
+                      </a:solidFill>
+                      <a:prstDash val="solid"/>
+                      <a:round/>
+                      <a:headEnd type="none" w="med" len="med"/>
+                      <a:tailEnd type="none" w="med" len="med"/>
+                    </a:lnB>
+                    <a:solidFill>
+                      <a:srgbClr val="F6FAF9"/>
+                    </a:solidFill>
+                  </a:tcPr>
+                </a:tc>
+                <a:tc>
+                  <a:txBody>
+                    <a:bodyPr/>
+                    <a:lstStyle/>
+                    <a:p>
+                      <a:pPr indent="0" marL="0">
+                        <a:lnSpc>
+                          <a:spcPts val="1540"/>
+                        </a:lnSpc>
+                        <a:buNone/>
+                      </a:pPr>
+                      <a:r>
+                        <a:rPr lang="en-US" sz="1100" dirty="0">
+                          <a:solidFill>
+                            <a:srgbClr val="46605D"/>
+                          </a:solidFill>
+                          <a:latin typeface="Sarabun" pitchFamily="34" charset="0"/>
+                          <a:ea typeface="Sarabun" pitchFamily="34" charset="-122"/>
+                          <a:cs typeface="Sarabun" pitchFamily="34" charset="-120"/>
+                        </a:rPr>
+                        <a:t>เลือกร้านซ่อมจากรายชื่อที่เตรียมไว้ได้แล้ว แต่ยังไม่มีหน้าจัดการเพิ่ม/แก้ไขรายชื่อร้านด้วยตัวเอง</a:t>
                       </a:r>
                       <a:endParaRPr lang="en-US" sz="1100" dirty="0">
                         <a:latin typeface="Sarabun" charset="0"/>
@@ -12612,7 +13720,7 @@
                           <a:ea typeface="Sarabun" pitchFamily="34" charset="-122"/>
                           <a:cs typeface="Sarabun" pitchFamily="34" charset="-120"/>
                         </a:rPr>
-                        <a:t>ยกเลิกร่างคำขอทดแทนอัตโนมัติ</a:t>
+                        <a:t>เปลี่ยนร้านซ่อมระหว่างทาง</a:t>
                       </a:r>
                       <a:endParaRPr lang="en-US" sz="1100" dirty="0">
                         <a:latin typeface="Sarabun" charset="0"/>
@@ -12677,78 +13785,7 @@
                           <a:ea typeface="Sarabun" pitchFamily="34" charset="-122"/>
                           <a:cs typeface="Sarabun" pitchFamily="34" charset="-120"/>
                         </a:rPr>
-                        <a:t>หมดอายุ 14 วัน หรือยกเลิกเองได้ แต่ตัวเลข 14 วันยังรอ user confirm</a:t>
-                      </a:r>
-                      <a:endParaRPr lang="en-US" sz="1100" dirty="0">
-                        <a:latin typeface="Sarabun" charset="0"/>
-                        <a:ea typeface="Sarabun" charset="0"/>
-                        <a:cs typeface="Sarabun" charset="0"/>
-                      </a:endParaRPr>
-                    </a:p>
-                  </a:txBody>
-                  <a:tcPr marL="48895" marR="48895" marT="48895" marB="48895" anchor="t">
-                    <a:lnL w="12700" cap="flat" cmpd="sng" algn="ctr">
-                      <a:solidFill>
-                        <a:srgbClr val="CBCBCB"/>
-                      </a:solidFill>
-                      <a:prstDash val="solid"/>
-                      <a:round/>
-                      <a:headEnd type="none" w="med" len="med"/>
-                      <a:tailEnd type="none" w="med" len="med"/>
-                    </a:lnL>
-                    <a:lnR w="12700" cap="flat" cmpd="sng" algn="ctr">
-                      <a:solidFill>
-                        <a:srgbClr val="CBCBCB"/>
-                      </a:solidFill>
-                      <a:prstDash val="solid"/>
-                      <a:round/>
-                      <a:headEnd type="none" w="med" len="med"/>
-                      <a:tailEnd type="none" w="med" len="med"/>
-                    </a:lnR>
-                    <a:lnT w="12700" cap="flat" cmpd="sng" algn="ctr">
-                      <a:solidFill>
-                        <a:srgbClr val="C4C7C6"/>
-                      </a:solidFill>
-                      <a:prstDash val="solid"/>
-                      <a:round/>
-                      <a:headEnd type="none" w="med" len="med"/>
-                      <a:tailEnd type="none" w="med" len="med"/>
-                    </a:lnT>
-                    <a:lnB w="12700" cap="flat" cmpd="sng" algn="ctr">
-                      <a:solidFill>
-                        <a:srgbClr val="CBCBCB"/>
-                      </a:solidFill>
-                      <a:prstDash val="solid"/>
-                      <a:round/>
-                      <a:headEnd type="none" w="med" len="med"/>
-                      <a:tailEnd type="none" w="med" len="med"/>
-                    </a:lnB>
-                    <a:solidFill>
-                      <a:srgbClr val="FFFFFF"/>
-                    </a:solidFill>
-                  </a:tcPr>
-                </a:tc>
-                <a:tc>
-                  <a:txBody>
-                    <a:bodyPr/>
-                    <a:lstStyle/>
-                    <a:p>
-                      <a:pPr indent="0" marL="0">
-                        <a:lnSpc>
-                          <a:spcPts val="1540"/>
-                        </a:lnSpc>
-                        <a:buNone/>
-                      </a:pPr>
-                      <a:r>
-                        <a:rPr lang="en-US" sz="1100" dirty="0">
-                          <a:solidFill>
-                            <a:srgbClr val="B45309"/>
-                          </a:solidFill>
-                          <a:latin typeface="Sarabun" pitchFamily="34" charset="0"/>
-                          <a:ea typeface="Sarabun" pitchFamily="34" charset="-122"/>
-                          <a:cs typeface="Sarabun" pitchFamily="34" charset="-120"/>
-                        </a:rPr>
-                        <a:t>Round 9–10</a:t>
+                        <a:t>ยังไม่รองรับการเปลี่ยนร้านซ่อม หรือยกเลิกการส่งซ่อมหลังจากส่งไปแล้ว</a:t>
                       </a:r>
                       <a:endParaRPr lang="en-US" sz="1100" dirty="0">
                         <a:latin typeface="Sarabun" charset="0"/>
@@ -12821,7 +13858,7 @@
                           <a:ea typeface="Sarabun" pitchFamily="34" charset="-122"/>
                           <a:cs typeface="Sarabun" pitchFamily="34" charset="-120"/>
                         </a:rPr>
-                        <a:t>รายชื่อ Vendor ซ่อม</a:t>
+                        <a:t>การแยกคำขอรายบุคคล</a:t>
                       </a:r>
                       <a:endParaRPr lang="en-US" sz="1100" dirty="0">
                         <a:latin typeface="Sarabun" charset="0"/>
@@ -12886,78 +13923,7 @@
                           <a:ea typeface="Sarabun" pitchFamily="34" charset="-122"/>
                           <a:cs typeface="Sarabun" pitchFamily="34" charset="-120"/>
                         </a:rPr>
-                        <a:t>เปลี่ยนเป็น dropdown แล้ว แต่ยังไม่มีหน้าจัดการรายชื่อ (CRUD)</a:t>
-                      </a:r>
-                      <a:endParaRPr lang="en-US" sz="1100" dirty="0">
-                        <a:latin typeface="Sarabun" charset="0"/>
-                        <a:ea typeface="Sarabun" charset="0"/>
-                        <a:cs typeface="Sarabun" charset="0"/>
-                      </a:endParaRPr>
-                    </a:p>
-                  </a:txBody>
-                  <a:tcPr marL="48895" marR="48895" marT="48895" marB="48895" anchor="t">
-                    <a:lnL w="12700" cap="flat" cmpd="sng" algn="ctr">
-                      <a:solidFill>
-                        <a:srgbClr val="C4C7C6"/>
-                      </a:solidFill>
-                      <a:prstDash val="solid"/>
-                      <a:round/>
-                      <a:headEnd type="none" w="med" len="med"/>
-                      <a:tailEnd type="none" w="med" len="med"/>
-                    </a:lnL>
-                    <a:lnR w="12700" cap="flat" cmpd="sng" algn="ctr">
-                      <a:solidFill>
-                        <a:srgbClr val="C4C7C6"/>
-                      </a:solidFill>
-                      <a:prstDash val="solid"/>
-                      <a:round/>
-                      <a:headEnd type="none" w="med" len="med"/>
-                      <a:tailEnd type="none" w="med" len="med"/>
-                    </a:lnR>
-                    <a:lnT w="12700" cap="flat" cmpd="sng" algn="ctr">
-                      <a:solidFill>
-                        <a:srgbClr val="CBCBCB"/>
-                      </a:solidFill>
-                      <a:prstDash val="solid"/>
-                      <a:round/>
-                      <a:headEnd type="none" w="med" len="med"/>
-                      <a:tailEnd type="none" w="med" len="med"/>
-                    </a:lnT>
-                    <a:lnB w="12700" cap="flat" cmpd="sng" algn="ctr">
-                      <a:solidFill>
-                        <a:srgbClr val="C4C7C6"/>
-                      </a:solidFill>
-                      <a:prstDash val="solid"/>
-                      <a:round/>
-                      <a:headEnd type="none" w="med" len="med"/>
-                      <a:tailEnd type="none" w="med" len="med"/>
-                    </a:lnB>
-                    <a:solidFill>
-                      <a:srgbClr val="F6FAF9"/>
-                    </a:solidFill>
-                  </a:tcPr>
-                </a:tc>
-                <a:tc>
-                  <a:txBody>
-                    <a:bodyPr/>
-                    <a:lstStyle/>
-                    <a:p>
-                      <a:pPr indent="0" marL="0">
-                        <a:lnSpc>
-                          <a:spcPts val="1540"/>
-                        </a:lnSpc>
-                        <a:buNone/>
-                      </a:pPr>
-                      <a:r>
-                        <a:rPr lang="en-US" sz="1100" dirty="0">
-                          <a:solidFill>
-                            <a:srgbClr val="B45309"/>
-                          </a:solidFill>
-                          <a:latin typeface="Sarabun" pitchFamily="34" charset="0"/>
-                          <a:ea typeface="Sarabun" pitchFamily="34" charset="-122"/>
-                          <a:cs typeface="Sarabun" pitchFamily="34" charset="-120"/>
-                        </a:rPr>
-                        <a:t>Round 10</a:t>
+                        <a:t>ตอนนี้ทุกคนที่เข้าใช้งานในบทบาทผู้ขอเบิกจะเห็นคำขอทั้งหมดร่วมกัน ยังไม่ได้แยกให้เห็นเฉพาะคำขอของตัวเอง</a:t>
                       </a:r>
                       <a:endParaRPr lang="en-US" sz="1100" dirty="0">
                         <a:latin typeface="Sarabun" charset="0"/>
@@ -13030,7 +13996,7 @@
                           <a:ea typeface="Sarabun" pitchFamily="34" charset="-122"/>
                           <a:cs typeface="Sarabun" pitchFamily="34" charset="-120"/>
                         </a:rPr>
-                        <a:t>เปลี่ยน Vendor ระหว่างทาง</a:t>
+                        <a:t>ข้อมูลจังหวัด</a:t>
                       </a:r>
                       <a:endParaRPr lang="en-US" sz="1100" dirty="0">
                         <a:latin typeface="Sarabun" charset="0"/>
@@ -13095,78 +14061,7 @@
                           <a:ea typeface="Sarabun" pitchFamily="34" charset="-122"/>
                           <a:cs typeface="Sarabun" pitchFamily="34" charset="-120"/>
                         </a:rPr>
-                        <a:t>ยังไม่รองรับเปลี่ยน/ยกเลิกการส่งซ่อมกลางคัน</a:t>
-                      </a:r>
-                      <a:endParaRPr lang="en-US" sz="1100" dirty="0">
-                        <a:latin typeface="Sarabun" charset="0"/>
-                        <a:ea typeface="Sarabun" charset="0"/>
-                        <a:cs typeface="Sarabun" charset="0"/>
-                      </a:endParaRPr>
-                    </a:p>
-                  </a:txBody>
-                  <a:tcPr marL="48895" marR="48895" marT="48895" marB="48895" anchor="t">
-                    <a:lnL w="12700" cap="flat" cmpd="sng" algn="ctr">
-                      <a:solidFill>
-                        <a:srgbClr val="CBCBCB"/>
-                      </a:solidFill>
-                      <a:prstDash val="solid"/>
-                      <a:round/>
-                      <a:headEnd type="none" w="med" len="med"/>
-                      <a:tailEnd type="none" w="med" len="med"/>
-                    </a:lnL>
-                    <a:lnR w="12700" cap="flat" cmpd="sng" algn="ctr">
-                      <a:solidFill>
-                        <a:srgbClr val="CBCBCB"/>
-                      </a:solidFill>
-                      <a:prstDash val="solid"/>
-                      <a:round/>
-                      <a:headEnd type="none" w="med" len="med"/>
-                      <a:tailEnd type="none" w="med" len="med"/>
-                    </a:lnR>
-                    <a:lnT w="12700" cap="flat" cmpd="sng" algn="ctr">
-                      <a:solidFill>
-                        <a:srgbClr val="C4C7C6"/>
-                      </a:solidFill>
-                      <a:prstDash val="solid"/>
-                      <a:round/>
-                      <a:headEnd type="none" w="med" len="med"/>
-                      <a:tailEnd type="none" w="med" len="med"/>
-                    </a:lnT>
-                    <a:lnB w="12700" cap="flat" cmpd="sng" algn="ctr">
-                      <a:solidFill>
-                        <a:srgbClr val="CBCBCB"/>
-                      </a:solidFill>
-                      <a:prstDash val="solid"/>
-                      <a:round/>
-                      <a:headEnd type="none" w="med" len="med"/>
-                      <a:tailEnd type="none" w="med" len="med"/>
-                    </a:lnB>
-                    <a:solidFill>
-                      <a:srgbClr val="FFFFFF"/>
-                    </a:solidFill>
-                  </a:tcPr>
-                </a:tc>
-                <a:tc>
-                  <a:txBody>
-                    <a:bodyPr/>
-                    <a:lstStyle/>
-                    <a:p>
-                      <a:pPr indent="0" marL="0">
-                        <a:lnSpc>
-                          <a:spcPts val="1540"/>
-                        </a:lnSpc>
-                        <a:buNone/>
-                      </a:pPr>
-                      <a:r>
-                        <a:rPr lang="en-US" sz="1100" dirty="0">
-                          <a:solidFill>
-                            <a:srgbClr val="B45309"/>
-                          </a:solidFill>
-                          <a:latin typeface="Sarabun" pitchFamily="34" charset="0"/>
-                          <a:ea typeface="Sarabun" pitchFamily="34" charset="-122"/>
-                          <a:cs typeface="Sarabun" pitchFamily="34" charset="-120"/>
-                        </a:rPr>
-                        <a:t>Round 9–10</a:t>
+                        <a:t>ยังไม่มีช่องระบุจังหวัดแยกต่างหาก ตอนนี้ใช้การค้นหาจากชื่อโครงการ/ลูกค้าแทนไปก่อน</a:t>
                       </a:r>
                       <a:endParaRPr lang="en-US" sz="1100" dirty="0">
                         <a:latin typeface="Sarabun" charset="0"/>
@@ -13239,7 +14134,7 @@
                           <a:ea typeface="Sarabun" pitchFamily="34" charset="-122"/>
                           <a:cs typeface="Sarabun" pitchFamily="34" charset="-120"/>
                         </a:rPr>
-                        <a:t>กรองตามตัวตนผู้ขอเบิก</a:t>
+                        <a:t>นำเข้าข้อมูลจำนวนมาก</a:t>
                       </a:r>
                       <a:endParaRPr lang="en-US" sz="1100" dirty="0">
                         <a:latin typeface="Sarabun" charset="0"/>
@@ -13304,496 +14199,7 @@
                           <a:ea typeface="Sarabun" pitchFamily="34" charset="-122"/>
                           <a:cs typeface="Sarabun" pitchFamily="34" charset="-120"/>
                         </a:rPr>
-                        <a:t>ยังไม่จำลอง login รายบุคคล ทุกคนเห็นคำขอทั้งหมดร่วมกัน</a:t>
-                      </a:r>
-                      <a:endParaRPr lang="en-US" sz="1100" dirty="0">
-                        <a:latin typeface="Sarabun" charset="0"/>
-                        <a:ea typeface="Sarabun" charset="0"/>
-                        <a:cs typeface="Sarabun" charset="0"/>
-                      </a:endParaRPr>
-                    </a:p>
-                  </a:txBody>
-                  <a:tcPr marL="48895" marR="48895" marT="48895" marB="48895" anchor="t">
-                    <a:lnL w="12700" cap="flat" cmpd="sng" algn="ctr">
-                      <a:solidFill>
-                        <a:srgbClr val="C4C7C6"/>
-                      </a:solidFill>
-                      <a:prstDash val="solid"/>
-                      <a:round/>
-                      <a:headEnd type="none" w="med" len="med"/>
-                      <a:tailEnd type="none" w="med" len="med"/>
-                    </a:lnL>
-                    <a:lnR w="12700" cap="flat" cmpd="sng" algn="ctr">
-                      <a:solidFill>
-                        <a:srgbClr val="C4C7C6"/>
-                      </a:solidFill>
-                      <a:prstDash val="solid"/>
-                      <a:round/>
-                      <a:headEnd type="none" w="med" len="med"/>
-                      <a:tailEnd type="none" w="med" len="med"/>
-                    </a:lnR>
-                    <a:lnT w="12700" cap="flat" cmpd="sng" algn="ctr">
-                      <a:solidFill>
-                        <a:srgbClr val="CBCBCB"/>
-                      </a:solidFill>
-                      <a:prstDash val="solid"/>
-                      <a:round/>
-                      <a:headEnd type="none" w="med" len="med"/>
-                      <a:tailEnd type="none" w="med" len="med"/>
-                    </a:lnT>
-                    <a:lnB w="12700" cap="flat" cmpd="sng" algn="ctr">
-                      <a:solidFill>
-                        <a:srgbClr val="C4C7C6"/>
-                      </a:solidFill>
-                      <a:prstDash val="solid"/>
-                      <a:round/>
-                      <a:headEnd type="none" w="med" len="med"/>
-                      <a:tailEnd type="none" w="med" len="med"/>
-                    </a:lnB>
-                    <a:solidFill>
-                      <a:srgbClr val="F6FAF9"/>
-                    </a:solidFill>
-                  </a:tcPr>
-                </a:tc>
-                <a:tc>
-                  <a:txBody>
-                    <a:bodyPr/>
-                    <a:lstStyle/>
-                    <a:p>
-                      <a:pPr indent="0" marL="0">
-                        <a:lnSpc>
-                          <a:spcPts val="1540"/>
-                        </a:lnSpc>
-                        <a:buNone/>
-                      </a:pPr>
-                      <a:r>
-                        <a:rPr lang="en-US" sz="1100" dirty="0">
-                          <a:solidFill>
-                            <a:srgbClr val="B45309"/>
-                          </a:solidFill>
-                          <a:latin typeface="Sarabun" pitchFamily="34" charset="0"/>
-                          <a:ea typeface="Sarabun" pitchFamily="34" charset="-122"/>
-                          <a:cs typeface="Sarabun" pitchFamily="34" charset="-120"/>
-                        </a:rPr>
-                        <a:t>Round 11 (ใหม่)</a:t>
-                      </a:r>
-                      <a:endParaRPr lang="en-US" sz="1100" dirty="0">
-                        <a:latin typeface="Sarabun" charset="0"/>
-                        <a:ea typeface="Sarabun" charset="0"/>
-                        <a:cs typeface="Sarabun" charset="0"/>
-                      </a:endParaRPr>
-                    </a:p>
-                  </a:txBody>
-                  <a:tcPr marL="48895" marR="48895" marT="48895" marB="48895" anchor="t">
-                    <a:lnL w="12700" cap="flat" cmpd="sng" algn="ctr">
-                      <a:solidFill>
-                        <a:srgbClr val="C4C7C6"/>
-                      </a:solidFill>
-                      <a:prstDash val="solid"/>
-                      <a:round/>
-                      <a:headEnd type="none" w="med" len="med"/>
-                      <a:tailEnd type="none" w="med" len="med"/>
-                    </a:lnL>
-                    <a:lnR w="12700" cap="flat" cmpd="sng" algn="ctr">
-                      <a:solidFill>
-                        <a:srgbClr val="C4C7C6"/>
-                      </a:solidFill>
-                      <a:prstDash val="solid"/>
-                      <a:round/>
-                      <a:headEnd type="none" w="med" len="med"/>
-                      <a:tailEnd type="none" w="med" len="med"/>
-                    </a:lnR>
-                    <a:lnT w="12700" cap="flat" cmpd="sng" algn="ctr">
-                      <a:solidFill>
-                        <a:srgbClr val="CBCBCB"/>
-                      </a:solidFill>
-                      <a:prstDash val="solid"/>
-                      <a:round/>
-                      <a:headEnd type="none" w="med" len="med"/>
-                      <a:tailEnd type="none" w="med" len="med"/>
-                    </a:lnT>
-                    <a:lnB w="12700" cap="flat" cmpd="sng" algn="ctr">
-                      <a:solidFill>
-                        <a:srgbClr val="C4C7C6"/>
-                      </a:solidFill>
-                      <a:prstDash val="solid"/>
-                      <a:round/>
-                      <a:headEnd type="none" w="med" len="med"/>
-                      <a:tailEnd type="none" w="med" len="med"/>
-                    </a:lnB>
-                    <a:solidFill>
-                      <a:srgbClr val="F6FAF9"/>
-                    </a:solidFill>
-                  </a:tcPr>
-                </a:tc>
-              </a:tr>
-              <a:tr h="305891">
-                <a:tc>
-                  <a:txBody>
-                    <a:bodyPr/>
-                    <a:lstStyle/>
-                    <a:p>
-                      <a:pPr indent="0" marL="0">
-                        <a:lnSpc>
-                          <a:spcPts val="1540"/>
-                        </a:lnSpc>
-                        <a:buNone/>
-                      </a:pPr>
-                      <a:r>
-                        <a:rPr lang="en-US" sz="1100" dirty="0">
-                          <a:solidFill>
-                            <a:srgbClr val="0F2A29"/>
-                          </a:solidFill>
-                          <a:latin typeface="Sarabun" pitchFamily="34" charset="0"/>
-                          <a:ea typeface="Sarabun" pitchFamily="34" charset="-122"/>
-                          <a:cs typeface="Sarabun" pitchFamily="34" charset="-120"/>
-                        </a:rPr>
-                        <a:t>ฟิลด์ “จังหวัด”</a:t>
-                      </a:r>
-                      <a:endParaRPr lang="en-US" sz="1100" dirty="0">
-                        <a:latin typeface="Sarabun" charset="0"/>
-                        <a:ea typeface="Sarabun" charset="0"/>
-                        <a:cs typeface="Sarabun" charset="0"/>
-                      </a:endParaRPr>
-                    </a:p>
-                  </a:txBody>
-                  <a:tcPr marL="48895" marR="48895" marT="48895" marB="48895" anchor="t">
-                    <a:lnL w="0" cap="flat" cmpd="sng" algn="ctr">
-                      <a:noFill/>
-                    </a:lnL>
-                    <a:lnR w="12700" cap="flat" cmpd="sng" algn="ctr">
-                      <a:solidFill>
-                        <a:srgbClr val="CBCBCB"/>
-                      </a:solidFill>
-                      <a:prstDash val="solid"/>
-                      <a:round/>
-                      <a:headEnd type="none" w="med" len="med"/>
-                      <a:tailEnd type="none" w="med" len="med"/>
-                    </a:lnR>
-                    <a:lnT w="12700" cap="flat" cmpd="sng" algn="ctr">
-                      <a:solidFill>
-                        <a:srgbClr val="C4C7C6"/>
-                      </a:solidFill>
-                      <a:prstDash val="solid"/>
-                      <a:round/>
-                      <a:headEnd type="none" w="med" len="med"/>
-                      <a:tailEnd type="none" w="med" len="med"/>
-                    </a:lnT>
-                    <a:lnB w="12700" cap="flat" cmpd="sng" algn="ctr">
-                      <a:solidFill>
-                        <a:srgbClr val="CBCBCB"/>
-                      </a:solidFill>
-                      <a:prstDash val="solid"/>
-                      <a:round/>
-                      <a:headEnd type="none" w="med" len="med"/>
-                      <a:tailEnd type="none" w="med" len="med"/>
-                    </a:lnB>
-                    <a:solidFill>
-                      <a:srgbClr val="FFFFFF"/>
-                    </a:solidFill>
-                  </a:tcPr>
-                </a:tc>
-                <a:tc>
-                  <a:txBody>
-                    <a:bodyPr/>
-                    <a:lstStyle/>
-                    <a:p>
-                      <a:pPr indent="0" marL="0">
-                        <a:lnSpc>
-                          <a:spcPts val="1540"/>
-                        </a:lnSpc>
-                        <a:buNone/>
-                      </a:pPr>
-                      <a:r>
-                        <a:rPr lang="en-US" sz="1100" dirty="0">
-                          <a:solidFill>
-                            <a:srgbClr val="46605D"/>
-                          </a:solidFill>
-                          <a:latin typeface="Sarabun" pitchFamily="34" charset="0"/>
-                          <a:ea typeface="Sarabun" pitchFamily="34" charset="-122"/>
-                          <a:cs typeface="Sarabun" pitchFamily="34" charset="-120"/>
-                        </a:rPr>
-                        <a:t>ยังไม่มีแยกต่างหาก ใช้ค้นหาจากข้อความ “โครงการ/ลูกค้า” แทน</a:t>
-                      </a:r>
-                      <a:endParaRPr lang="en-US" sz="1100" dirty="0">
-                        <a:latin typeface="Sarabun" charset="0"/>
-                        <a:ea typeface="Sarabun" charset="0"/>
-                        <a:cs typeface="Sarabun" charset="0"/>
-                      </a:endParaRPr>
-                    </a:p>
-                  </a:txBody>
-                  <a:tcPr marL="48895" marR="48895" marT="48895" marB="48895" anchor="t">
-                    <a:lnL w="12700" cap="flat" cmpd="sng" algn="ctr">
-                      <a:solidFill>
-                        <a:srgbClr val="CBCBCB"/>
-                      </a:solidFill>
-                      <a:prstDash val="solid"/>
-                      <a:round/>
-                      <a:headEnd type="none" w="med" len="med"/>
-                      <a:tailEnd type="none" w="med" len="med"/>
-                    </a:lnL>
-                    <a:lnR w="12700" cap="flat" cmpd="sng" algn="ctr">
-                      <a:solidFill>
-                        <a:srgbClr val="CBCBCB"/>
-                      </a:solidFill>
-                      <a:prstDash val="solid"/>
-                      <a:round/>
-                      <a:headEnd type="none" w="med" len="med"/>
-                      <a:tailEnd type="none" w="med" len="med"/>
-                    </a:lnR>
-                    <a:lnT w="12700" cap="flat" cmpd="sng" algn="ctr">
-                      <a:solidFill>
-                        <a:srgbClr val="C4C7C6"/>
-                      </a:solidFill>
-                      <a:prstDash val="solid"/>
-                      <a:round/>
-                      <a:headEnd type="none" w="med" len="med"/>
-                      <a:tailEnd type="none" w="med" len="med"/>
-                    </a:lnT>
-                    <a:lnB w="12700" cap="flat" cmpd="sng" algn="ctr">
-                      <a:solidFill>
-                        <a:srgbClr val="CBCBCB"/>
-                      </a:solidFill>
-                      <a:prstDash val="solid"/>
-                      <a:round/>
-                      <a:headEnd type="none" w="med" len="med"/>
-                      <a:tailEnd type="none" w="med" len="med"/>
-                    </a:lnB>
-                    <a:solidFill>
-                      <a:srgbClr val="FFFFFF"/>
-                    </a:solidFill>
-                  </a:tcPr>
-                </a:tc>
-                <a:tc>
-                  <a:txBody>
-                    <a:bodyPr/>
-                    <a:lstStyle/>
-                    <a:p>
-                      <a:pPr indent="0" marL="0">
-                        <a:lnSpc>
-                          <a:spcPts val="1540"/>
-                        </a:lnSpc>
-                        <a:buNone/>
-                      </a:pPr>
-                      <a:r>
-                        <a:rPr lang="en-US" sz="1100" dirty="0">
-                          <a:solidFill>
-                            <a:srgbClr val="B45309"/>
-                          </a:solidFill>
-                          <a:latin typeface="Sarabun" pitchFamily="34" charset="0"/>
-                          <a:ea typeface="Sarabun" pitchFamily="34" charset="-122"/>
-                          <a:cs typeface="Sarabun" pitchFamily="34" charset="-120"/>
-                        </a:rPr>
-                        <a:t>Round 11 (ใหม่)</a:t>
-                      </a:r>
-                      <a:endParaRPr lang="en-US" sz="1100" dirty="0">
-                        <a:latin typeface="Sarabun" charset="0"/>
-                        <a:ea typeface="Sarabun" charset="0"/>
-                        <a:cs typeface="Sarabun" charset="0"/>
-                      </a:endParaRPr>
-                    </a:p>
-                  </a:txBody>
-                  <a:tcPr marL="48895" marR="48895" marT="48895" marB="48895" anchor="t">
-                    <a:lnL w="12700" cap="flat" cmpd="sng" algn="ctr">
-                      <a:solidFill>
-                        <a:srgbClr val="CBCBCB"/>
-                      </a:solidFill>
-                      <a:prstDash val="solid"/>
-                      <a:round/>
-                      <a:headEnd type="none" w="med" len="med"/>
-                      <a:tailEnd type="none" w="med" len="med"/>
-                    </a:lnL>
-                    <a:lnR w="12700" cap="flat" cmpd="sng" algn="ctr">
-                      <a:solidFill>
-                        <a:srgbClr val="CBCBCB"/>
-                      </a:solidFill>
-                      <a:prstDash val="solid"/>
-                      <a:round/>
-                      <a:headEnd type="none" w="med" len="med"/>
-                      <a:tailEnd type="none" w="med" len="med"/>
-                    </a:lnR>
-                    <a:lnT w="12700" cap="flat" cmpd="sng" algn="ctr">
-                      <a:solidFill>
-                        <a:srgbClr val="C4C7C6"/>
-                      </a:solidFill>
-                      <a:prstDash val="solid"/>
-                      <a:round/>
-                      <a:headEnd type="none" w="med" len="med"/>
-                      <a:tailEnd type="none" w="med" len="med"/>
-                    </a:lnT>
-                    <a:lnB w="12700" cap="flat" cmpd="sng" algn="ctr">
-                      <a:solidFill>
-                        <a:srgbClr val="CBCBCB"/>
-                      </a:solidFill>
-                      <a:prstDash val="solid"/>
-                      <a:round/>
-                      <a:headEnd type="none" w="med" len="med"/>
-                      <a:tailEnd type="none" w="med" len="med"/>
-                    </a:lnB>
-                    <a:solidFill>
-                      <a:srgbClr val="FFFFFF"/>
-                    </a:solidFill>
-                  </a:tcPr>
-                </a:tc>
-              </a:tr>
-              <a:tr h="305891">
-                <a:tc>
-                  <a:txBody>
-                    <a:bodyPr/>
-                    <a:lstStyle/>
-                    <a:p>
-                      <a:pPr indent="0" marL="0">
-                        <a:lnSpc>
-                          <a:spcPts val="1540"/>
-                        </a:lnSpc>
-                        <a:buNone/>
-                      </a:pPr>
-                      <a:r>
-                        <a:rPr lang="en-US" sz="1100" dirty="0">
-                          <a:solidFill>
-                            <a:srgbClr val="0F2A29"/>
-                          </a:solidFill>
-                          <a:latin typeface="Sarabun" pitchFamily="34" charset="0"/>
-                          <a:ea typeface="Sarabun" pitchFamily="34" charset="-122"/>
-                          <a:cs typeface="Sarabun" pitchFamily="34" charset="-120"/>
-                        </a:rPr>
-                        <a:t>นำเข้า Excel จริง</a:t>
-                      </a:r>
-                      <a:endParaRPr lang="en-US" sz="1100" dirty="0">
-                        <a:latin typeface="Sarabun" charset="0"/>
-                        <a:ea typeface="Sarabun" charset="0"/>
-                        <a:cs typeface="Sarabun" charset="0"/>
-                      </a:endParaRPr>
-                    </a:p>
-                  </a:txBody>
-                  <a:tcPr marL="48895" marR="48895" marT="48895" marB="48895" anchor="t">
-                    <a:lnL w="0" cap="flat" cmpd="sng" algn="ctr">
-                      <a:noFill/>
-                    </a:lnL>
-                    <a:lnR w="12700" cap="flat" cmpd="sng" algn="ctr">
-                      <a:solidFill>
-                        <a:srgbClr val="C4C7C6"/>
-                      </a:solidFill>
-                      <a:prstDash val="solid"/>
-                      <a:round/>
-                      <a:headEnd type="none" w="med" len="med"/>
-                      <a:tailEnd type="none" w="med" len="med"/>
-                    </a:lnR>
-                    <a:lnT w="12700" cap="flat" cmpd="sng" algn="ctr">
-                      <a:solidFill>
-                        <a:srgbClr val="CBCBCB"/>
-                      </a:solidFill>
-                      <a:prstDash val="solid"/>
-                      <a:round/>
-                      <a:headEnd type="none" w="med" len="med"/>
-                      <a:tailEnd type="none" w="med" len="med"/>
-                    </a:lnT>
-                    <a:lnB w="12700" cap="flat" cmpd="sng" algn="ctr">
-                      <a:solidFill>
-                        <a:srgbClr val="C4C7C6"/>
-                      </a:solidFill>
-                      <a:prstDash val="solid"/>
-                      <a:round/>
-                      <a:headEnd type="none" w="med" len="med"/>
-                      <a:tailEnd type="none" w="med" len="med"/>
-                    </a:lnB>
-                    <a:solidFill>
-                      <a:srgbClr val="F6FAF9"/>
-                    </a:solidFill>
-                  </a:tcPr>
-                </a:tc>
-                <a:tc>
-                  <a:txBody>
-                    <a:bodyPr/>
-                    <a:lstStyle/>
-                    <a:p>
-                      <a:pPr indent="0" marL="0">
-                        <a:lnSpc>
-                          <a:spcPts val="1540"/>
-                        </a:lnSpc>
-                        <a:buNone/>
-                      </a:pPr>
-                      <a:r>
-                        <a:rPr lang="en-US" sz="1100" dirty="0">
-                          <a:solidFill>
-                            <a:srgbClr val="46605D"/>
-                          </a:solidFill>
-                          <a:latin typeface="Sarabun" pitchFamily="34" charset="0"/>
-                          <a:ea typeface="Sarabun" pitchFamily="34" charset="-122"/>
-                          <a:cs typeface="Sarabun" pitchFamily="34" charset="-120"/>
-                        </a:rPr>
-                        <a:t>รับของเข้าคลังแบบ bulk จำลองด้วยปุ่ม demo ยังไม่ parse ไฟล์จริง</a:t>
-                      </a:r>
-                      <a:endParaRPr lang="en-US" sz="1100" dirty="0">
-                        <a:latin typeface="Sarabun" charset="0"/>
-                        <a:ea typeface="Sarabun" charset="0"/>
-                        <a:cs typeface="Sarabun" charset="0"/>
-                      </a:endParaRPr>
-                    </a:p>
-                  </a:txBody>
-                  <a:tcPr marL="48895" marR="48895" marT="48895" marB="48895" anchor="t">
-                    <a:lnL w="12700" cap="flat" cmpd="sng" algn="ctr">
-                      <a:solidFill>
-                        <a:srgbClr val="C4C7C6"/>
-                      </a:solidFill>
-                      <a:prstDash val="solid"/>
-                      <a:round/>
-                      <a:headEnd type="none" w="med" len="med"/>
-                      <a:tailEnd type="none" w="med" len="med"/>
-                    </a:lnL>
-                    <a:lnR w="12700" cap="flat" cmpd="sng" algn="ctr">
-                      <a:solidFill>
-                        <a:srgbClr val="C4C7C6"/>
-                      </a:solidFill>
-                      <a:prstDash val="solid"/>
-                      <a:round/>
-                      <a:headEnd type="none" w="med" len="med"/>
-                      <a:tailEnd type="none" w="med" len="med"/>
-                    </a:lnR>
-                    <a:lnT w="12700" cap="flat" cmpd="sng" algn="ctr">
-                      <a:solidFill>
-                        <a:srgbClr val="CBCBCB"/>
-                      </a:solidFill>
-                      <a:prstDash val="solid"/>
-                      <a:round/>
-                      <a:headEnd type="none" w="med" len="med"/>
-                      <a:tailEnd type="none" w="med" len="med"/>
-                    </a:lnT>
-                    <a:lnB w="12700" cap="flat" cmpd="sng" algn="ctr">
-                      <a:solidFill>
-                        <a:srgbClr val="C4C7C6"/>
-                      </a:solidFill>
-                      <a:prstDash val="solid"/>
-                      <a:round/>
-                      <a:headEnd type="none" w="med" len="med"/>
-                      <a:tailEnd type="none" w="med" len="med"/>
-                    </a:lnB>
-                    <a:solidFill>
-                      <a:srgbClr val="F6FAF9"/>
-                    </a:solidFill>
-                  </a:tcPr>
-                </a:tc>
-                <a:tc>
-                  <a:txBody>
-                    <a:bodyPr/>
-                    <a:lstStyle/>
-                    <a:p>
-                      <a:pPr indent="0" marL="0">
-                        <a:lnSpc>
-                          <a:spcPts val="1540"/>
-                        </a:lnSpc>
-                        <a:buNone/>
-                      </a:pPr>
-                      <a:r>
-                        <a:rPr lang="en-US" sz="1100" dirty="0">
-                          <a:solidFill>
-                            <a:srgbClr val="B45309"/>
-                          </a:solidFill>
-                          <a:latin typeface="Sarabun" pitchFamily="34" charset="0"/>
-                          <a:ea typeface="Sarabun" pitchFamily="34" charset="-122"/>
-                          <a:cs typeface="Sarabun" pitchFamily="34" charset="-120"/>
-                        </a:rPr>
-                        <a:t>Round 2</a:t>
+                        <a:t>การรับของเข้าคลังแบบนำเข้าไฟล์จำนวนมาก ตอนนี้เป็นเพียงปุ่มตัวอย่าง ยังไม่สามารถนำเข้าไฟล์จริงได้</a:t>
                       </a:r>
                       <a:endParaRPr lang="en-US" sz="1100" dirty="0">
                         <a:latin typeface="Sarabun" charset="0"/>
@@ -13901,9 +14307,9 @@
 </p:sld>
 </file>
 
-<file path=ppt/slides/slide21.xml><?xml version="1.0" encoding="utf-8"?>
+<file path=ppt/slides/slide22.xml><?xml version="1.0" encoding="utf-8"?>
 <p:sld xmlns:a="http://schemas.openxmlformats.org/drawingml/2006/main" xmlns:r="http://schemas.openxmlformats.org/officeDocument/2006/relationships" xmlns:p="http://schemas.openxmlformats.org/presentationml/2006/main">
-  <p:cSld name="Slide 21">
+  <p:cSld name="Slide 22">
     <p:bg>
       <p:bgPr>
         <a:solidFill>
@@ -14009,7 +14415,7 @@
                 <a:ea typeface="Kanit" pitchFamily="34" charset="-122"/>
                 <a:cs typeface="Kanit" pitchFamily="34" charset="-120"/>
               </a:rPr>
-              <a:t>ก่อนจะล็อก Schema จริง</a:t>
+              <a:t>ก่อนจะสรุปรายละเอียดระบบจริง</a:t>
             </a:r>
             <a:endParaRPr lang="en-US" sz="3000" dirty="0"/>
           </a:p>
@@ -14072,7 +14478,7 @@
         <p:spPr>
           <a:xfrm>
             <a:off x="1168400" y="1799530"/>
-            <a:ext cx="3463910" cy="231775"/>
+            <a:ext cx="3391249" cy="231775"/>
           </a:xfrm>
           <a:prstGeom prst="rect">
             <a:avLst/>
@@ -14101,7 +14507,7 @@
                 <a:ea typeface="Sarabun" pitchFamily="34" charset="-122"/>
                 <a:cs typeface="Sarabun" pitchFamily="34" charset="-120"/>
               </a:rPr>
-              <a:t>ยืนยัน Identity ผู้ขอเบิก</a:t>
+              <a:t>การแยกคำขอรายบุคคล</a:t>
             </a:r>
             <a:endParaRPr lang="en-US" sz="1300" dirty="0"/>
           </a:p>
@@ -14116,7 +14522,7 @@
         <p:spPr>
           <a:xfrm>
             <a:off x="1168400" y="2031305"/>
-            <a:ext cx="4035623" cy="215205"/>
+            <a:ext cx="3950970" cy="215205"/>
           </a:xfrm>
           <a:prstGeom prst="rect">
             <a:avLst/>
@@ -14145,7 +14551,7 @@
                 <a:ea typeface="Sarabun" pitchFamily="34" charset="-122"/>
                 <a:cs typeface="Sarabun" pitchFamily="34" charset="-120"/>
               </a:rPr>
-              <a:t>จะจำลอง login รายบุคคลในรอบถัดไปหรือไม่ (Round 11)</a:t>
+              <a:t>ต้องการให้ระบบแยกให้เห็นเฉพาะคำขอของตัวเองหรือไม่</a:t>
             </a:r>
             <a:endParaRPr lang="en-US" sz="1150" dirty="0"/>
           </a:p>
@@ -14208,7 +14614,7 @@
         <p:spPr>
           <a:xfrm>
             <a:off x="1168400" y="2360811"/>
-            <a:ext cx="3504073" cy="231775"/>
+            <a:ext cx="3717252" cy="231775"/>
           </a:xfrm>
           <a:prstGeom prst="rect">
             <a:avLst/>
@@ -14237,7 +14643,7 @@
                 <a:ea typeface="Sarabun" pitchFamily="34" charset="-122"/>
                 <a:cs typeface="Sarabun" pitchFamily="34" charset="-120"/>
               </a:rPr>
-              <a:t>ยืนยันฟิลด์ “จังหวัด”</a:t>
+              <a:t>ข้อมูลจังหวัด</a:t>
             </a:r>
             <a:endParaRPr lang="en-US" sz="1300" dirty="0"/>
           </a:p>
@@ -14252,7 +14658,7 @@
         <p:spPr>
           <a:xfrm>
             <a:off x="1168400" y="2592586"/>
-            <a:ext cx="4082415" cy="215205"/>
+            <a:ext cx="4330779" cy="215205"/>
           </a:xfrm>
           <a:prstGeom prst="rect">
             <a:avLst/>
@@ -14281,7 +14687,7 @@
                 <a:ea typeface="Sarabun" pitchFamily="34" charset="-122"/>
                 <a:cs typeface="Sarabun" pitchFamily="34" charset="-120"/>
               </a:rPr>
-              <a:t>เพิ่มแยกต่างหากในฟอร์มขอเบิกเพื่อกรองแม่นยำขึ้นหรือไม่</a:t>
+              <a:t>ต้องการเพิ่มช่องระบุจังหวัดแยกต่างหากในฟอร์มขอเบิกหรือไม่</a:t>
             </a:r>
             <a:endParaRPr lang="en-US" sz="1150" dirty="0"/>
           </a:p>
@@ -14344,7 +14750,7 @@
         <p:spPr>
           <a:xfrm>
             <a:off x="1168400" y="2922091"/>
-            <a:ext cx="3801870" cy="231775"/>
+            <a:ext cx="4970167" cy="231775"/>
           </a:xfrm>
           <a:prstGeom prst="rect">
             <a:avLst/>
@@ -14373,7 +14779,7 @@
                 <a:ea typeface="Sarabun" pitchFamily="34" charset="-122"/>
                 <a:cs typeface="Sarabun" pitchFamily="34" charset="-120"/>
               </a:rPr>
-              <a:t>ยืนยันตัวเลข Config</a:t>
+              <a:t>ตัวเลขที่ใช้ในระบบ</a:t>
             </a:r>
             <a:endParaRPr lang="en-US" sz="1300" dirty="0"/>
           </a:p>
@@ -14388,7 +14794,7 @@
         <p:spPr>
           <a:xfrm>
             <a:off x="1168400" y="3153866"/>
-            <a:ext cx="4429363" cy="215205"/>
+            <a:ext cx="5790486" cy="215205"/>
           </a:xfrm>
           <a:prstGeom prst="rect">
             <a:avLst/>
@@ -14417,7 +14823,7 @@
                 <a:ea typeface="Sarabun" pitchFamily="34" charset="-122"/>
                 <a:cs typeface="Sarabun" pitchFamily="34" charset="-120"/>
               </a:rPr>
-              <a:t>วันหมดอายุร่างทดแทน (14 วัน) และวันเกินกำหนดซ่อม (30 วัน)</a:t>
+              <a:t>วันหมดอายุคำขอทดแทน (ตัวอย่าง 14 วัน) และวันเกินกำหนดซ่อม (ตัวอย่าง 30 วัน)</a:t>
             </a:r>
             <a:endParaRPr lang="en-US" sz="1150" dirty="0"/>
           </a:p>
@@ -14480,7 +14886,7 @@
         <p:spPr>
           <a:xfrm>
             <a:off x="1168400" y="3483372"/>
-            <a:ext cx="3314501" cy="231775"/>
+            <a:ext cx="3527476" cy="231775"/>
           </a:xfrm>
           <a:prstGeom prst="rect">
             <a:avLst/>
@@ -14509,7 +14915,7 @@
                 <a:ea typeface="Sarabun" pitchFamily="34" charset="-122"/>
                 <a:cs typeface="Sarabun" pitchFamily="34" charset="-120"/>
               </a:rPr>
-              <a:t>ยืนยัน Scope เพิ่มเติม</a:t>
+              <a:t>รายละเอียดเพิ่มเติม</a:t>
             </a:r>
             <a:endParaRPr lang="en-US" sz="1300" dirty="0"/>
           </a:p>
@@ -14524,7 +14930,7 @@
         <p:spPr>
           <a:xfrm>
             <a:off x="1168400" y="3715147"/>
-            <a:ext cx="3861554" cy="215205"/>
+            <a:ext cx="4109680" cy="215205"/>
           </a:xfrm>
           <a:prstGeom prst="rect">
             <a:avLst/>
@@ -14553,7 +14959,7 @@
                 <a:ea typeface="Sarabun" pitchFamily="34" charset="-122"/>
                 <a:cs typeface="Sarabun" pitchFamily="34" charset="-120"/>
               </a:rPr>
-              <a:t>เช่น การอนุมัติ “ใช้งานภายใน” และรายชื่อ Vendor จริง</a:t>
+              <a:t>เช่น ขั้นตอนอนุมัติ “ใช้งานภายใน” และรายชื่อร้านซ่อมจริง</a:t>
             </a:r>
             <a:endParaRPr lang="en-US" sz="1150" dirty="0"/>
           </a:p>
@@ -14597,7 +15003,7 @@
                 <a:ea typeface="Sarabun" pitchFamily="34" charset="-122"/>
                 <a:cs typeface="Sarabun" pitchFamily="34" charset="-120"/>
               </a:rPr>
-              <a:t>เมื่อ confirm ครบทุกข้อ → เริ่มเขียน Prompt สั่งงานสำหรับ Claude Code CLI (ยังไม่ใช่ production code)</a:t>
+              <a:t>เมื่อตกลงกันครบทุกข้อแล้ว ทีมงานจะเริ่มพัฒนาระบบจริงในขั้นตอนถัดไป</a:t>
             </a:r>
             <a:endParaRPr lang="en-US" sz="1400" dirty="0"/>
           </a:p>
@@ -17155,7 +17561,7 @@
         <p:spPr>
           <a:xfrm>
             <a:off x="7874000" y="1960761"/>
-            <a:ext cx="2709300" cy="231775"/>
+            <a:ext cx="2762441" cy="231775"/>
           </a:xfrm>
           <a:prstGeom prst="rect">
             <a:avLst/>
@@ -17199,7 +17605,7 @@
         <p:spPr>
           <a:xfrm>
             <a:off x="7874000" y="2192536"/>
-            <a:ext cx="3156466" cy="215205"/>
+            <a:ext cx="3218378" cy="215205"/>
           </a:xfrm>
           <a:prstGeom prst="rect">
             <a:avLst/>
@@ -17228,7 +17634,7 @@
                 <a:ea typeface="Sarabun" pitchFamily="34" charset="-122"/>
                 <a:cs typeface="Sarabun" pitchFamily="34" charset="-120"/>
               </a:rPr>
-              <a:t>label เปลี่ยนอัตโนมัติตามวัตถุประสงค์ที่เลือก</a:t>
+              <a:t>ชื่อช่องจะเปลี่ยนเองตามวัตถุประสงค์ที่เลือกไว้</a:t>
             </a:r>
             <a:endParaRPr lang="en-US" sz="1150" dirty="0"/>
           </a:p>
@@ -17291,7 +17697,7 @@
         <p:spPr>
           <a:xfrm>
             <a:off x="7874000" y="2496641"/>
-            <a:ext cx="2773887" cy="231775"/>
+            <a:ext cx="2667502" cy="231775"/>
           </a:xfrm>
           <a:prstGeom prst="rect">
             <a:avLst/>
@@ -17335,7 +17741,7 @@
         <p:spPr>
           <a:xfrm>
             <a:off x="7874000" y="2728416"/>
-            <a:ext cx="3231713" cy="215205"/>
+            <a:ext cx="3107769" cy="215205"/>
           </a:xfrm>
           <a:prstGeom prst="rect">
             <a:avLst/>
@@ -17364,7 +17770,7 @@
                 <a:ea typeface="Sarabun" pitchFamily="34" charset="-122"/>
                 <a:cs typeface="Sarabun" pitchFamily="34" charset="-120"/>
               </a:rPr>
-              <a:t>บังคับกรอก แยกจาก “วันที่ขอเบิก” (Round 7)</a:t>
+              <a:t>ต้องกรอกทุกครั้ง เป็นคนละวันกับวันที่ขอเบิก</a:t>
             </a:r>
             <a:endParaRPr lang="en-US" sz="1150" dirty="0"/>
           </a:p>
@@ -17427,7 +17833,7 @@
         <p:spPr>
           <a:xfrm>
             <a:off x="7874000" y="3032522"/>
-            <a:ext cx="3003214" cy="231775"/>
+            <a:ext cx="3248278" cy="231775"/>
           </a:xfrm>
           <a:prstGeom prst="rect">
             <a:avLst/>
@@ -17471,7 +17877,7 @@
         <p:spPr>
           <a:xfrm>
             <a:off x="7874000" y="3264297"/>
-            <a:ext cx="3498890" cy="215205"/>
+            <a:ext cx="3784402" cy="215205"/>
           </a:xfrm>
           <a:prstGeom prst="rect">
             <a:avLst/>
@@ -17500,7 +17906,7 @@
                 <a:ea typeface="Sarabun" pitchFamily="34" charset="-122"/>
                 <a:cs typeface="Sarabun" pitchFamily="34" charset="-120"/>
               </a:rPr>
-              <a:t>รายการกรองตาม scope ของวัตถุประสงค์อัตโนมัติ</a:t>
+              <a:t>กรองให้เห็นเฉพาะอุปกรณ์ที่ตรงกับวัตถุประสงค์ที่เลือก</a:t>
             </a:r>
             <a:endParaRPr lang="en-US" sz="1150" dirty="0"/>
           </a:p>
@@ -17971,7 +18377,7 @@
         <p:spPr>
           <a:xfrm>
             <a:off x="7874000" y="5176044"/>
-            <a:ext cx="2609557" cy="231775"/>
+            <a:ext cx="2502457" cy="231775"/>
           </a:xfrm>
           <a:prstGeom prst="rect">
             <a:avLst/>
@@ -18015,7 +18421,7 @@
         <p:spPr>
           <a:xfrm>
             <a:off x="7874000" y="5407819"/>
-            <a:ext cx="3040261" cy="215205"/>
+            <a:ext cx="2915483" cy="215205"/>
           </a:xfrm>
           <a:prstGeom prst="rect">
             <a:avLst/>
@@ -18044,7 +18450,7 @@
                 <a:ea typeface="Sarabun" pitchFamily="34" charset="-122"/>
                 <a:cs typeface="Sarabun" pitchFamily="34" charset="-120"/>
               </a:rPr>
-              <a:t>บันทึก “วันที่ขอเบิก” อัตโนมัติจากเวลาที่กด</a:t>
+              <a:t>ระบบจะบันทึกวันที่กดส่งคำขอให้อัตโนมัติ</a:t>
             </a:r>
             <a:endParaRPr lang="en-US" sz="1150" dirty="0"/>
           </a:p>
@@ -18164,7 +18570,7 @@
                 <a:ea typeface="Kanit" pitchFamily="34" charset="-122"/>
                 <a:cs typeface="Kanit" pitchFamily="34" charset="-120"/>
               </a:rPr>
-              <a:t>ส่วนเสริม · ROUND 8–11</a:t>
+              <a:t>ส่วนเสริม</a:t>
             </a:r>
             <a:endParaRPr lang="en-US" sz="1300" dirty="0"/>
           </a:p>
@@ -18331,7 +18737,7 @@
         <p:spPr>
           <a:xfrm>
             <a:off x="7874000" y="1424880"/>
-            <a:ext cx="2845935" cy="231775"/>
+            <a:ext cx="3733297" cy="231775"/>
           </a:xfrm>
           <a:prstGeom prst="rect">
             <a:avLst/>
@@ -18360,7 +18766,7 @@
                 <a:ea typeface="Sarabun" pitchFamily="34" charset="-122"/>
                 <a:cs typeface="Sarabun" pitchFamily="34" charset="-120"/>
               </a:rPr>
-              <a:t>ช่องค้นหาแบบ Live Filter</a:t>
+              <a:t>ช่องค้นหา</a:t>
             </a:r>
             <a:endParaRPr lang="en-US" sz="1300" dirty="0"/>
           </a:p>
@@ -18375,7 +18781,7 @@
         <p:spPr>
           <a:xfrm>
             <a:off x="7874000" y="1656655"/>
-            <a:ext cx="3315653" cy="215205"/>
+            <a:ext cx="4318000" cy="215205"/>
           </a:xfrm>
           <a:prstGeom prst="rect">
             <a:avLst/>
@@ -18404,7 +18810,7 @@
                 <a:ea typeface="Sarabun" pitchFamily="34" charset="-122"/>
                 <a:cs typeface="Sarabun" pitchFamily="34" charset="-120"/>
               </a:rPr>
-              <a:t>ค้นเลขคำขอ/ชื่อผู้ขอ/โครงการ/รายการอุปกรณ์</a:t>
+              <a:t>พิมพ์เลขคำขอ ชื่อผู้ขอ โครงการ หรืออุปกรณ์ แล้วกรองให้ทันที</a:t>
             </a:r>
             <a:endParaRPr lang="en-US" sz="1150" dirty="0"/>
           </a:p>
@@ -18603,7 +19009,7 @@
         <p:spPr>
           <a:xfrm>
             <a:off x="7874000" y="2496641"/>
-            <a:ext cx="3459720" cy="231775"/>
+            <a:ext cx="2707052" cy="231775"/>
           </a:xfrm>
           <a:prstGeom prst="rect">
             <a:avLst/>
@@ -18647,7 +19053,7 @@
         <p:spPr>
           <a:xfrm>
             <a:off x="7874000" y="2728416"/>
-            <a:ext cx="4030742" cy="215205"/>
+            <a:ext cx="3153847" cy="215205"/>
           </a:xfrm>
           <a:prstGeom prst="rect">
             <a:avLst/>
@@ -18676,7 +19082,7 @@
                 <a:ea typeface="Sarabun" pitchFamily="34" charset="-122"/>
                 <a:cs typeface="Sarabun" pitchFamily="34" charset="-120"/>
               </a:rPr>
-              <a:t>รอจ่ายของ / เบิกแล้ว / หมดอายุ / ยกเลิกแล้ว (Round 11)</a:t>
+              <a:t>รอจ่ายของ / เบิกแล้ว / หมดอายุ / ยกเลิกแล้ว</a:t>
             </a:r>
             <a:endParaRPr lang="en-US" sz="1150" dirty="0"/>
           </a:p>
@@ -18739,7 +19145,7 @@
         <p:spPr>
           <a:xfrm>
             <a:off x="7874000" y="3032522"/>
-            <a:ext cx="2432351" cy="231775"/>
+            <a:ext cx="3072604" cy="231775"/>
           </a:xfrm>
           <a:prstGeom prst="rect">
             <a:avLst/>
@@ -18768,7 +19174,7 @@
                 <a:ea typeface="Sarabun" pitchFamily="34" charset="-122"/>
                 <a:cs typeface="Sarabun" pitchFamily="34" charset="-120"/>
               </a:rPr>
-              <a:t>ตัวกรองทำงานร่วมกันได้ (AND)</a:t>
+              <a:t>ใช้ตัวกรองหลายตัวพร้อมกันได้</a:t>
             </a:r>
             <a:endParaRPr lang="en-US" sz="1300" dirty="0"/>
           </a:p>
@@ -18783,7 +19189,7 @@
         <p:spPr>
           <a:xfrm>
             <a:off x="7874000" y="3264297"/>
-            <a:ext cx="2833807" cy="215205"/>
+            <a:ext cx="3579733" cy="215205"/>
           </a:xfrm>
           <a:prstGeom prst="rect">
             <a:avLst/>
@@ -18812,7 +19218,7 @@
                 <a:ea typeface="Sarabun" pitchFamily="34" charset="-122"/>
                 <a:cs typeface="Sarabun" pitchFamily="34" charset="-120"/>
               </a:rPr>
-              <a:t>พร้อมข้อความ “แสดง X จาก Y รายการ”</a:t>
+              <a:t>ระบบจะแสดงเฉพาะรายการที่ตรงทุกเงื่อนไขที่เลือก</a:t>
             </a:r>
             <a:endParaRPr lang="en-US" sz="1150" dirty="0"/>
           </a:p>
@@ -18875,7 +19281,7 @@
         <p:spPr>
           <a:xfrm>
             <a:off x="7874000" y="3568402"/>
-            <a:ext cx="2310227" cy="231775"/>
+            <a:ext cx="2114319" cy="231775"/>
           </a:xfrm>
           <a:prstGeom prst="rect">
             <a:avLst/>
@@ -18919,7 +19325,7 @@
         <p:spPr>
           <a:xfrm>
             <a:off x="7874000" y="3800177"/>
-            <a:ext cx="2691527" cy="215205"/>
+            <a:ext cx="2463284" cy="215205"/>
           </a:xfrm>
           <a:prstGeom prst="rect">
             <a:avLst/>
@@ -18948,7 +19354,7 @@
                 <a:ea typeface="Sarabun" pitchFamily="34" charset="-122"/>
                 <a:cs typeface="Sarabun" pitchFamily="34" charset="-120"/>
               </a:rPr>
-              <a:t>ติดตามสถานะยืนยันรับของ (Round 8)</a:t>
+              <a:t>ดูได้ว่าผู้ขอเบิกได้รับของแล้วหรือยัง</a:t>
             </a:r>
             <a:endParaRPr lang="en-US" sz="1150" dirty="0"/>
           </a:p>
@@ -19011,7 +19417,7 @@
         <p:spPr>
           <a:xfrm>
             <a:off x="7874000" y="4104283"/>
-            <a:ext cx="2296124" cy="231775"/>
+            <a:ext cx="2804648" cy="231775"/>
           </a:xfrm>
           <a:prstGeom prst="rect">
             <a:avLst/>
@@ -19055,7 +19461,7 @@
         <p:spPr>
           <a:xfrm>
             <a:off x="7874000" y="4336058"/>
-            <a:ext cx="2675096" cy="215205"/>
+            <a:ext cx="3267551" cy="215205"/>
           </a:xfrm>
           <a:prstGeom prst="rect">
             <a:avLst/>
@@ -19084,7 +19490,7 @@
                 <a:ea typeface="Sarabun" pitchFamily="34" charset="-122"/>
                 <a:cs typeface="Sarabun" pitchFamily="34" charset="-120"/>
               </a:rPr>
-              <a:t>แจ้งคืนได้เองจากตารางเดิม (Round 9)</a:t>
+              <a:t>กดแจ้งคืนได้จากตารางนี้เลย ไม่ต้องเปิดหน้าอื่น</a:t>
             </a:r>
             <a:endParaRPr lang="en-US" sz="1150" dirty="0"/>
           </a:p>
@@ -19147,7 +19553,7 @@
         <p:spPr>
           <a:xfrm>
             <a:off x="7874000" y="4640163"/>
-            <a:ext cx="2627135" cy="231775"/>
+            <a:ext cx="2994220" cy="231775"/>
           </a:xfrm>
           <a:prstGeom prst="rect">
             <a:avLst/>
@@ -19176,7 +19582,7 @@
                 <a:ea typeface="Sarabun" pitchFamily="34" charset="-122"/>
                 <a:cs typeface="Sarabun" pitchFamily="34" charset="-120"/>
               </a:rPr>
-              <a:t>ป้ายคำขอทดแทนอัตโนมัติ</a:t>
+              <a:t>ป้ายคำขอทดแทน</a:t>
             </a:r>
             <a:endParaRPr lang="en-US" sz="1300" dirty="0"/>
           </a:p>
@@ -19191,7 +19597,7 @@
         <p:spPr>
           <a:xfrm>
             <a:off x="7874000" y="4871938"/>
-            <a:ext cx="3060740" cy="215205"/>
+            <a:ext cx="3488412" cy="215205"/>
           </a:xfrm>
           <a:prstGeom prst="rect">
             <a:avLst/>
@@ -19220,7 +19626,7 @@
                 <a:ea typeface="Sarabun" pitchFamily="34" charset="-122"/>
                 <a:cs typeface="Sarabun" pitchFamily="34" charset="-120"/>
               </a:rPr>
-              <a:t>ขึ้นเมื่อคืนของเสียและขอเครื่องทดแทนทันที</a:t>
+              <a:t>ขึ้นเมื่อคืนของเสียแล้วขอเครื่องใหม่มาใช้แทนทันที</a:t>
             </a:r>
             <a:endParaRPr lang="en-US" sz="1150" dirty="0"/>
           </a:p>
@@ -19507,7 +19913,7 @@
         <p:spPr>
           <a:xfrm>
             <a:off x="7874000" y="1424880"/>
-            <a:ext cx="2201185" cy="231775"/>
+            <a:ext cx="2601586" cy="231775"/>
           </a:xfrm>
           <a:prstGeom prst="rect">
             <a:avLst/>
@@ -19551,7 +19957,7 @@
         <p:spPr>
           <a:xfrm>
             <a:off x="7874000" y="1656655"/>
-            <a:ext cx="2564487" cy="215205"/>
+            <a:ext cx="3030974" cy="215205"/>
           </a:xfrm>
           <a:prstGeom prst="rect">
             <a:avLst/>
@@ -19580,7 +19986,7 @@
                 <a:ea typeface="Sarabun" pitchFamily="34" charset="-122"/>
                 <a:cs typeface="Sarabun" pitchFamily="34" charset="-120"/>
               </a:rPr>
-              <a:t>แสดงรายละเอียดคำขอที่เลือกจากคิว</a:t>
+              <a:t>แสดงรายละเอียดคำขอที่กำลังจะจ่ายของให้</a:t>
             </a:r>
             <a:endParaRPr lang="en-US" sz="1150" dirty="0"/>
           </a:p>
@@ -19643,7 +20049,7 @@
         <p:spPr>
           <a:xfrm>
             <a:off x="7874000" y="1960761"/>
-            <a:ext cx="2496734" cy="231775"/>
+            <a:ext cx="2900405" cy="231775"/>
           </a:xfrm>
           <a:prstGeom prst="rect">
             <a:avLst/>
@@ -19687,7 +20093,7 @@
         <p:spPr>
           <a:xfrm>
             <a:off x="7874000" y="2192536"/>
-            <a:ext cx="2908816" cy="215205"/>
+            <a:ext cx="3379113" cy="215205"/>
           </a:xfrm>
           <a:prstGeom prst="rect">
             <a:avLst/>
@@ -19716,7 +20122,7 @@
                 <a:ea typeface="Sarabun" pitchFamily="34" charset="-122"/>
                 <a:cs typeface="Sarabun" pitchFamily="34" charset="-120"/>
               </a:rPr>
-              <a:t>แนะนำจากประวัติจ่าย/รับคืนจริง ไม่ใช่สุ่ม</a:t>
+              <a:t>ดูจากประวัติจริงว่าเคยส่งเครื่องนี้ไปไซต์นี้มาก่อน</a:t>
             </a:r>
             <a:endParaRPr lang="en-US" sz="1150" dirty="0"/>
           </a:p>
@@ -19779,7 +20185,7 @@
         <p:spPr>
           <a:xfrm>
             <a:off x="7874000" y="2496641"/>
-            <a:ext cx="2235114" cy="231775"/>
+            <a:ext cx="2452381" cy="231775"/>
           </a:xfrm>
           <a:prstGeom prst="rect">
             <a:avLst/>
@@ -19823,7 +20229,7 @@
         <p:spPr>
           <a:xfrm>
             <a:off x="7874000" y="2728416"/>
-            <a:ext cx="2604016" cy="215205"/>
+            <a:ext cx="2857143" cy="215205"/>
           </a:xfrm>
           <a:prstGeom prst="rect">
             <a:avLst/>
@@ -19852,7 +20258,7 @@
                 <a:ea typeface="Sarabun" pitchFamily="34" charset="-122"/>
                 <a:cs typeface="Sarabun" pitchFamily="34" charset="-120"/>
               </a:rPr>
-              <a:t>เทียบภาคที่ตั้งปัจจุบันกับไซต์ที่ขอเบิก</a:t>
+              <a:t>เครื่องอยู่ในพื้นที่ใกล้เคียงกับไซต์ที่ขอเบิก</a:t>
             </a:r>
             <a:endParaRPr lang="en-US" sz="1150" dirty="0"/>
           </a:p>
@@ -19915,7 +20321,7 @@
         <p:spPr>
           <a:xfrm>
             <a:off x="7874000" y="3032522"/>
-            <a:ext cx="2916436" cy="231775"/>
+            <a:ext cx="3664826" cy="231775"/>
           </a:xfrm>
           <a:prstGeom prst="rect">
             <a:avLst/>
@@ -19944,7 +20350,7 @@
                 <a:ea typeface="Sarabun" pitchFamily="34" charset="-122"/>
                 <a:cs typeface="Sarabun" pitchFamily="34" charset="-120"/>
               </a:rPr>
-              <a:t>ตาราง Radio เลือก Serial Number</a:t>
+              <a:t>ตารางเลือกเครื่อง</a:t>
             </a:r>
             <a:endParaRPr lang="en-US" sz="1300" dirty="0"/>
           </a:p>
@@ -19959,7 +20365,7 @@
         <p:spPr>
           <a:xfrm>
             <a:off x="7874000" y="3264297"/>
-            <a:ext cx="2916436" cy="215205"/>
+            <a:ext cx="4269700" cy="215205"/>
           </a:xfrm>
           <a:prstGeom prst="rect">
             <a:avLst/>
@@ -19988,7 +20394,7 @@
                 <a:ea typeface="Sarabun" pitchFamily="34" charset="-122"/>
                 <a:cs typeface="Sarabun" pitchFamily="34" charset="-120"/>
               </a:rPr>
-              <a:t>เรียงแนะนำอัตโนมัติ แต่ override ได้เสมอ</a:t>
+              <a:t>ระบบเรียงเครื่องแนะนำไว้บนสุด แต่เลือกเครื่องอื่นเองได้เสมอ</a:t>
             </a:r>
             <a:endParaRPr lang="en-US" sz="1150" dirty="0"/>
           </a:p>
@@ -20051,7 +20457,7 @@
         <p:spPr>
           <a:xfrm>
             <a:off x="7874000" y="3568402"/>
-            <a:ext cx="2927033" cy="231775"/>
+            <a:ext cx="2696423" cy="231775"/>
           </a:xfrm>
           <a:prstGeom prst="rect">
             <a:avLst/>
@@ -20095,7 +20501,7 @@
         <p:spPr>
           <a:xfrm>
             <a:off x="7874000" y="3800177"/>
-            <a:ext cx="2512370" cy="215205"/>
+            <a:ext cx="3141464" cy="215205"/>
           </a:xfrm>
           <a:prstGeom prst="rect">
             <a:avLst/>
@@ -20124,7 +20530,7 @@
                 <a:ea typeface="Sarabun" pitchFamily="34" charset="-122"/>
                 <a:cs typeface="Sarabun" pitchFamily="34" charset="-120"/>
               </a:rPr>
-              <a:t>ชี้เป้าเท่านั้น ไม่ข้ามขั้นตอนรับคืนจริง</a:t>
+              <a:t>แจ้งเตือนเฉยๆ ยังต้องรับคืนให้เสร็จก่อนเสมอ</a:t>
             </a:r>
             <a:endParaRPr lang="en-US" sz="1150" dirty="0"/>
           </a:p>
@@ -20187,7 +20593,7 @@
         <p:spPr>
           <a:xfrm>
             <a:off x="7874000" y="4104283"/>
-            <a:ext cx="2439607" cy="231775"/>
+            <a:ext cx="3253286" cy="231775"/>
           </a:xfrm>
           <a:prstGeom prst="rect">
             <a:avLst/>
@@ -20231,7 +20637,7 @@
         <p:spPr>
           <a:xfrm>
             <a:off x="7874000" y="4336058"/>
-            <a:ext cx="2842260" cy="215205"/>
+            <a:ext cx="3790236" cy="215205"/>
           </a:xfrm>
           <a:prstGeom prst="rect">
             <a:avLst/>
@@ -20260,7 +20666,7 @@
                 <a:ea typeface="Sarabun" pitchFamily="34" charset="-122"/>
                 <a:cs typeface="Sarabun" pitchFamily="34" charset="-120"/>
               </a:rPr>
-              <a:t>อัปเดตสถานะและผูกวันครบกำหนดทันที</a:t>
+              <a:t>เปลี่ยนสถานะเครื่องและกำหนดวันครบกำหนดคืนทันที</a:t>
             </a:r>
             <a:endParaRPr lang="en-US" sz="1150" dirty="0"/>
           </a:p>
@@ -20380,7 +20786,7 @@
                 <a:ea typeface="Kanit" pitchFamily="34" charset="-122"/>
                 <a:cs typeface="Kanit" pitchFamily="34" charset="-120"/>
               </a:rPr>
-              <a:t>ส่วนเสริม · ROUND 8</a:t>
+              <a:t>ส่วนเสริม</a:t>
             </a:r>
             <a:endParaRPr lang="en-US" sz="1300" dirty="0"/>
           </a:p>
@@ -20547,7 +20953,7 @@
         <p:spPr>
           <a:xfrm>
             <a:off x="7874000" y="1424880"/>
-            <a:ext cx="2315337" cy="231775"/>
+            <a:ext cx="2700000" cy="231775"/>
           </a:xfrm>
           <a:prstGeom prst="rect">
             <a:avLst/>
@@ -20591,7 +20997,7 @@
         <p:spPr>
           <a:xfrm>
             <a:off x="7874000" y="1656655"/>
-            <a:ext cx="2697480" cy="215205"/>
+            <a:ext cx="3145631" cy="215205"/>
           </a:xfrm>
           <a:prstGeom prst="rect">
             <a:avLst/>
@@ -20620,7 +21026,7 @@
                 <a:ea typeface="Sarabun" pitchFamily="34" charset="-122"/>
                 <a:cs typeface="Sarabun" pitchFamily="34" charset="-120"/>
               </a:rPr>
-              <a:t>เทียบทีละ Asset Tag / Serial Number</a:t>
+              <a:t>ตรวจเช็กทีละชิ้นว่าตรงกับที่จ่ายไปจริงหรือไม่</a:t>
             </a:r>
             <a:endParaRPr lang="en-US" sz="1150" dirty="0"/>
           </a:p>
@@ -20955,7 +21361,7 @@
         <p:spPr>
           <a:xfrm>
             <a:off x="7874000" y="3032522"/>
-            <a:ext cx="2497960" cy="231775"/>
+            <a:ext cx="2901018" cy="231775"/>
           </a:xfrm>
           <a:prstGeom prst="rect">
             <a:avLst/>
@@ -20999,7 +21405,7 @@
         <p:spPr>
           <a:xfrm>
             <a:off x="7874000" y="3264297"/>
-            <a:ext cx="2910245" cy="215205"/>
+            <a:ext cx="3379827" cy="215205"/>
           </a:xfrm>
           <a:prstGeom prst="rect">
             <a:avLst/>
@@ -21028,7 +21434,7 @@
                 <a:ea typeface="Sarabun" pitchFamily="34" charset="-122"/>
                 <a:cs typeface="Sarabun" pitchFamily="34" charset="-120"/>
               </a:rPr>
-              <a:t>ผู้ขอเบิกเอง หรือ OPERATION บันทึกแทน</a:t>
+              <a:t>ผู้ขอเบิกกดเอง หรือเจ้าหน้าที่คลังช่วยบันทึกแทน</a:t>
             </a:r>
             <a:endParaRPr lang="en-US" sz="1150" dirty="0"/>
           </a:p>
@@ -21227,7 +21633,7 @@
         <p:spPr>
           <a:xfrm>
             <a:off x="7874000" y="4104283"/>
-            <a:ext cx="2010897" cy="231775"/>
+            <a:ext cx="2469345" cy="231775"/>
           </a:xfrm>
           <a:prstGeom prst="rect">
             <a:avLst/>
@@ -21271,7 +21677,7 @@
         <p:spPr>
           <a:xfrm>
             <a:off x="7874000" y="4336058"/>
-            <a:ext cx="2342793" cy="215205"/>
+            <a:ext cx="2876907" cy="215205"/>
           </a:xfrm>
           <a:prstGeom prst="rect">
             <a:avLst/>
@@ -21300,7 +21706,7 @@
                 <a:ea typeface="Sarabun" pitchFamily="34" charset="-122"/>
                 <a:cs typeface="Sarabun" pitchFamily="34" charset="-120"/>
               </a:rPr>
-              <a:t>ASSET_HISTORY อัตโนมัติทุกครั้ง</a:t>
+              <a:t>ระบบบันทึกไว้ในประวัติเครื่องให้อัตโนมัติ</a:t>
             </a:r>
             <a:endParaRPr lang="en-US" sz="1150" dirty="0"/>
           </a:p>
@@ -21730,10 +22136,10 @@
         <a:srgbClr val="5EEAD4"/>
       </a:accent3>
       <a:accent4>
-        <a:srgbClr val="114342"/>
+        <a:srgbClr val="B45309"/>
       </a:accent4>
       <a:accent5>
-        <a:srgbClr val="B45309"/>
+        <a:srgbClr val="114342"/>
       </a:accent5>
       <a:accent6>
         <a:srgbClr val="46605D"/>
